--- a/dist/weeks-대학원/컨셉트와프로세스_02주차_선행연구.pptx
+++ b/dist/weeks-대학원/컨셉트와프로세스_02주차_선행연구.pptx
@@ -20,9 +20,10 @@
     <p:sldId id="268" r:id="rId14"/>
     <p:sldId id="269" r:id="rId15"/>
     <p:sldId id="270" r:id="rId16"/>
+    <p:sldId id="271" r:id="rId17"/>
   </p:sldIdLst>
   <p:notesMasterIdLst>
-    <p:notesMasterId r:id="rId17"/>
+    <p:notesMasterId r:id="rId18"/>
   </p:notesMasterIdLst>
   <p:sldSz cx="12192000" cy="6858000"/>
   <p:notesSz cx="6858000" cy="12192000"/>
@@ -806,15 +807,21 @@
             <a:r>
               <a:rPr lang="en-US" dirty="0"/>
               <a:t>[말할 내용]
-정리표까지 하면 목록이 생깁니다. 목록은 아직 지도가 아니에요.
-세 단계로 지도를 만듭니다.
-첫째, 묶습니다. 비슷한 것끼리 모으세요. 같은 방법을 쓴 것, 같은 문제를 본 것, 같은 결론에 간 것. 묶다 보면 이 분야에 몇 개의 흐름이 있는지 보입니다.
-둘째, 축을 찾습니다. 묶음들을 갈라놓는 기준이 뭔지 보세요. 대개 두 개면 됩니다. 그 두 축으로 판을 만들고 논문들을 올려놓습니다.
-셋째, 빈칸을 찾습니다. 판 위에 아무도 없는 칸이 있을 겁니다. 그 자리가 후보입니다.
-다만 조심하실 게 있어요. 비어 있는 데는 이유가 있을 수 있습니다. 아무도 안 해서 빈 게 아니라 할 필요가 없어서 빈 거일 수도 있어요. 그래서 빈칸을 찾으면 왜 비어 있는지도 같이 생각하셔야 합니다.
-지난 회차에 계보도를 그렸지요. 같은 작업입니다. 그때는 이론의 계보였고 이번엔 내 주제의 지도입니다.
+정리표의 세 번째 칸을 조금 더 보겠습니다. 방법 칸입니다.
+여기를 한 줄로 적고 넘어가는 분이 많습니다. '인터뷰 연구' 이렇게요. 그러면 아무 쓸모가 없습니다.
+논문을 읽을 때 무엇을 알아냈는가보다 어떻게 알아냈는가를 보셔야 합니다. 결과는 그 사람 것이지만 방법은 내가 가져다 쓸 수 있거든요.
+다섯 가지를 적으세요.
+첫째, 무엇을 자료로 삼았는가. 몇 명인지, 어떤 사람인지, 어떻게 골랐는지. 스무 명이면 왜 스무 명인지가 적혀 있을 겁니다.
+둘째, 어떻게 모았는가. 인터뷰면 한 번에 몇 분씩 몇 회를 어디서 했는지. 실험이면 조건이 무엇이고 순서가 어떻게 되는지.
+셋째 — 이게 가장 안 보시는 겁니다 — 본 조사 전에 무엇을 했는가. 예비조사요. 파일럿이라고도 하지요.
+좋은 논문에는 이게 적혀 있습니다. 처음에 이렇게 해 봤더니 이런 문제가 있어서 이렇게 고쳤다. 그 대목이 제일 값집니다. 그 사람이 미리 실패해 준 거니까요.
+여러분이 앞으로 할 사전 리서치를 거기서 설계하시면 됩니다. 처음부터 혼자 만드실 필요가 없어요.
+넷째, 무엇을 기준으로 판단했는가. 분석 틀이 무엇이고 코딩 기준이 무엇이고 무엇을 측정했는지.
+다섯째, 무엇이 안 됐다고 적었는가. 한계 절입니다. 대충 읽고 넘기는 데인데 사실 여기가 내가 들어갈 자리예요. 본인이 못 했다고 적어 놓은 것을 내가 하면 되는 겁니다.
+정리하면 이렇습니다. 남의 논문에서 결론만 가져오면 인용 한 줄이 남고, 과정을 가져오면 내 연구 설계가 남습니다.
 [운영 메모]
-'빈칸에는 이유가 있을 수 있다'를 반드시 말할 것. 빈 곳을 찾았다고 바로 달려가는 것이 박사 초기의 전형적인 실수다.</a:t>
+교수님 지시로 넣은 장표다(2026-10-02). 학생들이 선행연구를 '내용 요약'으로만 읽는 것이 문제의 핵심이다. 3번(예비조사)을 특히 강조할 것 — 자기 사전 리서치를 설계할 때 그대로 쓰인다. 5번은 연구 질문을 세우는 자리와 직결된다.
+수업에서는 한 편을 띄워 놓고 방법 절을 함께 읽으며 다섯 가지를 짚어 보는 편이 빠르다.</a:t>
             </a:r>
             <a:endParaRPr lang="en-US" dirty="0"/>
           </a:p>
@@ -903,15 +910,15 @@
             <a:r>
               <a:rPr lang="en-US" dirty="0"/>
               <a:t>[말할 내용]
-이제 직접 하시겠습니다. 30분입니다.
-처음 5분. 자기 주제를 개념 두세 개로 쪼개서 적으세요. 한국어로 먼저 적으시면 됩니다.
-다음 10분. 영어 학술 용어를 찾습니다. 아까 말씀드린 방법으로요. 비슷한 논문 한 편을 찾아서 그 키워드를 봅니다. 여기서 막히시는 분이 많을 거예요. 손 드시면 같이 보겠습니다.
-다음 10분. 리뷰 논문을 찾고 눈덩이를 굴립니다. 목표는 후보 열 편입니다. 아직 읽지 마시고 목록만 만드세요.
-마지막 5분. 열 편에서 다섯 편으로 줄입니다. 초록만 보고 고르세요.
-오늘 여기까지 하시면 과제의 절반이 끝난 겁니다. 집에 가서 정리표를 채우시면 돼요.
-제가 계속 돌아다니겠습니다. 검색어가 안 나오면 그냥 손 드세요. 혼자 30분 고민하는 것보다 물어보는 게 빠릅니다.
+정리표까지 하면 목록이 생깁니다. 목록은 아직 지도가 아니에요.
+세 단계로 지도를 만듭니다.
+첫째, 묶습니다. 비슷한 것끼리 모으세요. 같은 방법을 쓴 것, 같은 문제를 본 것, 같은 결론에 간 것. 묶다 보면 이 분야에 몇 개의 흐름이 있는지 보입니다.
+둘째, 축을 찾습니다. 묶음들을 갈라놓는 기준이 뭔지 보세요. 대개 두 개면 됩니다. 그 두 축으로 판을 만들고 논문들을 올려놓습니다.
+셋째, 빈칸을 찾습니다. 판 위에 아무도 없는 칸이 있을 겁니다. 그 자리가 후보입니다.
+다만 조심하실 게 있어요. 비어 있는 데는 이유가 있을 수 있습니다. 아무도 안 해서 빈 게 아니라 할 필요가 없어서 빈 거일 수도 있어요. 그래서 빈칸을 찾으면 왜 비어 있는지도 같이 생각하셔야 합니다.
+지난 회차에 계보도를 그렸지요. 같은 작업입니다. 그때는 이론의 계보였고 이번엔 내 주제의 지도입니다.
 [운영 메모]
-유학생은 영어 용어 단계에서 오래 걸린다. 10분 지점에서 한 명씩 확인하고, 안 되는 학생은 교수가 직접 용어를 한두 개 던져 줄 것. 그래야 다음 단계로 넘어간다.</a:t>
+'빈칸에는 이유가 있을 수 있다'를 반드시 말할 것. 빈 곳을 찾았다고 바로 달려가는 것이 박사 초기의 전형적인 실수다.</a:t>
             </a:r>
             <a:endParaRPr lang="en-US" dirty="0"/>
           </a:p>
@@ -1000,12 +1007,15 @@
             <a:r>
               <a:rPr lang="en-US" dirty="0"/>
               <a:t>[말할 내용]
-오늘 확인하고 가는 것들입니다.
-앞의 넷은 오늘 수업 안에서 되었는지 보시는 것이고, 뒤의 넷은 다음 회차 준비입니다.
-세 번째를 특히 보세요. 도서관 원문 접근이 되는가. 이게 안 되면 다음 2주 동안 아무것도 못 합니다. 지금 확인하고 가세요. 안 되시는 분은 끝나고 남아 주세요.
-다음은 2주 뒤입니다. 미루면 전날에 몰립니다.
+이제 직접 하시겠습니다. 30분입니다.
+처음 5분. 자기 주제를 개념 두세 개로 쪼개서 적으세요. 한국어로 먼저 적으시면 됩니다.
+다음 10분. 영어 학술 용어를 찾습니다. 아까 말씀드린 방법으로요. 비슷한 논문 한 편을 찾아서 그 키워드를 봅니다. 여기서 막히시는 분이 많을 거예요. 손 드시면 같이 보겠습니다.
+다음 10분. 리뷰 논문을 찾고 눈덩이를 굴립니다. 목표는 후보 열 편입니다. 아직 읽지 마시고 목록만 만드세요.
+마지막 5분. 열 편에서 다섯 편으로 줄입니다. 초록만 보고 고르세요.
+오늘 여기까지 하시면 과제의 절반이 끝난 겁니다. 집에 가서 정리표를 채우시면 돼요.
+제가 계속 돌아다니겠습니다. 검색어가 안 나오면 그냥 손 드세요. 혼자 30분 고민하는 것보다 물어보는 게 빠릅니다.
 [운영 메모]
-도서관 접근 확인은 반드시 수업 안에서 시킬 것. 집에 가서 하라고 하면 2주 뒤에 '안 되더라'로 돌아온다.</a:t>
+유학생은 영어 용어 단계에서 오래 걸린다. 10분 지점에서 한 명씩 확인하고, 안 되는 학생은 교수가 직접 용어를 한두 개 던져 줄 것. 그래야 다음 단계로 넘어간다.</a:t>
             </a:r>
             <a:endParaRPr lang="en-US" dirty="0"/>
           </a:p>
@@ -1094,6 +1104,100 @@
             <a:r>
               <a:rPr lang="en-US" dirty="0"/>
               <a:t>[말할 내용]
+오늘 확인하고 가는 것들입니다.
+앞의 넷은 오늘 수업 안에서 되었는지 보시는 것이고, 뒤의 넷은 다음 회차 준비입니다.
+세 번째를 특히 보세요. 도서관 원문 접근이 되는가. 이게 안 되면 다음 2주 동안 아무것도 못 합니다. 지금 확인하고 가세요. 안 되시는 분은 끝나고 남아 주세요.
+다음은 2주 뒤입니다. 미루면 전날에 몰립니다.
+[운영 메모]
+도서관 접근 확인은 반드시 수업 안에서 시킬 것. 집에 가서 하라고 하면 2주 뒤에 '안 되더라'로 돌아온다.</a:t>
+            </a:r>
+            <a:endParaRPr lang="en-US" dirty="0"/>
+          </a:p>
+        </p:txBody>
+      </p:sp>
+      <p:sp>
+        <p:nvSpPr>
+          <p:cNvPr id="4" name="Slide Number Placeholder 3"/>
+          <p:cNvSpPr>
+            <a:spLocks noGrp="1"/>
+          </p:cNvSpPr>
+          <p:nvPr>
+            <p:ph type="sldNum" sz="quarter" idx="10"/>
+          </p:nvPr>
+        </p:nvSpPr>
+        <p:spPr/>
+        <p:txBody>
+          <a:bodyPr/>
+          <a:lstStyle/>
+          <a:p>
+            <a:fld id="{F7021451-1387-4CA6-816F-3879F97B5CBC}" type="slidenum">
+              <a:rPr lang="en-US"/>
+              <a:t>15</a:t>
+            </a:fld>
+            <a:endParaRPr lang="en-US"/>
+          </a:p>
+        </p:txBody>
+      </p:sp>
+    </p:spTree>
+    <p:extLst>
+      <p:ext uri="{BB962C8B-B14F-4D97-AF65-F5344CB8AC3E}">
+        <p14:creationId xmlns:p14="http://schemas.microsoft.com/office/powerpoint/2010/main" val="1024086991"/>
+      </p:ext>
+    </p:extLst>
+  </p:cSld>
+  <p:clrMapOvr>
+    <a:masterClrMapping/>
+  </p:clrMapOvr>
+</p:notes>
+</file>
+
+<file path=ppt/notesSlides/notesSlide16.xml><?xml version="1.0" encoding="utf-8"?>
+<p:notes xmlns:a="http://schemas.openxmlformats.org/drawingml/2006/main" xmlns:r="http://schemas.openxmlformats.org/officeDocument/2006/relationships" xmlns:p="http://schemas.openxmlformats.org/presentationml/2006/main">
+  <p:cSld>
+    <p:spTree>
+      <p:nvGrpSpPr>
+        <p:cNvPr id="1" name=""/>
+        <p:cNvGrpSpPr/>
+        <p:nvPr/>
+      </p:nvGrpSpPr>
+      <p:grpSpPr>
+        <a:xfrm>
+          <a:off x="0" y="0"/>
+          <a:ext cx="0" cy="0"/>
+          <a:chOff x="0" y="0"/>
+          <a:chExt cx="0" cy="0"/>
+        </a:xfrm>
+      </p:grpSpPr>
+      <p:sp>
+        <p:nvSpPr>
+          <p:cNvPr id="2" name="Slide Image Placeholder 1"/>
+          <p:cNvSpPr>
+            <a:spLocks noGrp="1" noRot="1" noChangeAspect="1"/>
+          </p:cNvSpPr>
+          <p:nvPr>
+            <p:ph type="sldImg"/>
+          </p:nvPr>
+        </p:nvSpPr>
+        <p:spPr/>
+      </p:sp>
+      <p:sp>
+        <p:nvSpPr>
+          <p:cNvPr id="3" name="Notes Placeholder 2"/>
+          <p:cNvSpPr>
+            <a:spLocks noGrp="1"/>
+          </p:cNvSpPr>
+          <p:nvPr>
+            <p:ph type="body" idx="1"/>
+          </p:nvPr>
+        </p:nvSpPr>
+        <p:spPr/>
+        <p:txBody>
+          <a:bodyPr/>
+          <a:lstStyle/>
+          <a:p>
+            <a:r>
+              <a:rPr lang="en-US" dirty="0"/>
+              <a:t>[말할 내용]
 정리하겠습니다.
 과제 세 가지입니다.
 첫째, 선행연구 다섯 편 정리표. 오늘 찾은 것을 여섯 칸으로 채우세요. 서지, 문제, 방법, 결과, 내 연구와의 관계, 그리고 인용할 문장 하나.
@@ -1126,7 +1230,7 @@
           <a:p>
             <a:fld id="{F7021451-1387-4CA6-816F-3879F97B5CBC}" type="slidenum">
               <a:rPr lang="en-US"/>
-              <a:t>15</a:t>
+              <a:t>16</a:t>
             </a:fld>
             <a:endParaRPr lang="en-US"/>
           </a:p>
@@ -4445,7 +4549,7 @@
                 <a:ea typeface="Pretendard" pitchFamily="34" charset="-122"/>
                 <a:cs typeface="Pretendard" pitchFamily="34" charset="-120"/>
               </a:rPr>
-              <a:t>MAP</a:t>
+              <a:t>METHOD</a:t>
             </a:r>
             <a:endParaRPr lang="en-US" sz="950" dirty="0"/>
           </a:p>
@@ -4484,7 +4588,7 @@
                 <a:ea typeface="Pretendard SemiBold" pitchFamily="34" charset="-122"/>
                 <a:cs typeface="Pretendard SemiBold" pitchFamily="34" charset="-120"/>
               </a:rPr>
-              <a:t>지도 그리기</a:t>
+              <a:t>방법 칸에 적을 다섯 가지</a:t>
             </a:r>
             <a:endParaRPr lang="en-US" sz="3000" dirty="0"/>
           </a:p>
@@ -4523,7 +4627,7 @@
                 <a:ea typeface="Pretendard" pitchFamily="34" charset="-122"/>
                 <a:cs typeface="Pretendard" pitchFamily="34" charset="-120"/>
               </a:rPr>
-              <a:t>목록은 아직 지도가 아닙니다. 세 단계로 지도가 됩니다.</a:t>
+              <a:t>무엇을 알아냈는가보다 어떻게 알아냈는가를 봅니다.</a:t>
             </a:r>
             <a:endParaRPr lang="en-US" sz="1150" dirty="0"/>
           </a:p>
@@ -4537,18 +4641,18 @@
         </p:nvSpPr>
         <p:spPr>
           <a:xfrm>
-            <a:off x="640080" y="1737360"/>
-            <a:ext cx="3393338" cy="3035808"/>
+            <a:off x="640080" y="1664208"/>
+            <a:ext cx="10911535" cy="7315"/>
           </a:xfrm>
           <a:prstGeom prst="rect">
             <a:avLst/>
           </a:prstGeom>
           <a:solidFill>
-            <a:srgbClr val="FFFFFF"/>
+            <a:srgbClr val="111111"/>
           </a:solidFill>
           <a:ln w="12700">
             <a:solidFill>
-              <a:srgbClr val="DCDCDC"/>
+              <a:srgbClr val="111111"/>
             </a:solidFill>
             <a:prstDash val="solid"/>
           </a:ln>
@@ -4562,8 +4666,8 @@
         </p:nvSpPr>
         <p:spPr>
           <a:xfrm>
-            <a:off x="1024128" y="2011680"/>
-            <a:ext cx="365760" cy="365760"/>
+            <a:off x="640080" y="1810512"/>
+            <a:ext cx="310896" cy="310896"/>
           </a:xfrm>
           <a:prstGeom prst="ellipse">
             <a:avLst/>
@@ -4587,8 +4691,8 @@
         </p:nvSpPr>
         <p:spPr>
           <a:xfrm>
-            <a:off x="1024128" y="2011680"/>
-            <a:ext cx="365760" cy="365760"/>
+            <a:off x="640080" y="1810512"/>
+            <a:ext cx="310896" cy="310896"/>
           </a:xfrm>
           <a:prstGeom prst="rect">
             <a:avLst/>
@@ -4604,7 +4708,7 @@
               <a:buNone/>
             </a:pPr>
             <a:r>
-              <a:rPr lang="en-US" sz="1150" b="1" dirty="0">
+              <a:rPr lang="en-US" sz="1000" b="1" dirty="0">
                 <a:solidFill>
                   <a:srgbClr val="111111"/>
                 </a:solidFill>
@@ -4612,9 +4716,9 @@
                 <a:ea typeface="Pretendard" pitchFamily="34" charset="-122"/>
                 <a:cs typeface="Pretendard" pitchFamily="34" charset="-120"/>
               </a:rPr>
-              <a:t>01</a:t>
-            </a:r>
-            <a:endParaRPr lang="en-US" sz="1150" dirty="0"/>
+              <a:t>1</a:t>
+            </a:r>
+            <a:endParaRPr lang="en-US" sz="1000" dirty="0"/>
           </a:p>
         </p:txBody>
       </p:sp>
@@ -4626,27 +4730,24 @@
         </p:nvSpPr>
         <p:spPr>
           <a:xfrm>
-            <a:off x="1024128" y="2505456"/>
-            <a:ext cx="2625242" cy="457200"/>
-          </a:xfrm>
-          <a:prstGeom prst="rect">
-            <a:avLst/>
-          </a:prstGeom>
-          <a:noFill/>
-          <a:ln/>
-        </p:spPr>
-        <p:txBody>
-          <a:bodyPr wrap="square" lIns="0" tIns="0" rIns="0" bIns="0" rtlCol="0" anchor="t"/>
-          <a:lstStyle/>
-          <a:p>
-            <a:pPr indent="0" marL="0">
-              <a:lnSpc>
-                <a:spcPct val="114000"/>
-              </a:lnSpc>
-              <a:buNone/>
-            </a:pPr>
-            <a:r>
-              <a:rPr lang="en-US" sz="1700" dirty="0">
+            <a:off x="1188720" y="1719072"/>
+            <a:ext cx="7498080" cy="310896"/>
+          </a:xfrm>
+          <a:prstGeom prst="rect">
+            <a:avLst/>
+          </a:prstGeom>
+          <a:noFill/>
+          <a:ln/>
+        </p:spPr>
+        <p:txBody>
+          <a:bodyPr wrap="square" lIns="0" tIns="0" rIns="0" bIns="0" rtlCol="0" anchor="ctr"/>
+          <a:lstStyle/>
+          <a:p>
+            <a:pPr indent="0" marL="0">
+              <a:buNone/>
+            </a:pPr>
+            <a:r>
+              <a:rPr lang="en-US" sz="1450" dirty="0">
                 <a:solidFill>
                   <a:srgbClr val="111111"/>
                 </a:solidFill>
@@ -4654,9 +4755,9 @@
                 <a:ea typeface="Pretendard SemiBold" pitchFamily="34" charset="-122"/>
                 <a:cs typeface="Pretendard SemiBold" pitchFamily="34" charset="-120"/>
               </a:rPr>
-              <a:t>묶는다</a:t>
-            </a:r>
-            <a:endParaRPr lang="en-US" sz="1700" dirty="0"/>
+              <a:t>무엇을 자료로 삼았는가</a:t>
+            </a:r>
+            <a:endParaRPr lang="en-US" sz="1450" dirty="0"/>
           </a:p>
         </p:txBody>
       </p:sp>
@@ -4668,27 +4769,24 @@
         </p:nvSpPr>
         <p:spPr>
           <a:xfrm>
-            <a:off x="1024128" y="2999232"/>
-            <a:ext cx="2625242" cy="1645920"/>
-          </a:xfrm>
-          <a:prstGeom prst="rect">
-            <a:avLst/>
-          </a:prstGeom>
-          <a:noFill/>
-          <a:ln/>
-        </p:spPr>
-        <p:txBody>
-          <a:bodyPr wrap="square" lIns="0" tIns="0" rIns="0" bIns="0" rtlCol="0" anchor="t"/>
-          <a:lstStyle/>
-          <a:p>
-            <a:pPr indent="0" marL="0">
-              <a:lnSpc>
-                <a:spcPct val="130000"/>
-              </a:lnSpc>
-              <a:buNone/>
-            </a:pPr>
-            <a:r>
-              <a:rPr lang="en-US" sz="1150" dirty="0">
+            <a:off x="1188720" y="2029968"/>
+            <a:ext cx="7498080" cy="292608"/>
+          </a:xfrm>
+          <a:prstGeom prst="rect">
+            <a:avLst/>
+          </a:prstGeom>
+          <a:noFill/>
+          <a:ln/>
+        </p:spPr>
+        <p:txBody>
+          <a:bodyPr wrap="square" lIns="0" tIns="0" rIns="0" bIns="0" rtlCol="0" anchor="ctr"/>
+          <a:lstStyle/>
+          <a:p>
+            <a:pPr indent="0" marL="0">
+              <a:buNone/>
+            </a:pPr>
+            <a:r>
+              <a:rPr lang="en-US" sz="1100" dirty="0">
                 <a:solidFill>
                   <a:srgbClr val="6E6E6E"/>
                 </a:solidFill>
@@ -4696,48 +4794,67 @@
                 <a:ea typeface="Pretendard" pitchFamily="34" charset="-122"/>
                 <a:cs typeface="Pretendard" pitchFamily="34" charset="-120"/>
               </a:rPr>
-              <a:t>비슷한 것끼리 모읍니다. 같은 방법 · 같은 문제 · 같은 결론.</a:t>
-            </a:r>
-            <a:endParaRPr lang="en-US" sz="1150" dirty="0"/>
-          </a:p>
-          <a:p>
-            <a:pPr indent="0" marL="0">
-              <a:lnSpc>
-                <a:spcPct val="130000"/>
-              </a:lnSpc>
-              <a:buNone/>
-            </a:pPr>
-            <a:r>
-              <a:rPr lang="en-US" sz="1150" dirty="0">
-                <a:solidFill>
-                  <a:srgbClr val="6E6E6E"/>
-                </a:solidFill>
-                <a:latin typeface="Pretendard" pitchFamily="34" charset="0"/>
-                <a:ea typeface="Pretendard" pitchFamily="34" charset="-122"/>
-                <a:cs typeface="Pretendard" pitchFamily="34" charset="-120"/>
-              </a:rPr>
-              <a:t>묶다 보면 이 분야에 몇 개의 흐름이 있는지 보입니다.</a:t>
-            </a:r>
-            <a:endParaRPr lang="en-US" sz="1150" dirty="0"/>
-          </a:p>
-        </p:txBody>
-      </p:sp>
-      <p:sp>
-        <p:nvSpPr>
-          <p:cNvPr id="14" name="Shape 12"/>
-          <p:cNvSpPr/>
-          <p:nvPr/>
-        </p:nvSpPr>
-        <p:spPr>
-          <a:xfrm>
-            <a:off x="4399178" y="1737360"/>
-            <a:ext cx="3393338" cy="3035808"/>
+              <a:t>몇 명인지, 어떤 사람인지, 어떻게 골랐는지. 수와 선정 기준까지 적습니다</a:t>
+            </a:r>
+            <a:endParaRPr lang="en-US" sz="1100" dirty="0"/>
+          </a:p>
+        </p:txBody>
+      </p:sp>
+      <p:sp>
+        <p:nvSpPr>
+          <p:cNvPr id="14" name="Text 12"/>
+          <p:cNvSpPr/>
+          <p:nvPr/>
+        </p:nvSpPr>
+        <p:spPr>
+          <a:xfrm>
+            <a:off x="9357055" y="1810512"/>
+            <a:ext cx="2194560" cy="310896"/>
+          </a:xfrm>
+          <a:prstGeom prst="rect">
+            <a:avLst/>
+          </a:prstGeom>
+          <a:noFill/>
+          <a:ln/>
+        </p:spPr>
+        <p:txBody>
+          <a:bodyPr wrap="square" lIns="0" tIns="0" rIns="0" bIns="0" rtlCol="0" anchor="ctr"/>
+          <a:lstStyle/>
+          <a:p>
+            <a:pPr algn="r" indent="0" marL="0">
+              <a:buNone/>
+            </a:pPr>
+            <a:r>
+              <a:rPr lang="en-US" sz="1050" b="1" spc="120" kern="0" dirty="0">
+                <a:solidFill>
+                  <a:srgbClr val="111111"/>
+                </a:solidFill>
+                <a:latin typeface="Pretendard" pitchFamily="34" charset="0"/>
+                <a:ea typeface="Pretendard" pitchFamily="34" charset="-122"/>
+                <a:cs typeface="Pretendard" pitchFamily="34" charset="-120"/>
+              </a:rPr>
+              <a:t>자료</a:t>
+            </a:r>
+            <a:endParaRPr lang="en-US" sz="1050" dirty="0"/>
+          </a:p>
+        </p:txBody>
+      </p:sp>
+      <p:sp>
+        <p:nvSpPr>
+          <p:cNvPr id="15" name="Shape 13"/>
+          <p:cNvSpPr/>
+          <p:nvPr/>
+        </p:nvSpPr>
+        <p:spPr>
+          <a:xfrm>
+            <a:off x="640080" y="2406701"/>
+            <a:ext cx="10911535" cy="7315"/>
           </a:xfrm>
           <a:prstGeom prst="rect">
             <a:avLst/>
           </a:prstGeom>
           <a:solidFill>
-            <a:srgbClr val="FFFFFF"/>
+            <a:srgbClr val="DCDCDC"/>
           </a:solidFill>
           <a:ln w="12700">
             <a:solidFill>
@@ -4749,14 +4866,14 @@
       </p:sp>
       <p:sp>
         <p:nvSpPr>
-          <p:cNvPr id="15" name="Shape 13"/>
-          <p:cNvSpPr/>
-          <p:nvPr/>
-        </p:nvSpPr>
-        <p:spPr>
-          <a:xfrm>
-            <a:off x="4783226" y="2011680"/>
-            <a:ext cx="365760" cy="365760"/>
+          <p:cNvPr id="16" name="Shape 14"/>
+          <p:cNvSpPr/>
+          <p:nvPr/>
+        </p:nvSpPr>
+        <p:spPr>
+          <a:xfrm>
+            <a:off x="640080" y="2571293"/>
+            <a:ext cx="310896" cy="310896"/>
           </a:xfrm>
           <a:prstGeom prst="ellipse">
             <a:avLst/>
@@ -4774,14 +4891,14 @@
       </p:sp>
       <p:sp>
         <p:nvSpPr>
-          <p:cNvPr id="16" name="Text 14"/>
-          <p:cNvSpPr/>
-          <p:nvPr/>
-        </p:nvSpPr>
-        <p:spPr>
-          <a:xfrm>
-            <a:off x="4783226" y="2011680"/>
-            <a:ext cx="365760" cy="365760"/>
+          <p:cNvPr id="17" name="Text 15"/>
+          <p:cNvSpPr/>
+          <p:nvPr/>
+        </p:nvSpPr>
+        <p:spPr>
+          <a:xfrm>
+            <a:off x="640080" y="2571293"/>
+            <a:ext cx="310896" cy="310896"/>
           </a:xfrm>
           <a:prstGeom prst="rect">
             <a:avLst/>
@@ -4797,7 +4914,7 @@
               <a:buNone/>
             </a:pPr>
             <a:r>
-              <a:rPr lang="en-US" sz="1150" b="1" dirty="0">
+              <a:rPr lang="en-US" sz="1000" b="1" dirty="0">
                 <a:solidFill>
                   <a:srgbClr val="111111"/>
                 </a:solidFill>
@@ -4805,41 +4922,38 @@
                 <a:ea typeface="Pretendard" pitchFamily="34" charset="-122"/>
                 <a:cs typeface="Pretendard" pitchFamily="34" charset="-120"/>
               </a:rPr>
-              <a:t>02</a:t>
-            </a:r>
-            <a:endParaRPr lang="en-US" sz="1150" dirty="0"/>
-          </a:p>
-        </p:txBody>
-      </p:sp>
-      <p:sp>
-        <p:nvSpPr>
-          <p:cNvPr id="17" name="Text 15"/>
-          <p:cNvSpPr/>
-          <p:nvPr/>
-        </p:nvSpPr>
-        <p:spPr>
-          <a:xfrm>
-            <a:off x="4783226" y="2505456"/>
-            <a:ext cx="2625242" cy="457200"/>
-          </a:xfrm>
-          <a:prstGeom prst="rect">
-            <a:avLst/>
-          </a:prstGeom>
-          <a:noFill/>
-          <a:ln/>
-        </p:spPr>
-        <p:txBody>
-          <a:bodyPr wrap="square" lIns="0" tIns="0" rIns="0" bIns="0" rtlCol="0" anchor="t"/>
-          <a:lstStyle/>
-          <a:p>
-            <a:pPr indent="0" marL="0">
-              <a:lnSpc>
-                <a:spcPct val="114000"/>
-              </a:lnSpc>
-              <a:buNone/>
-            </a:pPr>
-            <a:r>
-              <a:rPr lang="en-US" sz="1700" dirty="0">
+              <a:t>2</a:t>
+            </a:r>
+            <a:endParaRPr lang="en-US" sz="1000" dirty="0"/>
+          </a:p>
+        </p:txBody>
+      </p:sp>
+      <p:sp>
+        <p:nvSpPr>
+          <p:cNvPr id="18" name="Text 16"/>
+          <p:cNvSpPr/>
+          <p:nvPr/>
+        </p:nvSpPr>
+        <p:spPr>
+          <a:xfrm>
+            <a:off x="1188720" y="2479853"/>
+            <a:ext cx="7498080" cy="310896"/>
+          </a:xfrm>
+          <a:prstGeom prst="rect">
+            <a:avLst/>
+          </a:prstGeom>
+          <a:noFill/>
+          <a:ln/>
+        </p:spPr>
+        <p:txBody>
+          <a:bodyPr wrap="square" lIns="0" tIns="0" rIns="0" bIns="0" rtlCol="0" anchor="ctr"/>
+          <a:lstStyle/>
+          <a:p>
+            <a:pPr indent="0" marL="0">
+              <a:buNone/>
+            </a:pPr>
+            <a:r>
+              <a:rPr lang="en-US" sz="1450" dirty="0">
                 <a:solidFill>
                   <a:srgbClr val="111111"/>
                 </a:solidFill>
@@ -4847,41 +4961,38 @@
                 <a:ea typeface="Pretendard SemiBold" pitchFamily="34" charset="-122"/>
                 <a:cs typeface="Pretendard SemiBold" pitchFamily="34" charset="-120"/>
               </a:rPr>
-              <a:t>축을 찾는다</a:t>
-            </a:r>
-            <a:endParaRPr lang="en-US" sz="1700" dirty="0"/>
-          </a:p>
-        </p:txBody>
-      </p:sp>
-      <p:sp>
-        <p:nvSpPr>
-          <p:cNvPr id="18" name="Text 16"/>
-          <p:cNvSpPr/>
-          <p:nvPr/>
-        </p:nvSpPr>
-        <p:spPr>
-          <a:xfrm>
-            <a:off x="4783226" y="2999232"/>
-            <a:ext cx="2625242" cy="1645920"/>
-          </a:xfrm>
-          <a:prstGeom prst="rect">
-            <a:avLst/>
-          </a:prstGeom>
-          <a:noFill/>
-          <a:ln/>
-        </p:spPr>
-        <p:txBody>
-          <a:bodyPr wrap="square" lIns="0" tIns="0" rIns="0" bIns="0" rtlCol="0" anchor="t"/>
-          <a:lstStyle/>
-          <a:p>
-            <a:pPr indent="0" marL="0">
-              <a:lnSpc>
-                <a:spcPct val="130000"/>
-              </a:lnSpc>
-              <a:buNone/>
-            </a:pPr>
-            <a:r>
-              <a:rPr lang="en-US" sz="1150" dirty="0">
+              <a:t>어떻게 모았는가</a:t>
+            </a:r>
+            <a:endParaRPr lang="en-US" sz="1450" dirty="0"/>
+          </a:p>
+        </p:txBody>
+      </p:sp>
+      <p:sp>
+        <p:nvSpPr>
+          <p:cNvPr id="19" name="Text 17"/>
+          <p:cNvSpPr/>
+          <p:nvPr/>
+        </p:nvSpPr>
+        <p:spPr>
+          <a:xfrm>
+            <a:off x="1188720" y="2790749"/>
+            <a:ext cx="7498080" cy="292608"/>
+          </a:xfrm>
+          <a:prstGeom prst="rect">
+            <a:avLst/>
+          </a:prstGeom>
+          <a:noFill/>
+          <a:ln/>
+        </p:spPr>
+        <p:txBody>
+          <a:bodyPr wrap="square" lIns="0" tIns="0" rIns="0" bIns="0" rtlCol="0" anchor="ctr"/>
+          <a:lstStyle/>
+          <a:p>
+            <a:pPr indent="0" marL="0">
+              <a:buNone/>
+            </a:pPr>
+            <a:r>
+              <a:rPr lang="en-US" sz="1100" dirty="0">
                 <a:solidFill>
                   <a:srgbClr val="6E6E6E"/>
                 </a:solidFill>
@@ -4889,19 +5000,205 @@
                 <a:ea typeface="Pretendard" pitchFamily="34" charset="-122"/>
                 <a:cs typeface="Pretendard" pitchFamily="34" charset="-120"/>
               </a:rPr>
-              <a:t>묶음들을 갈라놓는 기준을 찾습니다. 대개 두 개면 충분합니다.</a:t>
-            </a:r>
-            <a:endParaRPr lang="en-US" sz="1150" dirty="0"/>
-          </a:p>
-          <a:p>
-            <a:pPr indent="0" marL="0">
-              <a:lnSpc>
-                <a:spcPct val="130000"/>
-              </a:lnSpc>
-              <a:buNone/>
-            </a:pPr>
-            <a:r>
-              <a:rPr lang="en-US" sz="1150" dirty="0">
+              <a:t>인터뷰면 한 번에 몇 분씩 몇 회를 어디서. 실험이면 조건과 순서</a:t>
+            </a:r>
+            <a:endParaRPr lang="en-US" sz="1100" dirty="0"/>
+          </a:p>
+        </p:txBody>
+      </p:sp>
+      <p:sp>
+        <p:nvSpPr>
+          <p:cNvPr id="20" name="Text 18"/>
+          <p:cNvSpPr/>
+          <p:nvPr/>
+        </p:nvSpPr>
+        <p:spPr>
+          <a:xfrm>
+            <a:off x="9357055" y="2571293"/>
+            <a:ext cx="2194560" cy="310896"/>
+          </a:xfrm>
+          <a:prstGeom prst="rect">
+            <a:avLst/>
+          </a:prstGeom>
+          <a:noFill/>
+          <a:ln/>
+        </p:spPr>
+        <p:txBody>
+          <a:bodyPr wrap="square" lIns="0" tIns="0" rIns="0" bIns="0" rtlCol="0" anchor="ctr"/>
+          <a:lstStyle/>
+          <a:p>
+            <a:pPr algn="r" indent="0" marL="0">
+              <a:buNone/>
+            </a:pPr>
+            <a:r>
+              <a:rPr lang="en-US" sz="1050" b="1" spc="120" kern="0" dirty="0">
+                <a:solidFill>
+                  <a:srgbClr val="111111"/>
+                </a:solidFill>
+                <a:latin typeface="Pretendard" pitchFamily="34" charset="0"/>
+                <a:ea typeface="Pretendard" pitchFamily="34" charset="-122"/>
+                <a:cs typeface="Pretendard" pitchFamily="34" charset="-120"/>
+              </a:rPr>
+              <a:t>절차</a:t>
+            </a:r>
+            <a:endParaRPr lang="en-US" sz="1050" dirty="0"/>
+          </a:p>
+        </p:txBody>
+      </p:sp>
+      <p:sp>
+        <p:nvSpPr>
+          <p:cNvPr id="21" name="Shape 19"/>
+          <p:cNvSpPr/>
+          <p:nvPr/>
+        </p:nvSpPr>
+        <p:spPr>
+          <a:xfrm>
+            <a:off x="640080" y="3167482"/>
+            <a:ext cx="10911535" cy="7315"/>
+          </a:xfrm>
+          <a:prstGeom prst="rect">
+            <a:avLst/>
+          </a:prstGeom>
+          <a:solidFill>
+            <a:srgbClr val="DCDCDC"/>
+          </a:solidFill>
+          <a:ln w="12700">
+            <a:solidFill>
+              <a:srgbClr val="DCDCDC"/>
+            </a:solidFill>
+            <a:prstDash val="solid"/>
+          </a:ln>
+        </p:spPr>
+      </p:sp>
+      <p:sp>
+        <p:nvSpPr>
+          <p:cNvPr id="22" name="Shape 20"/>
+          <p:cNvSpPr/>
+          <p:nvPr/>
+        </p:nvSpPr>
+        <p:spPr>
+          <a:xfrm>
+            <a:off x="640080" y="3332074"/>
+            <a:ext cx="310896" cy="310896"/>
+          </a:xfrm>
+          <a:prstGeom prst="ellipse">
+            <a:avLst/>
+          </a:prstGeom>
+          <a:solidFill>
+            <a:srgbClr val="FFFFFF"/>
+          </a:solidFill>
+          <a:ln w="12700">
+            <a:solidFill>
+              <a:srgbClr val="111111"/>
+            </a:solidFill>
+            <a:prstDash val="solid"/>
+          </a:ln>
+        </p:spPr>
+      </p:sp>
+      <p:sp>
+        <p:nvSpPr>
+          <p:cNvPr id="23" name="Text 21"/>
+          <p:cNvSpPr/>
+          <p:nvPr/>
+        </p:nvSpPr>
+        <p:spPr>
+          <a:xfrm>
+            <a:off x="640080" y="3332074"/>
+            <a:ext cx="310896" cy="310896"/>
+          </a:xfrm>
+          <a:prstGeom prst="rect">
+            <a:avLst/>
+          </a:prstGeom>
+          <a:noFill/>
+          <a:ln/>
+        </p:spPr>
+        <p:txBody>
+          <a:bodyPr wrap="square" lIns="0" tIns="0" rIns="0" bIns="0" rtlCol="0" anchor="ctr"/>
+          <a:lstStyle/>
+          <a:p>
+            <a:pPr algn="ctr" indent="0" marL="0">
+              <a:buNone/>
+            </a:pPr>
+            <a:r>
+              <a:rPr lang="en-US" sz="1000" b="1" dirty="0">
+                <a:solidFill>
+                  <a:srgbClr val="111111"/>
+                </a:solidFill>
+                <a:latin typeface="Pretendard" pitchFamily="34" charset="0"/>
+                <a:ea typeface="Pretendard" pitchFamily="34" charset="-122"/>
+                <a:cs typeface="Pretendard" pitchFamily="34" charset="-120"/>
+              </a:rPr>
+              <a:t>3</a:t>
+            </a:r>
+            <a:endParaRPr lang="en-US" sz="1000" dirty="0"/>
+          </a:p>
+        </p:txBody>
+      </p:sp>
+      <p:sp>
+        <p:nvSpPr>
+          <p:cNvPr id="24" name="Text 22"/>
+          <p:cNvSpPr/>
+          <p:nvPr/>
+        </p:nvSpPr>
+        <p:spPr>
+          <a:xfrm>
+            <a:off x="1188720" y="3240634"/>
+            <a:ext cx="7498080" cy="310896"/>
+          </a:xfrm>
+          <a:prstGeom prst="rect">
+            <a:avLst/>
+          </a:prstGeom>
+          <a:noFill/>
+          <a:ln/>
+        </p:spPr>
+        <p:txBody>
+          <a:bodyPr wrap="square" lIns="0" tIns="0" rIns="0" bIns="0" rtlCol="0" anchor="ctr"/>
+          <a:lstStyle/>
+          <a:p>
+            <a:pPr indent="0" marL="0">
+              <a:buNone/>
+            </a:pPr>
+            <a:r>
+              <a:rPr lang="en-US" sz="1450" dirty="0">
+                <a:solidFill>
+                  <a:srgbClr val="111111"/>
+                </a:solidFill>
+                <a:latin typeface="Pretendard SemiBold" pitchFamily="34" charset="0"/>
+                <a:ea typeface="Pretendard SemiBold" pitchFamily="34" charset="-122"/>
+                <a:cs typeface="Pretendard SemiBold" pitchFamily="34" charset="-120"/>
+              </a:rPr>
+              <a:t>본 조사 전에 무엇을 했는가</a:t>
+            </a:r>
+            <a:endParaRPr lang="en-US" sz="1450" dirty="0"/>
+          </a:p>
+        </p:txBody>
+      </p:sp>
+      <p:sp>
+        <p:nvSpPr>
+          <p:cNvPr id="25" name="Text 23"/>
+          <p:cNvSpPr/>
+          <p:nvPr/>
+        </p:nvSpPr>
+        <p:spPr>
+          <a:xfrm>
+            <a:off x="1188720" y="3551530"/>
+            <a:ext cx="7498080" cy="292608"/>
+          </a:xfrm>
+          <a:prstGeom prst="rect">
+            <a:avLst/>
+          </a:prstGeom>
+          <a:noFill/>
+          <a:ln/>
+        </p:spPr>
+        <p:txBody>
+          <a:bodyPr wrap="square" lIns="0" tIns="0" rIns="0" bIns="0" rtlCol="0" anchor="ctr"/>
+          <a:lstStyle/>
+          <a:p>
+            <a:pPr indent="0" marL="0">
+              <a:buNone/>
+            </a:pPr>
+            <a:r>
+              <a:rPr lang="en-US" sz="1100" dirty="0">
                 <a:solidFill>
                   <a:srgbClr val="6E6E6E"/>
                 </a:solidFill>
@@ -4909,22 +5206,473 @@
                 <a:ea typeface="Pretendard" pitchFamily="34" charset="-122"/>
                 <a:cs typeface="Pretendard" pitchFamily="34" charset="-120"/>
               </a:rPr>
-              <a:t>그 두 축으로 판을 만들고 논문들을 올려놓습니다.</a:t>
-            </a:r>
-            <a:endParaRPr lang="en-US" sz="1150" dirty="0"/>
-          </a:p>
-        </p:txBody>
-      </p:sp>
-      <p:sp>
-        <p:nvSpPr>
-          <p:cNvPr id="19" name="Shape 17"/>
-          <p:cNvSpPr/>
-          <p:nvPr/>
-        </p:nvSpPr>
-        <p:spPr>
-          <a:xfrm>
-            <a:off x="8158277" y="1737360"/>
-            <a:ext cx="3393338" cy="3035808"/>
+              <a:t>예비조사에서 무엇을 고쳤는지 적힌 논문이 가장 값집니다. 내 사전 리서치를 거기서 설계합니다</a:t>
+            </a:r>
+            <a:endParaRPr lang="en-US" sz="1100" dirty="0"/>
+          </a:p>
+        </p:txBody>
+      </p:sp>
+      <p:sp>
+        <p:nvSpPr>
+          <p:cNvPr id="26" name="Text 24"/>
+          <p:cNvSpPr/>
+          <p:nvPr/>
+        </p:nvSpPr>
+        <p:spPr>
+          <a:xfrm>
+            <a:off x="9357055" y="3332074"/>
+            <a:ext cx="2194560" cy="310896"/>
+          </a:xfrm>
+          <a:prstGeom prst="rect">
+            <a:avLst/>
+          </a:prstGeom>
+          <a:noFill/>
+          <a:ln/>
+        </p:spPr>
+        <p:txBody>
+          <a:bodyPr wrap="square" lIns="0" tIns="0" rIns="0" bIns="0" rtlCol="0" anchor="ctr"/>
+          <a:lstStyle/>
+          <a:p>
+            <a:pPr algn="r" indent="0" marL="0">
+              <a:buNone/>
+            </a:pPr>
+            <a:r>
+              <a:rPr lang="en-US" sz="1050" b="1" spc="120" kern="0" dirty="0">
+                <a:solidFill>
+                  <a:srgbClr val="111111"/>
+                </a:solidFill>
+                <a:latin typeface="Pretendard" pitchFamily="34" charset="0"/>
+                <a:ea typeface="Pretendard" pitchFamily="34" charset="-122"/>
+                <a:cs typeface="Pretendard" pitchFamily="34" charset="-120"/>
+              </a:rPr>
+              <a:t>사전</a:t>
+            </a:r>
+            <a:endParaRPr lang="en-US" sz="1050" dirty="0"/>
+          </a:p>
+        </p:txBody>
+      </p:sp>
+      <p:sp>
+        <p:nvSpPr>
+          <p:cNvPr id="27" name="Shape 25"/>
+          <p:cNvSpPr/>
+          <p:nvPr/>
+        </p:nvSpPr>
+        <p:spPr>
+          <a:xfrm>
+            <a:off x="640080" y="3928262"/>
+            <a:ext cx="10911535" cy="7315"/>
+          </a:xfrm>
+          <a:prstGeom prst="rect">
+            <a:avLst/>
+          </a:prstGeom>
+          <a:solidFill>
+            <a:srgbClr val="DCDCDC"/>
+          </a:solidFill>
+          <a:ln w="12700">
+            <a:solidFill>
+              <a:srgbClr val="DCDCDC"/>
+            </a:solidFill>
+            <a:prstDash val="solid"/>
+          </a:ln>
+        </p:spPr>
+      </p:sp>
+      <p:sp>
+        <p:nvSpPr>
+          <p:cNvPr id="28" name="Shape 26"/>
+          <p:cNvSpPr/>
+          <p:nvPr/>
+        </p:nvSpPr>
+        <p:spPr>
+          <a:xfrm>
+            <a:off x="640080" y="4092854"/>
+            <a:ext cx="310896" cy="310896"/>
+          </a:xfrm>
+          <a:prstGeom prst="ellipse">
+            <a:avLst/>
+          </a:prstGeom>
+          <a:solidFill>
+            <a:srgbClr val="FFFFFF"/>
+          </a:solidFill>
+          <a:ln w="12700">
+            <a:solidFill>
+              <a:srgbClr val="111111"/>
+            </a:solidFill>
+            <a:prstDash val="solid"/>
+          </a:ln>
+        </p:spPr>
+      </p:sp>
+      <p:sp>
+        <p:nvSpPr>
+          <p:cNvPr id="29" name="Text 27"/>
+          <p:cNvSpPr/>
+          <p:nvPr/>
+        </p:nvSpPr>
+        <p:spPr>
+          <a:xfrm>
+            <a:off x="640080" y="4092854"/>
+            <a:ext cx="310896" cy="310896"/>
+          </a:xfrm>
+          <a:prstGeom prst="rect">
+            <a:avLst/>
+          </a:prstGeom>
+          <a:noFill/>
+          <a:ln/>
+        </p:spPr>
+        <p:txBody>
+          <a:bodyPr wrap="square" lIns="0" tIns="0" rIns="0" bIns="0" rtlCol="0" anchor="ctr"/>
+          <a:lstStyle/>
+          <a:p>
+            <a:pPr algn="ctr" indent="0" marL="0">
+              <a:buNone/>
+            </a:pPr>
+            <a:r>
+              <a:rPr lang="en-US" sz="1000" b="1" dirty="0">
+                <a:solidFill>
+                  <a:srgbClr val="111111"/>
+                </a:solidFill>
+                <a:latin typeface="Pretendard" pitchFamily="34" charset="0"/>
+                <a:ea typeface="Pretendard" pitchFamily="34" charset="-122"/>
+                <a:cs typeface="Pretendard" pitchFamily="34" charset="-120"/>
+              </a:rPr>
+              <a:t>4</a:t>
+            </a:r>
+            <a:endParaRPr lang="en-US" sz="1000" dirty="0"/>
+          </a:p>
+        </p:txBody>
+      </p:sp>
+      <p:sp>
+        <p:nvSpPr>
+          <p:cNvPr id="30" name="Text 28"/>
+          <p:cNvSpPr/>
+          <p:nvPr/>
+        </p:nvSpPr>
+        <p:spPr>
+          <a:xfrm>
+            <a:off x="1188720" y="4001414"/>
+            <a:ext cx="7498080" cy="310896"/>
+          </a:xfrm>
+          <a:prstGeom prst="rect">
+            <a:avLst/>
+          </a:prstGeom>
+          <a:noFill/>
+          <a:ln/>
+        </p:spPr>
+        <p:txBody>
+          <a:bodyPr wrap="square" lIns="0" tIns="0" rIns="0" bIns="0" rtlCol="0" anchor="ctr"/>
+          <a:lstStyle/>
+          <a:p>
+            <a:pPr indent="0" marL="0">
+              <a:buNone/>
+            </a:pPr>
+            <a:r>
+              <a:rPr lang="en-US" sz="1450" dirty="0">
+                <a:solidFill>
+                  <a:srgbClr val="111111"/>
+                </a:solidFill>
+                <a:latin typeface="Pretendard SemiBold" pitchFamily="34" charset="0"/>
+                <a:ea typeface="Pretendard SemiBold" pitchFamily="34" charset="-122"/>
+                <a:cs typeface="Pretendard SemiBold" pitchFamily="34" charset="-120"/>
+              </a:rPr>
+              <a:t>무엇을 기준으로 판단했는가</a:t>
+            </a:r>
+            <a:endParaRPr lang="en-US" sz="1450" dirty="0"/>
+          </a:p>
+        </p:txBody>
+      </p:sp>
+      <p:sp>
+        <p:nvSpPr>
+          <p:cNvPr id="31" name="Text 29"/>
+          <p:cNvSpPr/>
+          <p:nvPr/>
+        </p:nvSpPr>
+        <p:spPr>
+          <a:xfrm>
+            <a:off x="1188720" y="4312310"/>
+            <a:ext cx="7498080" cy="292608"/>
+          </a:xfrm>
+          <a:prstGeom prst="rect">
+            <a:avLst/>
+          </a:prstGeom>
+          <a:noFill/>
+          <a:ln/>
+        </p:spPr>
+        <p:txBody>
+          <a:bodyPr wrap="square" lIns="0" tIns="0" rIns="0" bIns="0" rtlCol="0" anchor="ctr"/>
+          <a:lstStyle/>
+          <a:p>
+            <a:pPr indent="0" marL="0">
+              <a:buNone/>
+            </a:pPr>
+            <a:r>
+              <a:rPr lang="en-US" sz="1100" dirty="0">
+                <a:solidFill>
+                  <a:srgbClr val="6E6E6E"/>
+                </a:solidFill>
+                <a:latin typeface="Pretendard" pitchFamily="34" charset="0"/>
+                <a:ea typeface="Pretendard" pitchFamily="34" charset="-122"/>
+                <a:cs typeface="Pretendard" pitchFamily="34" charset="-120"/>
+              </a:rPr>
+              <a:t>분석 틀 · 코딩 기준 · 측정 지표. 같은 자료를 봐도 기준이 다르면 결론이 달라집니다</a:t>
+            </a:r>
+            <a:endParaRPr lang="en-US" sz="1100" dirty="0"/>
+          </a:p>
+        </p:txBody>
+      </p:sp>
+      <p:sp>
+        <p:nvSpPr>
+          <p:cNvPr id="32" name="Text 30"/>
+          <p:cNvSpPr/>
+          <p:nvPr/>
+        </p:nvSpPr>
+        <p:spPr>
+          <a:xfrm>
+            <a:off x="9357055" y="4092854"/>
+            <a:ext cx="2194560" cy="310896"/>
+          </a:xfrm>
+          <a:prstGeom prst="rect">
+            <a:avLst/>
+          </a:prstGeom>
+          <a:noFill/>
+          <a:ln/>
+        </p:spPr>
+        <p:txBody>
+          <a:bodyPr wrap="square" lIns="0" tIns="0" rIns="0" bIns="0" rtlCol="0" anchor="ctr"/>
+          <a:lstStyle/>
+          <a:p>
+            <a:pPr algn="r" indent="0" marL="0">
+              <a:buNone/>
+            </a:pPr>
+            <a:r>
+              <a:rPr lang="en-US" sz="1050" b="1" spc="120" kern="0" dirty="0">
+                <a:solidFill>
+                  <a:srgbClr val="111111"/>
+                </a:solidFill>
+                <a:latin typeface="Pretendard" pitchFamily="34" charset="0"/>
+                <a:ea typeface="Pretendard" pitchFamily="34" charset="-122"/>
+                <a:cs typeface="Pretendard" pitchFamily="34" charset="-120"/>
+              </a:rPr>
+              <a:t>분석</a:t>
+            </a:r>
+            <a:endParaRPr lang="en-US" sz="1050" dirty="0"/>
+          </a:p>
+        </p:txBody>
+      </p:sp>
+      <p:sp>
+        <p:nvSpPr>
+          <p:cNvPr id="33" name="Shape 31"/>
+          <p:cNvSpPr/>
+          <p:nvPr/>
+        </p:nvSpPr>
+        <p:spPr>
+          <a:xfrm>
+            <a:off x="640080" y="4689043"/>
+            <a:ext cx="10911535" cy="7315"/>
+          </a:xfrm>
+          <a:prstGeom prst="rect">
+            <a:avLst/>
+          </a:prstGeom>
+          <a:solidFill>
+            <a:srgbClr val="DCDCDC"/>
+          </a:solidFill>
+          <a:ln w="12700">
+            <a:solidFill>
+              <a:srgbClr val="DCDCDC"/>
+            </a:solidFill>
+            <a:prstDash val="solid"/>
+          </a:ln>
+        </p:spPr>
+      </p:sp>
+      <p:sp>
+        <p:nvSpPr>
+          <p:cNvPr id="34" name="Shape 32"/>
+          <p:cNvSpPr/>
+          <p:nvPr/>
+        </p:nvSpPr>
+        <p:spPr>
+          <a:xfrm>
+            <a:off x="640080" y="4853635"/>
+            <a:ext cx="310896" cy="310896"/>
+          </a:xfrm>
+          <a:prstGeom prst="ellipse">
+            <a:avLst/>
+          </a:prstGeom>
+          <a:solidFill>
+            <a:srgbClr val="FFFFFF"/>
+          </a:solidFill>
+          <a:ln w="12700">
+            <a:solidFill>
+              <a:srgbClr val="111111"/>
+            </a:solidFill>
+            <a:prstDash val="solid"/>
+          </a:ln>
+        </p:spPr>
+      </p:sp>
+      <p:sp>
+        <p:nvSpPr>
+          <p:cNvPr id="35" name="Text 33"/>
+          <p:cNvSpPr/>
+          <p:nvPr/>
+        </p:nvSpPr>
+        <p:spPr>
+          <a:xfrm>
+            <a:off x="640080" y="4853635"/>
+            <a:ext cx="310896" cy="310896"/>
+          </a:xfrm>
+          <a:prstGeom prst="rect">
+            <a:avLst/>
+          </a:prstGeom>
+          <a:noFill/>
+          <a:ln/>
+        </p:spPr>
+        <p:txBody>
+          <a:bodyPr wrap="square" lIns="0" tIns="0" rIns="0" bIns="0" rtlCol="0" anchor="ctr"/>
+          <a:lstStyle/>
+          <a:p>
+            <a:pPr algn="ctr" indent="0" marL="0">
+              <a:buNone/>
+            </a:pPr>
+            <a:r>
+              <a:rPr lang="en-US" sz="1000" b="1" dirty="0">
+                <a:solidFill>
+                  <a:srgbClr val="111111"/>
+                </a:solidFill>
+                <a:latin typeface="Pretendard" pitchFamily="34" charset="0"/>
+                <a:ea typeface="Pretendard" pitchFamily="34" charset="-122"/>
+                <a:cs typeface="Pretendard" pitchFamily="34" charset="-120"/>
+              </a:rPr>
+              <a:t>5</a:t>
+            </a:r>
+            <a:endParaRPr lang="en-US" sz="1000" dirty="0"/>
+          </a:p>
+        </p:txBody>
+      </p:sp>
+      <p:sp>
+        <p:nvSpPr>
+          <p:cNvPr id="36" name="Text 34"/>
+          <p:cNvSpPr/>
+          <p:nvPr/>
+        </p:nvSpPr>
+        <p:spPr>
+          <a:xfrm>
+            <a:off x="1188720" y="4762195"/>
+            <a:ext cx="7498080" cy="310896"/>
+          </a:xfrm>
+          <a:prstGeom prst="rect">
+            <a:avLst/>
+          </a:prstGeom>
+          <a:noFill/>
+          <a:ln/>
+        </p:spPr>
+        <p:txBody>
+          <a:bodyPr wrap="square" lIns="0" tIns="0" rIns="0" bIns="0" rtlCol="0" anchor="ctr"/>
+          <a:lstStyle/>
+          <a:p>
+            <a:pPr indent="0" marL="0">
+              <a:buNone/>
+            </a:pPr>
+            <a:r>
+              <a:rPr lang="en-US" sz="1450" dirty="0">
+                <a:solidFill>
+                  <a:srgbClr val="111111"/>
+                </a:solidFill>
+                <a:latin typeface="Pretendard SemiBold" pitchFamily="34" charset="0"/>
+                <a:ea typeface="Pretendard SemiBold" pitchFamily="34" charset="-122"/>
+                <a:cs typeface="Pretendard SemiBold" pitchFamily="34" charset="-120"/>
+              </a:rPr>
+              <a:t>무엇이 안 됐다고 적었는가</a:t>
+            </a:r>
+            <a:endParaRPr lang="en-US" sz="1450" dirty="0"/>
+          </a:p>
+        </p:txBody>
+      </p:sp>
+      <p:sp>
+        <p:nvSpPr>
+          <p:cNvPr id="37" name="Text 35"/>
+          <p:cNvSpPr/>
+          <p:nvPr/>
+        </p:nvSpPr>
+        <p:spPr>
+          <a:xfrm>
+            <a:off x="1188720" y="5073091"/>
+            <a:ext cx="7498080" cy="292608"/>
+          </a:xfrm>
+          <a:prstGeom prst="rect">
+            <a:avLst/>
+          </a:prstGeom>
+          <a:noFill/>
+          <a:ln/>
+        </p:spPr>
+        <p:txBody>
+          <a:bodyPr wrap="square" lIns="0" tIns="0" rIns="0" bIns="0" rtlCol="0" anchor="ctr"/>
+          <a:lstStyle/>
+          <a:p>
+            <a:pPr indent="0" marL="0">
+              <a:buNone/>
+            </a:pPr>
+            <a:r>
+              <a:rPr lang="en-US" sz="1100" dirty="0">
+                <a:solidFill>
+                  <a:srgbClr val="6E6E6E"/>
+                </a:solidFill>
+                <a:latin typeface="Pretendard" pitchFamily="34" charset="0"/>
+                <a:ea typeface="Pretendard" pitchFamily="34" charset="-122"/>
+                <a:cs typeface="Pretendard" pitchFamily="34" charset="-120"/>
+              </a:rPr>
+              <a:t>한계 절입니다. 본인이 못 했다고 적어 둔 자리가 내가 들어갈 자리입니다</a:t>
+            </a:r>
+            <a:endParaRPr lang="en-US" sz="1100" dirty="0"/>
+          </a:p>
+        </p:txBody>
+      </p:sp>
+      <p:sp>
+        <p:nvSpPr>
+          <p:cNvPr id="38" name="Text 36"/>
+          <p:cNvSpPr/>
+          <p:nvPr/>
+        </p:nvSpPr>
+        <p:spPr>
+          <a:xfrm>
+            <a:off x="9357055" y="4853635"/>
+            <a:ext cx="2194560" cy="310896"/>
+          </a:xfrm>
+          <a:prstGeom prst="rect">
+            <a:avLst/>
+          </a:prstGeom>
+          <a:noFill/>
+          <a:ln/>
+        </p:spPr>
+        <p:txBody>
+          <a:bodyPr wrap="square" lIns="0" tIns="0" rIns="0" bIns="0" rtlCol="0" anchor="ctr"/>
+          <a:lstStyle/>
+          <a:p>
+            <a:pPr algn="r" indent="0" marL="0">
+              <a:buNone/>
+            </a:pPr>
+            <a:r>
+              <a:rPr lang="en-US" sz="1050" b="1" spc="120" kern="0" dirty="0">
+                <a:solidFill>
+                  <a:srgbClr val="111111"/>
+                </a:solidFill>
+                <a:latin typeface="Pretendard" pitchFamily="34" charset="0"/>
+                <a:ea typeface="Pretendard" pitchFamily="34" charset="-122"/>
+                <a:cs typeface="Pretendard" pitchFamily="34" charset="-120"/>
+              </a:rPr>
+              <a:t>한계</a:t>
+            </a:r>
+            <a:endParaRPr lang="en-US" sz="1050" dirty="0"/>
+          </a:p>
+        </p:txBody>
+      </p:sp>
+      <p:sp>
+        <p:nvSpPr>
+          <p:cNvPr id="39" name="Shape 37"/>
+          <p:cNvSpPr/>
+          <p:nvPr/>
+        </p:nvSpPr>
+        <p:spPr>
+          <a:xfrm>
+            <a:off x="640080" y="5522976"/>
+            <a:ext cx="10911535" cy="7315"/>
           </a:xfrm>
           <a:prstGeom prst="rect">
             <a:avLst/>
@@ -4942,207 +5690,14 @@
       </p:sp>
       <p:sp>
         <p:nvSpPr>
-          <p:cNvPr id="20" name="Shape 18"/>
-          <p:cNvSpPr/>
-          <p:nvPr/>
-        </p:nvSpPr>
-        <p:spPr>
-          <a:xfrm>
-            <a:off x="8542325" y="2011680"/>
-            <a:ext cx="365760" cy="365760"/>
-          </a:xfrm>
-          <a:prstGeom prst="ellipse">
-            <a:avLst/>
-          </a:prstGeom>
-          <a:solidFill>
-            <a:srgbClr val="111111"/>
-          </a:solidFill>
-          <a:ln w="12700">
-            <a:solidFill>
-              <a:srgbClr val="FFFFFF"/>
-            </a:solidFill>
-            <a:prstDash val="solid"/>
-          </a:ln>
-        </p:spPr>
-      </p:sp>
-      <p:sp>
-        <p:nvSpPr>
-          <p:cNvPr id="21" name="Text 19"/>
-          <p:cNvSpPr/>
-          <p:nvPr/>
-        </p:nvSpPr>
-        <p:spPr>
-          <a:xfrm>
-            <a:off x="8542325" y="2011680"/>
-            <a:ext cx="365760" cy="365760"/>
-          </a:xfrm>
-          <a:prstGeom prst="rect">
-            <a:avLst/>
-          </a:prstGeom>
-          <a:noFill/>
-          <a:ln/>
-        </p:spPr>
-        <p:txBody>
-          <a:bodyPr wrap="square" lIns="0" tIns="0" rIns="0" bIns="0" rtlCol="0" anchor="ctr"/>
-          <a:lstStyle/>
-          <a:p>
-            <a:pPr algn="ctr" indent="0" marL="0">
-              <a:buNone/>
-            </a:pPr>
-            <a:r>
-              <a:rPr lang="en-US" sz="1150" b="1" dirty="0">
-                <a:solidFill>
-                  <a:srgbClr val="FFFFFF"/>
-                </a:solidFill>
-                <a:latin typeface="Pretendard" pitchFamily="34" charset="0"/>
-                <a:ea typeface="Pretendard" pitchFamily="34" charset="-122"/>
-                <a:cs typeface="Pretendard" pitchFamily="34" charset="-120"/>
-              </a:rPr>
-              <a:t>03</a:t>
-            </a:r>
-            <a:endParaRPr lang="en-US" sz="1150" dirty="0"/>
-          </a:p>
-        </p:txBody>
-      </p:sp>
-      <p:sp>
-        <p:nvSpPr>
-          <p:cNvPr id="22" name="Text 20"/>
-          <p:cNvSpPr/>
-          <p:nvPr/>
-        </p:nvSpPr>
-        <p:spPr>
-          <a:xfrm>
-            <a:off x="8542325" y="2505456"/>
-            <a:ext cx="2625242" cy="457200"/>
-          </a:xfrm>
-          <a:prstGeom prst="rect">
-            <a:avLst/>
-          </a:prstGeom>
-          <a:noFill/>
-          <a:ln/>
-        </p:spPr>
-        <p:txBody>
-          <a:bodyPr wrap="square" lIns="0" tIns="0" rIns="0" bIns="0" rtlCol="0" anchor="t"/>
-          <a:lstStyle/>
-          <a:p>
-            <a:pPr indent="0" marL="0">
-              <a:lnSpc>
-                <a:spcPct val="114000"/>
-              </a:lnSpc>
-              <a:buNone/>
-            </a:pPr>
-            <a:r>
-              <a:rPr lang="en-US" sz="1700" dirty="0">
-                <a:solidFill>
-                  <a:srgbClr val="FFFFFF"/>
-                </a:solidFill>
-                <a:latin typeface="Pretendard SemiBold" pitchFamily="34" charset="0"/>
-                <a:ea typeface="Pretendard SemiBold" pitchFamily="34" charset="-122"/>
-                <a:cs typeface="Pretendard SemiBold" pitchFamily="34" charset="-120"/>
-              </a:rPr>
-              <a:t>빈칸을 찾는다</a:t>
-            </a:r>
-            <a:endParaRPr lang="en-US" sz="1700" dirty="0"/>
-          </a:p>
-        </p:txBody>
-      </p:sp>
-      <p:sp>
-        <p:nvSpPr>
-          <p:cNvPr id="23" name="Text 21"/>
-          <p:cNvSpPr/>
-          <p:nvPr/>
-        </p:nvSpPr>
-        <p:spPr>
-          <a:xfrm>
-            <a:off x="8542325" y="2999232"/>
-            <a:ext cx="2625242" cy="1645920"/>
-          </a:xfrm>
-          <a:prstGeom prst="rect">
-            <a:avLst/>
-          </a:prstGeom>
-          <a:noFill/>
-          <a:ln/>
-        </p:spPr>
-        <p:txBody>
-          <a:bodyPr wrap="square" lIns="0" tIns="0" rIns="0" bIns="0" rtlCol="0" anchor="t"/>
-          <a:lstStyle/>
-          <a:p>
-            <a:pPr indent="0" marL="0">
-              <a:lnSpc>
-                <a:spcPct val="130000"/>
-              </a:lnSpc>
-              <a:buNone/>
-            </a:pPr>
-            <a:r>
-              <a:rPr lang="en-US" sz="1150" dirty="0">
-                <a:solidFill>
-                  <a:srgbClr val="B8B8B8"/>
-                </a:solidFill>
-                <a:latin typeface="Pretendard" pitchFamily="34" charset="0"/>
-                <a:ea typeface="Pretendard" pitchFamily="34" charset="-122"/>
-                <a:cs typeface="Pretendard" pitchFamily="34" charset="-120"/>
-              </a:rPr>
-              <a:t>아무도 없는 칸이 내 자리의 후보입니다.</a:t>
-            </a:r>
-            <a:endParaRPr lang="en-US" sz="1150" dirty="0"/>
-          </a:p>
-          <a:p>
-            <a:pPr indent="0" marL="0">
-              <a:lnSpc>
-                <a:spcPct val="130000"/>
-              </a:lnSpc>
-              <a:buNone/>
-            </a:pPr>
-            <a:r>
-              <a:rPr lang="en-US" sz="1150" dirty="0">
-                <a:solidFill>
-                  <a:srgbClr val="B8B8B8"/>
-                </a:solidFill>
-                <a:latin typeface="Pretendard" pitchFamily="34" charset="0"/>
-                <a:ea typeface="Pretendard" pitchFamily="34" charset="-122"/>
-                <a:cs typeface="Pretendard" pitchFamily="34" charset="-120"/>
-              </a:rPr>
-              <a:t>다만 왜 비어 있는지도 생각하세요 — 할 필요가 없어서 빈 자리일 수도 있습니다.</a:t>
-            </a:r>
-            <a:endParaRPr lang="en-US" sz="1150" dirty="0"/>
-          </a:p>
-        </p:txBody>
-      </p:sp>
-      <p:sp>
-        <p:nvSpPr>
-          <p:cNvPr id="24" name="Shape 22"/>
-          <p:cNvSpPr/>
-          <p:nvPr/>
-        </p:nvSpPr>
-        <p:spPr>
-          <a:xfrm>
-            <a:off x="640080" y="5084064"/>
-            <a:ext cx="10911535" cy="7315"/>
-          </a:xfrm>
-          <a:prstGeom prst="rect">
-            <a:avLst/>
-          </a:prstGeom>
-          <a:solidFill>
-            <a:srgbClr val="111111"/>
-          </a:solidFill>
-          <a:ln w="12700">
-            <a:solidFill>
-              <a:srgbClr val="111111"/>
-            </a:solidFill>
-            <a:prstDash val="solid"/>
-          </a:ln>
-        </p:spPr>
-      </p:sp>
-      <p:sp>
-        <p:nvSpPr>
-          <p:cNvPr id="25" name="Text 23"/>
-          <p:cNvSpPr/>
-          <p:nvPr/>
-        </p:nvSpPr>
-        <p:spPr>
-          <a:xfrm>
-            <a:off x="640080" y="5193792"/>
-            <a:ext cx="10911535" cy="438912"/>
+          <p:cNvPr id="40" name="Text 38"/>
+          <p:cNvSpPr/>
+          <p:nvPr/>
+        </p:nvSpPr>
+        <p:spPr>
+          <a:xfrm>
+            <a:off x="640080" y="5632704"/>
+            <a:ext cx="10911535" cy="402336"/>
           </a:xfrm>
           <a:prstGeom prst="rect">
             <a:avLst/>
@@ -5161,7 +5716,7 @@
               <a:buNone/>
             </a:pPr>
             <a:r>
-              <a:rPr lang="en-US" sz="1300" b="1" dirty="0">
+              <a:rPr lang="en-US" sz="1250" b="1" dirty="0">
                 <a:solidFill>
                   <a:srgbClr val="111111"/>
                 </a:solidFill>
@@ -5169,15 +5724,15 @@
                 <a:ea typeface="Pretendard" pitchFamily="34" charset="-122"/>
                 <a:cs typeface="Pretendard" pitchFamily="34" charset="-120"/>
               </a:rPr>
-              <a:t>지난 회차의 계보도와 같은 작업입니다. 그때는 이론의 계보였고, 이번에는 내 주제의 지도입니다.</a:t>
-            </a:r>
-            <a:endParaRPr lang="en-US" sz="1300" dirty="0"/>
-          </a:p>
-        </p:txBody>
-      </p:sp>
-      <p:sp>
-        <p:nvSpPr>
-          <p:cNvPr id="26" name="Shape 24"/>
+              <a:t>결론만 가져오면 인용 한 줄이 남고, 과정을 가져오면 내 연구 설계가 남습니다.</a:t>
+            </a:r>
+            <a:endParaRPr lang="en-US" sz="1250" dirty="0"/>
+          </a:p>
+        </p:txBody>
+      </p:sp>
+      <p:sp>
+        <p:nvSpPr>
+          <p:cNvPr id="41" name="Shape 39"/>
           <p:cNvSpPr/>
           <p:nvPr/>
         </p:nvSpPr>
@@ -5202,7 +5757,7 @@
       </p:sp>
       <p:sp>
         <p:nvSpPr>
-          <p:cNvPr id="27" name="Text 25"/>
+          <p:cNvPr id="42" name="Text 40"/>
           <p:cNvSpPr/>
           <p:nvPr/>
         </p:nvSpPr>
@@ -5241,7 +5796,7 @@
       </p:sp>
       <p:sp>
         <p:nvSpPr>
-          <p:cNvPr id="28" name="Text 26"/>
+          <p:cNvPr id="43" name="Text 41"/>
           <p:cNvSpPr/>
           <p:nvPr/>
         </p:nvSpPr>
@@ -5485,7 +6040,7 @@
                 <a:ea typeface="Pretendard" pitchFamily="34" charset="-122"/>
                 <a:cs typeface="Pretendard" pitchFamily="34" charset="-120"/>
               </a:rPr>
-              <a:t>WORKSHOP</a:t>
+              <a:t>MAP</a:t>
             </a:r>
             <a:endParaRPr lang="en-US" sz="950" dirty="0"/>
           </a:p>
@@ -5524,7 +6079,7 @@
                 <a:ea typeface="Pretendard SemiBold" pitchFamily="34" charset="-122"/>
                 <a:cs typeface="Pretendard SemiBold" pitchFamily="34" charset="-120"/>
               </a:rPr>
-              <a:t>워크숍 · 내 주제로 다섯 편 찾기</a:t>
+              <a:t>지도 그리기</a:t>
             </a:r>
             <a:endParaRPr lang="en-US" sz="3000" dirty="0"/>
           </a:p>
@@ -5563,7 +6118,7 @@
                 <a:ea typeface="Pretendard" pitchFamily="34" charset="-122"/>
                 <a:cs typeface="Pretendard" pitchFamily="34" charset="-120"/>
               </a:rPr>
-              <a:t>개인 작업 — 오늘 안에 후보 목록까지 만들고 갑니다.</a:t>
+              <a:t>목록은 아직 지도가 아닙니다. 세 단계로 지도가 됩니다.</a:t>
             </a:r>
             <a:endParaRPr lang="en-US" sz="1150" dirty="0"/>
           </a:p>
@@ -5577,8 +6132,8 @@
         </p:nvSpPr>
         <p:spPr>
           <a:xfrm>
-            <a:off x="640080" y="1719072"/>
-            <a:ext cx="10911535" cy="822960"/>
+            <a:off x="640080" y="1737360"/>
+            <a:ext cx="3393338" cy="3035808"/>
           </a:xfrm>
           <a:prstGeom prst="rect">
             <a:avLst/>
@@ -5596,30 +6151,97 @@
       </p:sp>
       <p:sp>
         <p:nvSpPr>
-          <p:cNvPr id="10" name="Text 8"/>
-          <p:cNvSpPr/>
-          <p:nvPr/>
-        </p:nvSpPr>
-        <p:spPr>
-          <a:xfrm>
-            <a:off x="1097280" y="1810512"/>
-            <a:ext cx="3291840" cy="640080"/>
-          </a:xfrm>
-          <a:prstGeom prst="rect">
-            <a:avLst/>
-          </a:prstGeom>
-          <a:noFill/>
-          <a:ln/>
-        </p:spPr>
-        <p:txBody>
-          <a:bodyPr wrap="square" lIns="0" tIns="0" rIns="0" bIns="0" rtlCol="0" anchor="ctr"/>
-          <a:lstStyle/>
-          <a:p>
-            <a:pPr indent="0" marL="0">
-              <a:buNone/>
-            </a:pPr>
-            <a:r>
-              <a:rPr lang="en-US" sz="1450" dirty="0">
+          <p:cNvPr id="10" name="Shape 8"/>
+          <p:cNvSpPr/>
+          <p:nvPr/>
+        </p:nvSpPr>
+        <p:spPr>
+          <a:xfrm>
+            <a:off x="1024128" y="2011680"/>
+            <a:ext cx="365760" cy="365760"/>
+          </a:xfrm>
+          <a:prstGeom prst="ellipse">
+            <a:avLst/>
+          </a:prstGeom>
+          <a:solidFill>
+            <a:srgbClr val="FFFFFF"/>
+          </a:solidFill>
+          <a:ln w="12700">
+            <a:solidFill>
+              <a:srgbClr val="111111"/>
+            </a:solidFill>
+            <a:prstDash val="solid"/>
+          </a:ln>
+        </p:spPr>
+      </p:sp>
+      <p:sp>
+        <p:nvSpPr>
+          <p:cNvPr id="11" name="Text 9"/>
+          <p:cNvSpPr/>
+          <p:nvPr/>
+        </p:nvSpPr>
+        <p:spPr>
+          <a:xfrm>
+            <a:off x="1024128" y="2011680"/>
+            <a:ext cx="365760" cy="365760"/>
+          </a:xfrm>
+          <a:prstGeom prst="rect">
+            <a:avLst/>
+          </a:prstGeom>
+          <a:noFill/>
+          <a:ln/>
+        </p:spPr>
+        <p:txBody>
+          <a:bodyPr wrap="square" lIns="0" tIns="0" rIns="0" bIns="0" rtlCol="0" anchor="ctr"/>
+          <a:lstStyle/>
+          <a:p>
+            <a:pPr algn="ctr" indent="0" marL="0">
+              <a:buNone/>
+            </a:pPr>
+            <a:r>
+              <a:rPr lang="en-US" sz="1150" b="1" dirty="0">
+                <a:solidFill>
+                  <a:srgbClr val="111111"/>
+                </a:solidFill>
+                <a:latin typeface="Pretendard" pitchFamily="34" charset="0"/>
+                <a:ea typeface="Pretendard" pitchFamily="34" charset="-122"/>
+                <a:cs typeface="Pretendard" pitchFamily="34" charset="-120"/>
+              </a:rPr>
+              <a:t>01</a:t>
+            </a:r>
+            <a:endParaRPr lang="en-US" sz="1150" dirty="0"/>
+          </a:p>
+        </p:txBody>
+      </p:sp>
+      <p:sp>
+        <p:nvSpPr>
+          <p:cNvPr id="12" name="Text 10"/>
+          <p:cNvSpPr/>
+          <p:nvPr/>
+        </p:nvSpPr>
+        <p:spPr>
+          <a:xfrm>
+            <a:off x="1024128" y="2505456"/>
+            <a:ext cx="2625242" cy="457200"/>
+          </a:xfrm>
+          <a:prstGeom prst="rect">
+            <a:avLst/>
+          </a:prstGeom>
+          <a:noFill/>
+          <a:ln/>
+        </p:spPr>
+        <p:txBody>
+          <a:bodyPr wrap="square" lIns="0" tIns="0" rIns="0" bIns="0" rtlCol="0" anchor="t"/>
+          <a:lstStyle/>
+          <a:p>
+            <a:pPr indent="0" marL="0">
+              <a:lnSpc>
+                <a:spcPct val="114000"/>
+              </a:lnSpc>
+              <a:buNone/>
+            </a:pPr>
+            <a:r>
+              <a:rPr lang="en-US" sz="1700" dirty="0">
                 <a:solidFill>
                   <a:srgbClr val="111111"/>
                 </a:solidFill>
@@ -5627,36 +6249,36 @@
                 <a:ea typeface="Pretendard SemiBold" pitchFamily="34" charset="-122"/>
                 <a:cs typeface="Pretendard SemiBold" pitchFamily="34" charset="-120"/>
               </a:rPr>
-              <a:t>개념으로 쪼개기</a:t>
-            </a:r>
-            <a:endParaRPr lang="en-US" sz="1450" dirty="0"/>
-          </a:p>
-        </p:txBody>
-      </p:sp>
-      <p:sp>
-        <p:nvSpPr>
-          <p:cNvPr id="11" name="Text 9"/>
-          <p:cNvSpPr/>
-          <p:nvPr/>
-        </p:nvSpPr>
-        <p:spPr>
-          <a:xfrm>
-            <a:off x="4480560" y="1810512"/>
-            <a:ext cx="6705295" cy="640080"/>
-          </a:xfrm>
-          <a:prstGeom prst="rect">
-            <a:avLst/>
-          </a:prstGeom>
-          <a:noFill/>
-          <a:ln/>
-        </p:spPr>
-        <p:txBody>
-          <a:bodyPr wrap="square" lIns="0" tIns="0" rIns="0" bIns="0" rtlCol="0" anchor="ctr"/>
+              <a:t>묶는다</a:t>
+            </a:r>
+            <a:endParaRPr lang="en-US" sz="1700" dirty="0"/>
+          </a:p>
+        </p:txBody>
+      </p:sp>
+      <p:sp>
+        <p:nvSpPr>
+          <p:cNvPr id="13" name="Text 11"/>
+          <p:cNvSpPr/>
+          <p:nvPr/>
+        </p:nvSpPr>
+        <p:spPr>
+          <a:xfrm>
+            <a:off x="1024128" y="2999232"/>
+            <a:ext cx="2625242" cy="1645920"/>
+          </a:xfrm>
+          <a:prstGeom prst="rect">
+            <a:avLst/>
+          </a:prstGeom>
+          <a:noFill/>
+          <a:ln/>
+        </p:spPr>
+        <p:txBody>
+          <a:bodyPr wrap="square" lIns="0" tIns="0" rIns="0" bIns="0" rtlCol="0" anchor="t"/>
           <a:lstStyle/>
           <a:p>
             <a:pPr indent="0" marL="0">
               <a:lnSpc>
-                <a:spcPct val="124000"/>
+                <a:spcPct val="130000"/>
               </a:lnSpc>
               <a:buNone/>
             </a:pPr>
@@ -5669,22 +6291,42 @@
                 <a:ea typeface="Pretendard" pitchFamily="34" charset="-122"/>
                 <a:cs typeface="Pretendard" pitchFamily="34" charset="-120"/>
               </a:rPr>
-              <a:t>자기 주제를 개념 두세 개로 나눠 적습니다. 한국어로 먼저 적어도 됩니다.</a:t>
+              <a:t>비슷한 것끼리 모읍니다. 같은 방법 · 같은 문제 · 같은 결론.</a:t>
             </a:r>
             <a:endParaRPr lang="en-US" sz="1150" dirty="0"/>
           </a:p>
-        </p:txBody>
-      </p:sp>
-      <p:sp>
-        <p:nvSpPr>
-          <p:cNvPr id="12" name="Shape 10"/>
-          <p:cNvSpPr/>
-          <p:nvPr/>
-        </p:nvSpPr>
-        <p:spPr>
-          <a:xfrm>
-            <a:off x="640080" y="2688336"/>
-            <a:ext cx="10911535" cy="822960"/>
+          <a:p>
+            <a:pPr indent="0" marL="0">
+              <a:lnSpc>
+                <a:spcPct val="130000"/>
+              </a:lnSpc>
+              <a:buNone/>
+            </a:pPr>
+            <a:r>
+              <a:rPr lang="en-US" sz="1150" dirty="0">
+                <a:solidFill>
+                  <a:srgbClr val="6E6E6E"/>
+                </a:solidFill>
+                <a:latin typeface="Pretendard" pitchFamily="34" charset="0"/>
+                <a:ea typeface="Pretendard" pitchFamily="34" charset="-122"/>
+                <a:cs typeface="Pretendard" pitchFamily="34" charset="-120"/>
+              </a:rPr>
+              <a:t>묶다 보면 이 분야에 몇 개의 흐름이 있는지 보입니다.</a:t>
+            </a:r>
+            <a:endParaRPr lang="en-US" sz="1150" dirty="0"/>
+          </a:p>
+        </p:txBody>
+      </p:sp>
+      <p:sp>
+        <p:nvSpPr>
+          <p:cNvPr id="14" name="Shape 12"/>
+          <p:cNvSpPr/>
+          <p:nvPr/>
+        </p:nvSpPr>
+        <p:spPr>
+          <a:xfrm>
+            <a:off x="4399178" y="1737360"/>
+            <a:ext cx="3393338" cy="3035808"/>
           </a:xfrm>
           <a:prstGeom prst="rect">
             <a:avLst/>
@@ -5702,97 +6344,16 @@
       </p:sp>
       <p:sp>
         <p:nvSpPr>
-          <p:cNvPr id="13" name="Text 11"/>
-          <p:cNvSpPr/>
-          <p:nvPr/>
-        </p:nvSpPr>
-        <p:spPr>
-          <a:xfrm>
-            <a:off x="1097280" y="2779776"/>
-            <a:ext cx="3291840" cy="640080"/>
-          </a:xfrm>
-          <a:prstGeom prst="rect">
-            <a:avLst/>
-          </a:prstGeom>
-          <a:noFill/>
-          <a:ln/>
-        </p:spPr>
-        <p:txBody>
-          <a:bodyPr wrap="square" lIns="0" tIns="0" rIns="0" bIns="0" rtlCol="0" anchor="ctr"/>
-          <a:lstStyle/>
-          <a:p>
-            <a:pPr indent="0" marL="0">
-              <a:buNone/>
-            </a:pPr>
-            <a:r>
-              <a:rPr lang="en-US" sz="1450" dirty="0">
-                <a:solidFill>
-                  <a:srgbClr val="111111"/>
-                </a:solidFill>
-                <a:latin typeface="Pretendard SemiBold" pitchFamily="34" charset="0"/>
-                <a:ea typeface="Pretendard SemiBold" pitchFamily="34" charset="-122"/>
-                <a:cs typeface="Pretendard SemiBold" pitchFamily="34" charset="-120"/>
-              </a:rPr>
-              <a:t>영어 학술 용어 찾기</a:t>
-            </a:r>
-            <a:endParaRPr lang="en-US" sz="1450" dirty="0"/>
-          </a:p>
-        </p:txBody>
-      </p:sp>
-      <p:sp>
-        <p:nvSpPr>
-          <p:cNvPr id="14" name="Text 12"/>
-          <p:cNvSpPr/>
-          <p:nvPr/>
-        </p:nvSpPr>
-        <p:spPr>
-          <a:xfrm>
-            <a:off x="4480560" y="2779776"/>
-            <a:ext cx="6705295" cy="640080"/>
-          </a:xfrm>
-          <a:prstGeom prst="rect">
-            <a:avLst/>
-          </a:prstGeom>
-          <a:noFill/>
-          <a:ln/>
-        </p:spPr>
-        <p:txBody>
-          <a:bodyPr wrap="square" lIns="0" tIns="0" rIns="0" bIns="0" rtlCol="0" anchor="ctr"/>
-          <a:lstStyle/>
-          <a:p>
-            <a:pPr indent="0" marL="0">
-              <a:lnSpc>
-                <a:spcPct val="124000"/>
-              </a:lnSpc>
-              <a:buNone/>
-            </a:pPr>
-            <a:r>
-              <a:rPr lang="en-US" sz="1150" dirty="0">
-                <a:solidFill>
-                  <a:srgbClr val="6E6E6E"/>
-                </a:solidFill>
-                <a:latin typeface="Pretendard" pitchFamily="34" charset="0"/>
-                <a:ea typeface="Pretendard" pitchFamily="34" charset="-122"/>
-                <a:cs typeface="Pretendard" pitchFamily="34" charset="-120"/>
-              </a:rPr>
-              <a:t>비슷한 논문 한 편을 찾아 그 논문의 키워드 목록에서 빌려 옵니다. 막히면 손을 듭니다.</a:t>
-            </a:r>
-            <a:endParaRPr lang="en-US" sz="1150" dirty="0"/>
-          </a:p>
-        </p:txBody>
-      </p:sp>
-      <p:sp>
-        <p:nvSpPr>
           <p:cNvPr id="15" name="Shape 13"/>
           <p:cNvSpPr/>
           <p:nvPr/>
         </p:nvSpPr>
         <p:spPr>
           <a:xfrm>
-            <a:off x="640080" y="3657600"/>
-            <a:ext cx="10911535" cy="822960"/>
-          </a:xfrm>
-          <a:prstGeom prst="rect">
+            <a:off x="4783226" y="2011680"/>
+            <a:ext cx="365760" cy="365760"/>
+          </a:xfrm>
+          <a:prstGeom prst="ellipse">
             <a:avLst/>
           </a:prstGeom>
           <a:solidFill>
@@ -5800,7 +6361,7 @@
           </a:solidFill>
           <a:ln w="12700">
             <a:solidFill>
-              <a:srgbClr val="DCDCDC"/>
+              <a:srgbClr val="111111"/>
             </a:solidFill>
             <a:prstDash val="solid"/>
           </a:ln>
@@ -5814,24 +6375,66 @@
         </p:nvSpPr>
         <p:spPr>
           <a:xfrm>
-            <a:off x="1097280" y="3749040"/>
-            <a:ext cx="3291840" cy="640080"/>
-          </a:xfrm>
-          <a:prstGeom prst="rect">
-            <a:avLst/>
-          </a:prstGeom>
-          <a:noFill/>
-          <a:ln/>
-        </p:spPr>
-        <p:txBody>
-          <a:bodyPr wrap="square" lIns="0" tIns="0" rIns="0" bIns="0" rtlCol="0" anchor="ctr"/>
-          <a:lstStyle/>
-          <a:p>
-            <a:pPr indent="0" marL="0">
-              <a:buNone/>
-            </a:pPr>
-            <a:r>
-              <a:rPr lang="en-US" sz="1450" dirty="0">
+            <a:off x="4783226" y="2011680"/>
+            <a:ext cx="365760" cy="365760"/>
+          </a:xfrm>
+          <a:prstGeom prst="rect">
+            <a:avLst/>
+          </a:prstGeom>
+          <a:noFill/>
+          <a:ln/>
+        </p:spPr>
+        <p:txBody>
+          <a:bodyPr wrap="square" lIns="0" tIns="0" rIns="0" bIns="0" rtlCol="0" anchor="ctr"/>
+          <a:lstStyle/>
+          <a:p>
+            <a:pPr algn="ctr" indent="0" marL="0">
+              <a:buNone/>
+            </a:pPr>
+            <a:r>
+              <a:rPr lang="en-US" sz="1150" b="1" dirty="0">
+                <a:solidFill>
+                  <a:srgbClr val="111111"/>
+                </a:solidFill>
+                <a:latin typeface="Pretendard" pitchFamily="34" charset="0"/>
+                <a:ea typeface="Pretendard" pitchFamily="34" charset="-122"/>
+                <a:cs typeface="Pretendard" pitchFamily="34" charset="-120"/>
+              </a:rPr>
+              <a:t>02</a:t>
+            </a:r>
+            <a:endParaRPr lang="en-US" sz="1150" dirty="0"/>
+          </a:p>
+        </p:txBody>
+      </p:sp>
+      <p:sp>
+        <p:nvSpPr>
+          <p:cNvPr id="17" name="Text 15"/>
+          <p:cNvSpPr/>
+          <p:nvPr/>
+        </p:nvSpPr>
+        <p:spPr>
+          <a:xfrm>
+            <a:off x="4783226" y="2505456"/>
+            <a:ext cx="2625242" cy="457200"/>
+          </a:xfrm>
+          <a:prstGeom prst="rect">
+            <a:avLst/>
+          </a:prstGeom>
+          <a:noFill/>
+          <a:ln/>
+        </p:spPr>
+        <p:txBody>
+          <a:bodyPr wrap="square" lIns="0" tIns="0" rIns="0" bIns="0" rtlCol="0" anchor="t"/>
+          <a:lstStyle/>
+          <a:p>
+            <a:pPr indent="0" marL="0">
+              <a:lnSpc>
+                <a:spcPct val="114000"/>
+              </a:lnSpc>
+              <a:buNone/>
+            </a:pPr>
+            <a:r>
+              <a:rPr lang="en-US" sz="1700" dirty="0">
                 <a:solidFill>
                   <a:srgbClr val="111111"/>
                 </a:solidFill>
@@ -5839,36 +6442,36 @@
                 <a:ea typeface="Pretendard SemiBold" pitchFamily="34" charset="-122"/>
                 <a:cs typeface="Pretendard SemiBold" pitchFamily="34" charset="-120"/>
               </a:rPr>
-              <a:t>리뷰 논문과 눈덩이</a:t>
-            </a:r>
-            <a:endParaRPr lang="en-US" sz="1450" dirty="0"/>
-          </a:p>
-        </p:txBody>
-      </p:sp>
-      <p:sp>
-        <p:nvSpPr>
-          <p:cNvPr id="17" name="Text 15"/>
-          <p:cNvSpPr/>
-          <p:nvPr/>
-        </p:nvSpPr>
-        <p:spPr>
-          <a:xfrm>
-            <a:off x="4480560" y="3749040"/>
-            <a:ext cx="6705295" cy="640080"/>
-          </a:xfrm>
-          <a:prstGeom prst="rect">
-            <a:avLst/>
-          </a:prstGeom>
-          <a:noFill/>
-          <a:ln/>
-        </p:spPr>
-        <p:txBody>
-          <a:bodyPr wrap="square" lIns="0" tIns="0" rIns="0" bIns="0" rtlCol="0" anchor="ctr"/>
+              <a:t>축을 찾는다</a:t>
+            </a:r>
+            <a:endParaRPr lang="en-US" sz="1700" dirty="0"/>
+          </a:p>
+        </p:txBody>
+      </p:sp>
+      <p:sp>
+        <p:nvSpPr>
+          <p:cNvPr id="18" name="Text 16"/>
+          <p:cNvSpPr/>
+          <p:nvPr/>
+        </p:nvSpPr>
+        <p:spPr>
+          <a:xfrm>
+            <a:off x="4783226" y="2999232"/>
+            <a:ext cx="2625242" cy="1645920"/>
+          </a:xfrm>
+          <a:prstGeom prst="rect">
+            <a:avLst/>
+          </a:prstGeom>
+          <a:noFill/>
+          <a:ln/>
+        </p:spPr>
+        <p:txBody>
+          <a:bodyPr wrap="square" lIns="0" tIns="0" rIns="0" bIns="0" rtlCol="0" anchor="t"/>
           <a:lstStyle/>
           <a:p>
             <a:pPr indent="0" marL="0">
               <a:lnSpc>
-                <a:spcPct val="124000"/>
+                <a:spcPct val="130000"/>
               </a:lnSpc>
               <a:buNone/>
             </a:pPr>
@@ -5881,22 +6484,42 @@
                 <a:ea typeface="Pretendard" pitchFamily="34" charset="-122"/>
                 <a:cs typeface="Pretendard" pitchFamily="34" charset="-120"/>
               </a:rPr>
-              <a:t>review · survey 를 붙여 검색하고, 참고문헌과 인용 논문으로 후보 열 편을 모읍니다.</a:t>
+              <a:t>묶음들을 갈라놓는 기준을 찾습니다. 대개 두 개면 충분합니다.</a:t>
             </a:r>
             <a:endParaRPr lang="en-US" sz="1150" dirty="0"/>
           </a:p>
-        </p:txBody>
-      </p:sp>
-      <p:sp>
-        <p:nvSpPr>
-          <p:cNvPr id="18" name="Shape 16"/>
-          <p:cNvSpPr/>
-          <p:nvPr/>
-        </p:nvSpPr>
-        <p:spPr>
-          <a:xfrm>
-            <a:off x="640080" y="4626864"/>
-            <a:ext cx="10911535" cy="822960"/>
+          <a:p>
+            <a:pPr indent="0" marL="0">
+              <a:lnSpc>
+                <a:spcPct val="130000"/>
+              </a:lnSpc>
+              <a:buNone/>
+            </a:pPr>
+            <a:r>
+              <a:rPr lang="en-US" sz="1150" dirty="0">
+                <a:solidFill>
+                  <a:srgbClr val="6E6E6E"/>
+                </a:solidFill>
+                <a:latin typeface="Pretendard" pitchFamily="34" charset="0"/>
+                <a:ea typeface="Pretendard" pitchFamily="34" charset="-122"/>
+                <a:cs typeface="Pretendard" pitchFamily="34" charset="-120"/>
+              </a:rPr>
+              <a:t>그 두 축으로 판을 만들고 논문들을 올려놓습니다.</a:t>
+            </a:r>
+            <a:endParaRPr lang="en-US" sz="1150" dirty="0"/>
+          </a:p>
+        </p:txBody>
+      </p:sp>
+      <p:sp>
+        <p:nvSpPr>
+          <p:cNvPr id="19" name="Shape 17"/>
+          <p:cNvSpPr/>
+          <p:nvPr/>
+        </p:nvSpPr>
+        <p:spPr>
+          <a:xfrm>
+            <a:off x="8158277" y="1737360"/>
+            <a:ext cx="3393338" cy="3035808"/>
           </a:xfrm>
           <a:prstGeom prst="rect">
             <a:avLst/>
@@ -5914,30 +6537,97 @@
       </p:sp>
       <p:sp>
         <p:nvSpPr>
-          <p:cNvPr id="19" name="Text 17"/>
-          <p:cNvSpPr/>
-          <p:nvPr/>
-        </p:nvSpPr>
-        <p:spPr>
-          <a:xfrm>
-            <a:off x="1097280" y="4718304"/>
-            <a:ext cx="3291840" cy="640080"/>
-          </a:xfrm>
-          <a:prstGeom prst="rect">
-            <a:avLst/>
-          </a:prstGeom>
-          <a:noFill/>
-          <a:ln/>
-        </p:spPr>
-        <p:txBody>
-          <a:bodyPr wrap="square" lIns="0" tIns="0" rIns="0" bIns="0" rtlCol="0" anchor="ctr"/>
-          <a:lstStyle/>
-          <a:p>
-            <a:pPr indent="0" marL="0">
-              <a:buNone/>
-            </a:pPr>
-            <a:r>
-              <a:rPr lang="en-US" sz="1450" dirty="0">
+          <p:cNvPr id="20" name="Shape 18"/>
+          <p:cNvSpPr/>
+          <p:nvPr/>
+        </p:nvSpPr>
+        <p:spPr>
+          <a:xfrm>
+            <a:off x="8542325" y="2011680"/>
+            <a:ext cx="365760" cy="365760"/>
+          </a:xfrm>
+          <a:prstGeom prst="ellipse">
+            <a:avLst/>
+          </a:prstGeom>
+          <a:solidFill>
+            <a:srgbClr val="111111"/>
+          </a:solidFill>
+          <a:ln w="12700">
+            <a:solidFill>
+              <a:srgbClr val="FFFFFF"/>
+            </a:solidFill>
+            <a:prstDash val="solid"/>
+          </a:ln>
+        </p:spPr>
+      </p:sp>
+      <p:sp>
+        <p:nvSpPr>
+          <p:cNvPr id="21" name="Text 19"/>
+          <p:cNvSpPr/>
+          <p:nvPr/>
+        </p:nvSpPr>
+        <p:spPr>
+          <a:xfrm>
+            <a:off x="8542325" y="2011680"/>
+            <a:ext cx="365760" cy="365760"/>
+          </a:xfrm>
+          <a:prstGeom prst="rect">
+            <a:avLst/>
+          </a:prstGeom>
+          <a:noFill/>
+          <a:ln/>
+        </p:spPr>
+        <p:txBody>
+          <a:bodyPr wrap="square" lIns="0" tIns="0" rIns="0" bIns="0" rtlCol="0" anchor="ctr"/>
+          <a:lstStyle/>
+          <a:p>
+            <a:pPr algn="ctr" indent="0" marL="0">
+              <a:buNone/>
+            </a:pPr>
+            <a:r>
+              <a:rPr lang="en-US" sz="1150" b="1" dirty="0">
+                <a:solidFill>
+                  <a:srgbClr val="FFFFFF"/>
+                </a:solidFill>
+                <a:latin typeface="Pretendard" pitchFamily="34" charset="0"/>
+                <a:ea typeface="Pretendard" pitchFamily="34" charset="-122"/>
+                <a:cs typeface="Pretendard" pitchFamily="34" charset="-120"/>
+              </a:rPr>
+              <a:t>03</a:t>
+            </a:r>
+            <a:endParaRPr lang="en-US" sz="1150" dirty="0"/>
+          </a:p>
+        </p:txBody>
+      </p:sp>
+      <p:sp>
+        <p:nvSpPr>
+          <p:cNvPr id="22" name="Text 20"/>
+          <p:cNvSpPr/>
+          <p:nvPr/>
+        </p:nvSpPr>
+        <p:spPr>
+          <a:xfrm>
+            <a:off x="8542325" y="2505456"/>
+            <a:ext cx="2625242" cy="457200"/>
+          </a:xfrm>
+          <a:prstGeom prst="rect">
+            <a:avLst/>
+          </a:prstGeom>
+          <a:noFill/>
+          <a:ln/>
+        </p:spPr>
+        <p:txBody>
+          <a:bodyPr wrap="square" lIns="0" tIns="0" rIns="0" bIns="0" rtlCol="0" anchor="t"/>
+          <a:lstStyle/>
+          <a:p>
+            <a:pPr indent="0" marL="0">
+              <a:lnSpc>
+                <a:spcPct val="114000"/>
+              </a:lnSpc>
+              <a:buNone/>
+            </a:pPr>
+            <a:r>
+              <a:rPr lang="en-US" sz="1700" dirty="0">
                 <a:solidFill>
                   <a:srgbClr val="FFFFFF"/>
                 </a:solidFill>
@@ -5945,36 +6635,36 @@
                 <a:ea typeface="Pretendard SemiBold" pitchFamily="34" charset="-122"/>
                 <a:cs typeface="Pretendard SemiBold" pitchFamily="34" charset="-120"/>
               </a:rPr>
-              <a:t>다섯 편으로 줄이기</a:t>
-            </a:r>
-            <a:endParaRPr lang="en-US" sz="1450" dirty="0"/>
-          </a:p>
-        </p:txBody>
-      </p:sp>
-      <p:sp>
-        <p:nvSpPr>
-          <p:cNvPr id="20" name="Text 18"/>
-          <p:cNvSpPr/>
-          <p:nvPr/>
-        </p:nvSpPr>
-        <p:spPr>
-          <a:xfrm>
-            <a:off x="4480560" y="4718304"/>
-            <a:ext cx="6705295" cy="640080"/>
-          </a:xfrm>
-          <a:prstGeom prst="rect">
-            <a:avLst/>
-          </a:prstGeom>
-          <a:noFill/>
-          <a:ln/>
-        </p:spPr>
-        <p:txBody>
-          <a:bodyPr wrap="square" lIns="0" tIns="0" rIns="0" bIns="0" rtlCol="0" anchor="ctr"/>
+              <a:t>빈칸을 찾는다</a:t>
+            </a:r>
+            <a:endParaRPr lang="en-US" sz="1700" dirty="0"/>
+          </a:p>
+        </p:txBody>
+      </p:sp>
+      <p:sp>
+        <p:nvSpPr>
+          <p:cNvPr id="23" name="Text 21"/>
+          <p:cNvSpPr/>
+          <p:nvPr/>
+        </p:nvSpPr>
+        <p:spPr>
+          <a:xfrm>
+            <a:off x="8542325" y="2999232"/>
+            <a:ext cx="2625242" cy="1645920"/>
+          </a:xfrm>
+          <a:prstGeom prst="rect">
+            <a:avLst/>
+          </a:prstGeom>
+          <a:noFill/>
+          <a:ln/>
+        </p:spPr>
+        <p:txBody>
+          <a:bodyPr wrap="square" lIns="0" tIns="0" rIns="0" bIns="0" rtlCol="0" anchor="t"/>
           <a:lstStyle/>
           <a:p>
             <a:pPr indent="0" marL="0">
               <a:lnSpc>
-                <a:spcPct val="124000"/>
+                <a:spcPct val="130000"/>
               </a:lnSpc>
               <a:buNone/>
             </a:pPr>
@@ -5987,15 +6677,102 @@
                 <a:ea typeface="Pretendard" pitchFamily="34" charset="-122"/>
                 <a:cs typeface="Pretendard" pitchFamily="34" charset="-120"/>
               </a:rPr>
-              <a:t>초록만 보고 고릅니다. 정리표는 집에서 채웁니다.</a:t>
+              <a:t>아무도 없는 칸이 내 자리의 후보입니다.</a:t>
             </a:r>
             <a:endParaRPr lang="en-US" sz="1150" dirty="0"/>
           </a:p>
-        </p:txBody>
-      </p:sp>
-      <p:sp>
-        <p:nvSpPr>
-          <p:cNvPr id="21" name="Shape 19"/>
+          <a:p>
+            <a:pPr indent="0" marL="0">
+              <a:lnSpc>
+                <a:spcPct val="130000"/>
+              </a:lnSpc>
+              <a:buNone/>
+            </a:pPr>
+            <a:r>
+              <a:rPr lang="en-US" sz="1150" dirty="0">
+                <a:solidFill>
+                  <a:srgbClr val="B8B8B8"/>
+                </a:solidFill>
+                <a:latin typeface="Pretendard" pitchFamily="34" charset="0"/>
+                <a:ea typeface="Pretendard" pitchFamily="34" charset="-122"/>
+                <a:cs typeface="Pretendard" pitchFamily="34" charset="-120"/>
+              </a:rPr>
+              <a:t>다만 왜 비어 있는지도 생각하세요 — 할 필요가 없어서 빈 자리일 수도 있습니다.</a:t>
+            </a:r>
+            <a:endParaRPr lang="en-US" sz="1150" dirty="0"/>
+          </a:p>
+        </p:txBody>
+      </p:sp>
+      <p:sp>
+        <p:nvSpPr>
+          <p:cNvPr id="24" name="Shape 22"/>
+          <p:cNvSpPr/>
+          <p:nvPr/>
+        </p:nvSpPr>
+        <p:spPr>
+          <a:xfrm>
+            <a:off x="640080" y="5084064"/>
+            <a:ext cx="10911535" cy="7315"/>
+          </a:xfrm>
+          <a:prstGeom prst="rect">
+            <a:avLst/>
+          </a:prstGeom>
+          <a:solidFill>
+            <a:srgbClr val="111111"/>
+          </a:solidFill>
+          <a:ln w="12700">
+            <a:solidFill>
+              <a:srgbClr val="111111"/>
+            </a:solidFill>
+            <a:prstDash val="solid"/>
+          </a:ln>
+        </p:spPr>
+      </p:sp>
+      <p:sp>
+        <p:nvSpPr>
+          <p:cNvPr id="25" name="Text 23"/>
+          <p:cNvSpPr/>
+          <p:nvPr/>
+        </p:nvSpPr>
+        <p:spPr>
+          <a:xfrm>
+            <a:off x="640080" y="5193792"/>
+            <a:ext cx="10911535" cy="438912"/>
+          </a:xfrm>
+          <a:prstGeom prst="rect">
+            <a:avLst/>
+          </a:prstGeom>
+          <a:noFill/>
+          <a:ln/>
+        </p:spPr>
+        <p:txBody>
+          <a:bodyPr wrap="square" lIns="0" tIns="0" rIns="0" bIns="0" rtlCol="0" anchor="t"/>
+          <a:lstStyle/>
+          <a:p>
+            <a:pPr indent="0" marL="0">
+              <a:lnSpc>
+                <a:spcPct val="120000"/>
+              </a:lnSpc>
+              <a:buNone/>
+            </a:pPr>
+            <a:r>
+              <a:rPr lang="en-US" sz="1300" b="1" dirty="0">
+                <a:solidFill>
+                  <a:srgbClr val="111111"/>
+                </a:solidFill>
+                <a:latin typeface="Pretendard" pitchFamily="34" charset="0"/>
+                <a:ea typeface="Pretendard" pitchFamily="34" charset="-122"/>
+                <a:cs typeface="Pretendard" pitchFamily="34" charset="-120"/>
+              </a:rPr>
+              <a:t>지난 회차의 계보도와 같은 작업입니다. 그때는 이론의 계보였고, 이번에는 내 주제의 지도입니다.</a:t>
+            </a:r>
+            <a:endParaRPr lang="en-US" sz="1300" dirty="0"/>
+          </a:p>
+        </p:txBody>
+      </p:sp>
+      <p:sp>
+        <p:nvSpPr>
+          <p:cNvPr id="26" name="Shape 24"/>
           <p:cNvSpPr/>
           <p:nvPr/>
         </p:nvSpPr>
@@ -6020,7 +6797,7 @@
       </p:sp>
       <p:sp>
         <p:nvSpPr>
-          <p:cNvPr id="22" name="Text 20"/>
+          <p:cNvPr id="27" name="Text 25"/>
           <p:cNvSpPr/>
           <p:nvPr/>
         </p:nvSpPr>
@@ -6059,7 +6836,7 @@
       </p:sp>
       <p:sp>
         <p:nvSpPr>
-          <p:cNvPr id="23" name="Text 21"/>
+          <p:cNvPr id="28" name="Text 26"/>
           <p:cNvSpPr/>
           <p:nvPr/>
         </p:nvSpPr>
@@ -6303,7 +7080,7 @@
                 <a:ea typeface="Pretendard" pitchFamily="34" charset="-122"/>
                 <a:cs typeface="Pretendard" pitchFamily="34" charset="-120"/>
               </a:rPr>
-              <a:t>SUBMIT</a:t>
+              <a:t>WORKSHOP</a:t>
             </a:r>
             <a:endParaRPr lang="en-US" sz="950" dirty="0"/>
           </a:p>
@@ -6342,7 +7119,7 @@
                 <a:ea typeface="Pretendard SemiBold" pitchFamily="34" charset="-122"/>
                 <a:cs typeface="Pretendard SemiBold" pitchFamily="34" charset="-120"/>
               </a:rPr>
-              <a:t>오늘 확인하고 가는 것</a:t>
+              <a:t>워크숍 · 내 주제로 다섯 편 찾기</a:t>
             </a:r>
             <a:endParaRPr lang="en-US" sz="3000" dirty="0"/>
           </a:p>
@@ -6381,7 +7158,7 @@
                 <a:ea typeface="Pretendard" pitchFamily="34" charset="-122"/>
                 <a:cs typeface="Pretendard" pitchFamily="34" charset="-120"/>
               </a:rPr>
-              <a:t>다음 회차까지 2주가 있습니다.</a:t>
+              <a:t>개인 작업 — 오늘 안에 후보 목록까지 만들고 갑니다.</a:t>
             </a:r>
             <a:endParaRPr lang="en-US" sz="1150" dirty="0"/>
           </a:p>
@@ -6395,18 +7172,18 @@
         </p:nvSpPr>
         <p:spPr>
           <a:xfrm>
-            <a:off x="640080" y="1755648"/>
-            <a:ext cx="5254600" cy="585216"/>
+            <a:off x="640080" y="1719072"/>
+            <a:ext cx="10911535" cy="822960"/>
           </a:xfrm>
           <a:prstGeom prst="rect">
             <a:avLst/>
           </a:prstGeom>
           <a:solidFill>
-            <a:srgbClr val="F2F2F2"/>
+            <a:srgbClr val="FFFFFF"/>
           </a:solidFill>
           <a:ln w="12700">
             <a:solidFill>
-              <a:srgbClr val="F2F2F2"/>
+              <a:srgbClr val="DCDCDC"/>
             </a:solidFill>
             <a:prstDash val="solid"/>
           </a:ln>
@@ -6414,24 +7191,105 @@
       </p:sp>
       <p:sp>
         <p:nvSpPr>
-          <p:cNvPr id="10" name="Shape 8"/>
-          <p:cNvSpPr/>
-          <p:nvPr/>
-        </p:nvSpPr>
-        <p:spPr>
-          <a:xfrm>
-            <a:off x="914400" y="1892808"/>
-            <a:ext cx="310896" cy="310896"/>
-          </a:xfrm>
-          <a:prstGeom prst="ellipse">
+          <p:cNvPr id="10" name="Text 8"/>
+          <p:cNvSpPr/>
+          <p:nvPr/>
+        </p:nvSpPr>
+        <p:spPr>
+          <a:xfrm>
+            <a:off x="1097280" y="1810512"/>
+            <a:ext cx="3291840" cy="640080"/>
+          </a:xfrm>
+          <a:prstGeom prst="rect">
+            <a:avLst/>
+          </a:prstGeom>
+          <a:noFill/>
+          <a:ln/>
+        </p:spPr>
+        <p:txBody>
+          <a:bodyPr wrap="square" lIns="0" tIns="0" rIns="0" bIns="0" rtlCol="0" anchor="ctr"/>
+          <a:lstStyle/>
+          <a:p>
+            <a:pPr indent="0" marL="0">
+              <a:buNone/>
+            </a:pPr>
+            <a:r>
+              <a:rPr lang="en-US" sz="1450" dirty="0">
+                <a:solidFill>
+                  <a:srgbClr val="111111"/>
+                </a:solidFill>
+                <a:latin typeface="Pretendard SemiBold" pitchFamily="34" charset="0"/>
+                <a:ea typeface="Pretendard SemiBold" pitchFamily="34" charset="-122"/>
+                <a:cs typeface="Pretendard SemiBold" pitchFamily="34" charset="-120"/>
+              </a:rPr>
+              <a:t>개념으로 쪼개기</a:t>
+            </a:r>
+            <a:endParaRPr lang="en-US" sz="1450" dirty="0"/>
+          </a:p>
+        </p:txBody>
+      </p:sp>
+      <p:sp>
+        <p:nvSpPr>
+          <p:cNvPr id="11" name="Text 9"/>
+          <p:cNvSpPr/>
+          <p:nvPr/>
+        </p:nvSpPr>
+        <p:spPr>
+          <a:xfrm>
+            <a:off x="4480560" y="1810512"/>
+            <a:ext cx="6705295" cy="640080"/>
+          </a:xfrm>
+          <a:prstGeom prst="rect">
+            <a:avLst/>
+          </a:prstGeom>
+          <a:noFill/>
+          <a:ln/>
+        </p:spPr>
+        <p:txBody>
+          <a:bodyPr wrap="square" lIns="0" tIns="0" rIns="0" bIns="0" rtlCol="0" anchor="ctr"/>
+          <a:lstStyle/>
+          <a:p>
+            <a:pPr indent="0" marL="0">
+              <a:lnSpc>
+                <a:spcPct val="124000"/>
+              </a:lnSpc>
+              <a:buNone/>
+            </a:pPr>
+            <a:r>
+              <a:rPr lang="en-US" sz="1150" dirty="0">
+                <a:solidFill>
+                  <a:srgbClr val="6E6E6E"/>
+                </a:solidFill>
+                <a:latin typeface="Pretendard" pitchFamily="34" charset="0"/>
+                <a:ea typeface="Pretendard" pitchFamily="34" charset="-122"/>
+                <a:cs typeface="Pretendard" pitchFamily="34" charset="-120"/>
+              </a:rPr>
+              <a:t>자기 주제를 개념 두세 개로 나눠 적습니다. 한국어로 먼저 적어도 됩니다.</a:t>
+            </a:r>
+            <a:endParaRPr lang="en-US" sz="1150" dirty="0"/>
+          </a:p>
+        </p:txBody>
+      </p:sp>
+      <p:sp>
+        <p:nvSpPr>
+          <p:cNvPr id="12" name="Shape 10"/>
+          <p:cNvSpPr/>
+          <p:nvPr/>
+        </p:nvSpPr>
+        <p:spPr>
+          <a:xfrm>
+            <a:off x="640080" y="2688336"/>
+            <a:ext cx="10911535" cy="822960"/>
+          </a:xfrm>
+          <a:prstGeom prst="rect">
             <a:avLst/>
           </a:prstGeom>
           <a:solidFill>
-            <a:srgbClr val="F2F2F2"/>
+            <a:srgbClr val="FFFFFF"/>
           </a:solidFill>
           <a:ln w="12700">
             <a:solidFill>
-              <a:srgbClr val="111111"/>
+              <a:srgbClr val="DCDCDC"/>
             </a:solidFill>
             <a:prstDash val="solid"/>
           </a:ln>
@@ -6439,102 +7297,105 @@
       </p:sp>
       <p:sp>
         <p:nvSpPr>
-          <p:cNvPr id="11" name="Text 9"/>
-          <p:cNvSpPr/>
-          <p:nvPr/>
-        </p:nvSpPr>
-        <p:spPr>
-          <a:xfrm>
-            <a:off x="914400" y="1892808"/>
-            <a:ext cx="310896" cy="310896"/>
-          </a:xfrm>
-          <a:prstGeom prst="rect">
-            <a:avLst/>
-          </a:prstGeom>
-          <a:noFill/>
-          <a:ln/>
-        </p:spPr>
-        <p:txBody>
-          <a:bodyPr wrap="square" lIns="0" tIns="0" rIns="0" bIns="0" rtlCol="0" anchor="ctr"/>
-          <a:lstStyle/>
-          <a:p>
-            <a:pPr algn="ctr" indent="0" marL="0">
-              <a:buNone/>
-            </a:pPr>
-            <a:r>
-              <a:rPr lang="en-US" sz="900" b="1" dirty="0">
+          <p:cNvPr id="13" name="Text 11"/>
+          <p:cNvSpPr/>
+          <p:nvPr/>
+        </p:nvSpPr>
+        <p:spPr>
+          <a:xfrm>
+            <a:off x="1097280" y="2779776"/>
+            <a:ext cx="3291840" cy="640080"/>
+          </a:xfrm>
+          <a:prstGeom prst="rect">
+            <a:avLst/>
+          </a:prstGeom>
+          <a:noFill/>
+          <a:ln/>
+        </p:spPr>
+        <p:txBody>
+          <a:bodyPr wrap="square" lIns="0" tIns="0" rIns="0" bIns="0" rtlCol="0" anchor="ctr"/>
+          <a:lstStyle/>
+          <a:p>
+            <a:pPr indent="0" marL="0">
+              <a:buNone/>
+            </a:pPr>
+            <a:r>
+              <a:rPr lang="en-US" sz="1450" dirty="0">
                 <a:solidFill>
                   <a:srgbClr val="111111"/>
                 </a:solidFill>
-                <a:latin typeface="Pretendard" pitchFamily="34" charset="0"/>
-                <a:ea typeface="Pretendard" pitchFamily="34" charset="-122"/>
-                <a:cs typeface="Pretendard" pitchFamily="34" charset="-120"/>
-              </a:rPr>
-              <a:t>01</a:t>
-            </a:r>
-            <a:endParaRPr lang="en-US" sz="900" dirty="0"/>
-          </a:p>
-        </p:txBody>
-      </p:sp>
-      <p:sp>
-        <p:nvSpPr>
-          <p:cNvPr id="12" name="Text 10"/>
-          <p:cNvSpPr/>
-          <p:nvPr/>
-        </p:nvSpPr>
-        <p:spPr>
-          <a:xfrm>
-            <a:off x="1353312" y="1755648"/>
-            <a:ext cx="4267048" cy="585216"/>
-          </a:xfrm>
-          <a:prstGeom prst="rect">
-            <a:avLst/>
-          </a:prstGeom>
-          <a:noFill/>
-          <a:ln/>
-        </p:spPr>
-        <p:txBody>
-          <a:bodyPr wrap="square" lIns="0" tIns="0" rIns="0" bIns="0" rtlCol="0" anchor="ctr"/>
-          <a:lstStyle/>
-          <a:p>
-            <a:pPr indent="0" marL="0">
-              <a:buNone/>
-            </a:pPr>
-            <a:r>
-              <a:rPr lang="en-US" sz="1200" dirty="0">
-                <a:solidFill>
-                  <a:srgbClr val="111111"/>
-                </a:solidFill>
-                <a:latin typeface="Pretendard" pitchFamily="34" charset="0"/>
-                <a:ea typeface="Pretendard" pitchFamily="34" charset="-122"/>
-                <a:cs typeface="Pretendard" pitchFamily="34" charset="-120"/>
-              </a:rPr>
-              <a:t>내 주제를 개념 두세 개로 쪼갰다</a:t>
-            </a:r>
-            <a:endParaRPr lang="en-US" sz="1200" dirty="0"/>
-          </a:p>
-        </p:txBody>
-      </p:sp>
-      <p:sp>
-        <p:nvSpPr>
-          <p:cNvPr id="13" name="Shape 11"/>
-          <p:cNvSpPr/>
-          <p:nvPr/>
-        </p:nvSpPr>
-        <p:spPr>
-          <a:xfrm>
-            <a:off x="640080" y="2487168"/>
-            <a:ext cx="5254600" cy="585216"/>
+                <a:latin typeface="Pretendard SemiBold" pitchFamily="34" charset="0"/>
+                <a:ea typeface="Pretendard SemiBold" pitchFamily="34" charset="-122"/>
+                <a:cs typeface="Pretendard SemiBold" pitchFamily="34" charset="-120"/>
+              </a:rPr>
+              <a:t>영어 학술 용어 찾기</a:t>
+            </a:r>
+            <a:endParaRPr lang="en-US" sz="1450" dirty="0"/>
+          </a:p>
+        </p:txBody>
+      </p:sp>
+      <p:sp>
+        <p:nvSpPr>
+          <p:cNvPr id="14" name="Text 12"/>
+          <p:cNvSpPr/>
+          <p:nvPr/>
+        </p:nvSpPr>
+        <p:spPr>
+          <a:xfrm>
+            <a:off x="4480560" y="2779776"/>
+            <a:ext cx="6705295" cy="640080"/>
+          </a:xfrm>
+          <a:prstGeom prst="rect">
+            <a:avLst/>
+          </a:prstGeom>
+          <a:noFill/>
+          <a:ln/>
+        </p:spPr>
+        <p:txBody>
+          <a:bodyPr wrap="square" lIns="0" tIns="0" rIns="0" bIns="0" rtlCol="0" anchor="ctr"/>
+          <a:lstStyle/>
+          <a:p>
+            <a:pPr indent="0" marL="0">
+              <a:lnSpc>
+                <a:spcPct val="124000"/>
+              </a:lnSpc>
+              <a:buNone/>
+            </a:pPr>
+            <a:r>
+              <a:rPr lang="en-US" sz="1150" dirty="0">
+                <a:solidFill>
+                  <a:srgbClr val="6E6E6E"/>
+                </a:solidFill>
+                <a:latin typeface="Pretendard" pitchFamily="34" charset="0"/>
+                <a:ea typeface="Pretendard" pitchFamily="34" charset="-122"/>
+                <a:cs typeface="Pretendard" pitchFamily="34" charset="-120"/>
+              </a:rPr>
+              <a:t>비슷한 논문 한 편을 찾아 그 논문의 키워드 목록에서 빌려 옵니다. 막히면 손을 듭니다.</a:t>
+            </a:r>
+            <a:endParaRPr lang="en-US" sz="1150" dirty="0"/>
+          </a:p>
+        </p:txBody>
+      </p:sp>
+      <p:sp>
+        <p:nvSpPr>
+          <p:cNvPr id="15" name="Shape 13"/>
+          <p:cNvSpPr/>
+          <p:nvPr/>
+        </p:nvSpPr>
+        <p:spPr>
+          <a:xfrm>
+            <a:off x="640080" y="3657600"/>
+            <a:ext cx="10911535" cy="822960"/>
           </a:xfrm>
           <a:prstGeom prst="rect">
             <a:avLst/>
           </a:prstGeom>
           <a:solidFill>
-            <a:srgbClr val="F2F2F2"/>
+            <a:srgbClr val="FFFFFF"/>
           </a:solidFill>
           <a:ln w="12700">
             <a:solidFill>
-              <a:srgbClr val="F2F2F2"/>
+              <a:srgbClr val="DCDCDC"/>
             </a:solidFill>
             <a:prstDash val="solid"/>
           </a:ln>
@@ -6542,131 +7403,84 @@
       </p:sp>
       <p:sp>
         <p:nvSpPr>
-          <p:cNvPr id="14" name="Shape 12"/>
-          <p:cNvSpPr/>
-          <p:nvPr/>
-        </p:nvSpPr>
-        <p:spPr>
-          <a:xfrm>
-            <a:off x="914400" y="2624328"/>
-            <a:ext cx="310896" cy="310896"/>
-          </a:xfrm>
-          <a:prstGeom prst="ellipse">
-            <a:avLst/>
-          </a:prstGeom>
-          <a:solidFill>
-            <a:srgbClr val="F2F2F2"/>
-          </a:solidFill>
-          <a:ln w="12700">
-            <a:solidFill>
-              <a:srgbClr val="111111"/>
-            </a:solidFill>
-            <a:prstDash val="solid"/>
-          </a:ln>
-        </p:spPr>
-      </p:sp>
-      <p:sp>
-        <p:nvSpPr>
-          <p:cNvPr id="15" name="Text 13"/>
-          <p:cNvSpPr/>
-          <p:nvPr/>
-        </p:nvSpPr>
-        <p:spPr>
-          <a:xfrm>
-            <a:off x="914400" y="2624328"/>
-            <a:ext cx="310896" cy="310896"/>
-          </a:xfrm>
-          <a:prstGeom prst="rect">
-            <a:avLst/>
-          </a:prstGeom>
-          <a:noFill/>
-          <a:ln/>
-        </p:spPr>
-        <p:txBody>
-          <a:bodyPr wrap="square" lIns="0" tIns="0" rIns="0" bIns="0" rtlCol="0" anchor="ctr"/>
-          <a:lstStyle/>
-          <a:p>
-            <a:pPr algn="ctr" indent="0" marL="0">
-              <a:buNone/>
-            </a:pPr>
-            <a:r>
-              <a:rPr lang="en-US" sz="900" b="1" dirty="0">
+          <p:cNvPr id="16" name="Text 14"/>
+          <p:cNvSpPr/>
+          <p:nvPr/>
+        </p:nvSpPr>
+        <p:spPr>
+          <a:xfrm>
+            <a:off x="1097280" y="3749040"/>
+            <a:ext cx="3291840" cy="640080"/>
+          </a:xfrm>
+          <a:prstGeom prst="rect">
+            <a:avLst/>
+          </a:prstGeom>
+          <a:noFill/>
+          <a:ln/>
+        </p:spPr>
+        <p:txBody>
+          <a:bodyPr wrap="square" lIns="0" tIns="0" rIns="0" bIns="0" rtlCol="0" anchor="ctr"/>
+          <a:lstStyle/>
+          <a:p>
+            <a:pPr indent="0" marL="0">
+              <a:buNone/>
+            </a:pPr>
+            <a:r>
+              <a:rPr lang="en-US" sz="1450" dirty="0">
                 <a:solidFill>
                   <a:srgbClr val="111111"/>
                 </a:solidFill>
-                <a:latin typeface="Pretendard" pitchFamily="34" charset="0"/>
-                <a:ea typeface="Pretendard" pitchFamily="34" charset="-122"/>
-                <a:cs typeface="Pretendard" pitchFamily="34" charset="-120"/>
-              </a:rPr>
-              <a:t>02</a:t>
-            </a:r>
-            <a:endParaRPr lang="en-US" sz="900" dirty="0"/>
-          </a:p>
-        </p:txBody>
-      </p:sp>
-      <p:sp>
-        <p:nvSpPr>
-          <p:cNvPr id="16" name="Text 14"/>
-          <p:cNvSpPr/>
-          <p:nvPr/>
-        </p:nvSpPr>
-        <p:spPr>
-          <a:xfrm>
-            <a:off x="1353312" y="2487168"/>
-            <a:ext cx="4267048" cy="585216"/>
-          </a:xfrm>
-          <a:prstGeom prst="rect">
-            <a:avLst/>
-          </a:prstGeom>
-          <a:noFill/>
-          <a:ln/>
-        </p:spPr>
-        <p:txBody>
-          <a:bodyPr wrap="square" lIns="0" tIns="0" rIns="0" bIns="0" rtlCol="0" anchor="ctr"/>
-          <a:lstStyle/>
-          <a:p>
-            <a:pPr indent="0" marL="0">
-              <a:buNone/>
-            </a:pPr>
-            <a:r>
-              <a:rPr lang="en-US" sz="1200" dirty="0">
-                <a:solidFill>
-                  <a:srgbClr val="111111"/>
-                </a:solidFill>
-                <a:latin typeface="Pretendard" pitchFamily="34" charset="0"/>
-                <a:ea typeface="Pretendard" pitchFamily="34" charset="-122"/>
-                <a:cs typeface="Pretendard" pitchFamily="34" charset="-120"/>
-              </a:rPr>
-              <a:t>각 개념의 영어 학술 용어를 찾았다</a:t>
-            </a:r>
-            <a:endParaRPr lang="en-US" sz="1200" dirty="0"/>
-          </a:p>
-        </p:txBody>
-      </p:sp>
-      <p:sp>
-        <p:nvSpPr>
-          <p:cNvPr id="17" name="Shape 15"/>
-          <p:cNvSpPr/>
-          <p:nvPr/>
-        </p:nvSpPr>
-        <p:spPr>
-          <a:xfrm>
-            <a:off x="640080" y="3218688"/>
-            <a:ext cx="5254600" cy="585216"/>
-          </a:xfrm>
-          <a:prstGeom prst="rect">
-            <a:avLst/>
-          </a:prstGeom>
-          <a:solidFill>
-            <a:srgbClr val="F2F2F2"/>
-          </a:solidFill>
-          <a:ln w="12700">
-            <a:solidFill>
-              <a:srgbClr val="F2F2F2"/>
-            </a:solidFill>
-            <a:prstDash val="solid"/>
-          </a:ln>
-        </p:spPr>
+                <a:latin typeface="Pretendard SemiBold" pitchFamily="34" charset="0"/>
+                <a:ea typeface="Pretendard SemiBold" pitchFamily="34" charset="-122"/>
+                <a:cs typeface="Pretendard SemiBold" pitchFamily="34" charset="-120"/>
+              </a:rPr>
+              <a:t>리뷰 논문과 눈덩이</a:t>
+            </a:r>
+            <a:endParaRPr lang="en-US" sz="1450" dirty="0"/>
+          </a:p>
+        </p:txBody>
+      </p:sp>
+      <p:sp>
+        <p:nvSpPr>
+          <p:cNvPr id="17" name="Text 15"/>
+          <p:cNvSpPr/>
+          <p:nvPr/>
+        </p:nvSpPr>
+        <p:spPr>
+          <a:xfrm>
+            <a:off x="4480560" y="3749040"/>
+            <a:ext cx="6705295" cy="640080"/>
+          </a:xfrm>
+          <a:prstGeom prst="rect">
+            <a:avLst/>
+          </a:prstGeom>
+          <a:noFill/>
+          <a:ln/>
+        </p:spPr>
+        <p:txBody>
+          <a:bodyPr wrap="square" lIns="0" tIns="0" rIns="0" bIns="0" rtlCol="0" anchor="ctr"/>
+          <a:lstStyle/>
+          <a:p>
+            <a:pPr indent="0" marL="0">
+              <a:lnSpc>
+                <a:spcPct val="124000"/>
+              </a:lnSpc>
+              <a:buNone/>
+            </a:pPr>
+            <a:r>
+              <a:rPr lang="en-US" sz="1150" dirty="0">
+                <a:solidFill>
+                  <a:srgbClr val="6E6E6E"/>
+                </a:solidFill>
+                <a:latin typeface="Pretendard" pitchFamily="34" charset="0"/>
+                <a:ea typeface="Pretendard" pitchFamily="34" charset="-122"/>
+                <a:cs typeface="Pretendard" pitchFamily="34" charset="-120"/>
+              </a:rPr>
+              <a:t>review · survey 를 붙여 검색하고, 참고문헌과 인용 논문으로 후보 열 편을 모읍니다.</a:t>
+            </a:r>
+            <a:endParaRPr lang="en-US" sz="1150" dirty="0"/>
+          </a:p>
+        </p:txBody>
       </p:sp>
       <p:sp>
         <p:nvSpPr>
@@ -6676,751 +7490,8 @@
         </p:nvSpPr>
         <p:spPr>
           <a:xfrm>
-            <a:off x="914400" y="3355848"/>
-            <a:ext cx="310896" cy="310896"/>
-          </a:xfrm>
-          <a:prstGeom prst="ellipse">
-            <a:avLst/>
-          </a:prstGeom>
-          <a:solidFill>
-            <a:srgbClr val="F2F2F2"/>
-          </a:solidFill>
-          <a:ln w="12700">
-            <a:solidFill>
-              <a:srgbClr val="111111"/>
-            </a:solidFill>
-            <a:prstDash val="solid"/>
-          </a:ln>
-        </p:spPr>
-      </p:sp>
-      <p:sp>
-        <p:nvSpPr>
-          <p:cNvPr id="19" name="Text 17"/>
-          <p:cNvSpPr/>
-          <p:nvPr/>
-        </p:nvSpPr>
-        <p:spPr>
-          <a:xfrm>
-            <a:off x="914400" y="3355848"/>
-            <a:ext cx="310896" cy="310896"/>
-          </a:xfrm>
-          <a:prstGeom prst="rect">
-            <a:avLst/>
-          </a:prstGeom>
-          <a:noFill/>
-          <a:ln/>
-        </p:spPr>
-        <p:txBody>
-          <a:bodyPr wrap="square" lIns="0" tIns="0" rIns="0" bIns="0" rtlCol="0" anchor="ctr"/>
-          <a:lstStyle/>
-          <a:p>
-            <a:pPr algn="ctr" indent="0" marL="0">
-              <a:buNone/>
-            </a:pPr>
-            <a:r>
-              <a:rPr lang="en-US" sz="900" b="1" dirty="0">
-                <a:solidFill>
-                  <a:srgbClr val="111111"/>
-                </a:solidFill>
-                <a:latin typeface="Pretendard" pitchFamily="34" charset="0"/>
-                <a:ea typeface="Pretendard" pitchFamily="34" charset="-122"/>
-                <a:cs typeface="Pretendard" pitchFamily="34" charset="-120"/>
-              </a:rPr>
-              <a:t>03</a:t>
-            </a:r>
-            <a:endParaRPr lang="en-US" sz="900" dirty="0"/>
-          </a:p>
-        </p:txBody>
-      </p:sp>
-      <p:sp>
-        <p:nvSpPr>
-          <p:cNvPr id="20" name="Text 18"/>
-          <p:cNvSpPr/>
-          <p:nvPr/>
-        </p:nvSpPr>
-        <p:spPr>
-          <a:xfrm>
-            <a:off x="1353312" y="3218688"/>
-            <a:ext cx="4267048" cy="585216"/>
-          </a:xfrm>
-          <a:prstGeom prst="rect">
-            <a:avLst/>
-          </a:prstGeom>
-          <a:noFill/>
-          <a:ln/>
-        </p:spPr>
-        <p:txBody>
-          <a:bodyPr wrap="square" lIns="0" tIns="0" rIns="0" bIns="0" rtlCol="0" anchor="ctr"/>
-          <a:lstStyle/>
-          <a:p>
-            <a:pPr indent="0" marL="0">
-              <a:buNone/>
-            </a:pPr>
-            <a:r>
-              <a:rPr lang="en-US" sz="1200" dirty="0">
-                <a:solidFill>
-                  <a:srgbClr val="111111"/>
-                </a:solidFill>
-                <a:latin typeface="Pretendard" pitchFamily="34" charset="0"/>
-                <a:ea typeface="Pretendard" pitchFamily="34" charset="-122"/>
-                <a:cs typeface="Pretendard" pitchFamily="34" charset="-120"/>
-              </a:rPr>
-              <a:t>도서관 전자저널에서 원문이 열리는 것을 확인했다</a:t>
-            </a:r>
-            <a:endParaRPr lang="en-US" sz="1200" dirty="0"/>
-          </a:p>
-        </p:txBody>
-      </p:sp>
-      <p:sp>
-        <p:nvSpPr>
-          <p:cNvPr id="21" name="Shape 19"/>
-          <p:cNvSpPr/>
-          <p:nvPr/>
-        </p:nvSpPr>
-        <p:spPr>
-          <a:xfrm>
-            <a:off x="640080" y="3950208"/>
-            <a:ext cx="5254600" cy="585216"/>
-          </a:xfrm>
-          <a:prstGeom prst="rect">
-            <a:avLst/>
-          </a:prstGeom>
-          <a:solidFill>
-            <a:srgbClr val="F2F2F2"/>
-          </a:solidFill>
-          <a:ln w="12700">
-            <a:solidFill>
-              <a:srgbClr val="F2F2F2"/>
-            </a:solidFill>
-            <a:prstDash val="solid"/>
-          </a:ln>
-        </p:spPr>
-      </p:sp>
-      <p:sp>
-        <p:nvSpPr>
-          <p:cNvPr id="22" name="Shape 20"/>
-          <p:cNvSpPr/>
-          <p:nvPr/>
-        </p:nvSpPr>
-        <p:spPr>
-          <a:xfrm>
-            <a:off x="914400" y="4087368"/>
-            <a:ext cx="310896" cy="310896"/>
-          </a:xfrm>
-          <a:prstGeom prst="ellipse">
-            <a:avLst/>
-          </a:prstGeom>
-          <a:solidFill>
-            <a:srgbClr val="F2F2F2"/>
-          </a:solidFill>
-          <a:ln w="12700">
-            <a:solidFill>
-              <a:srgbClr val="111111"/>
-            </a:solidFill>
-            <a:prstDash val="solid"/>
-          </a:ln>
-        </p:spPr>
-      </p:sp>
-      <p:sp>
-        <p:nvSpPr>
-          <p:cNvPr id="23" name="Text 21"/>
-          <p:cNvSpPr/>
-          <p:nvPr/>
-        </p:nvSpPr>
-        <p:spPr>
-          <a:xfrm>
-            <a:off x="914400" y="4087368"/>
-            <a:ext cx="310896" cy="310896"/>
-          </a:xfrm>
-          <a:prstGeom prst="rect">
-            <a:avLst/>
-          </a:prstGeom>
-          <a:noFill/>
-          <a:ln/>
-        </p:spPr>
-        <p:txBody>
-          <a:bodyPr wrap="square" lIns="0" tIns="0" rIns="0" bIns="0" rtlCol="0" anchor="ctr"/>
-          <a:lstStyle/>
-          <a:p>
-            <a:pPr algn="ctr" indent="0" marL="0">
-              <a:buNone/>
-            </a:pPr>
-            <a:r>
-              <a:rPr lang="en-US" sz="900" b="1" dirty="0">
-                <a:solidFill>
-                  <a:srgbClr val="111111"/>
-                </a:solidFill>
-                <a:latin typeface="Pretendard" pitchFamily="34" charset="0"/>
-                <a:ea typeface="Pretendard" pitchFamily="34" charset="-122"/>
-                <a:cs typeface="Pretendard" pitchFamily="34" charset="-120"/>
-              </a:rPr>
-              <a:t>04</a:t>
-            </a:r>
-            <a:endParaRPr lang="en-US" sz="900" dirty="0"/>
-          </a:p>
-        </p:txBody>
-      </p:sp>
-      <p:sp>
-        <p:nvSpPr>
-          <p:cNvPr id="24" name="Text 22"/>
-          <p:cNvSpPr/>
-          <p:nvPr/>
-        </p:nvSpPr>
-        <p:spPr>
-          <a:xfrm>
-            <a:off x="1353312" y="3950208"/>
-            <a:ext cx="4267048" cy="585216"/>
-          </a:xfrm>
-          <a:prstGeom prst="rect">
-            <a:avLst/>
-          </a:prstGeom>
-          <a:noFill/>
-          <a:ln/>
-        </p:spPr>
-        <p:txBody>
-          <a:bodyPr wrap="square" lIns="0" tIns="0" rIns="0" bIns="0" rtlCol="0" anchor="ctr"/>
-          <a:lstStyle/>
-          <a:p>
-            <a:pPr indent="0" marL="0">
-              <a:buNone/>
-            </a:pPr>
-            <a:r>
-              <a:rPr lang="en-US" sz="1200" dirty="0">
-                <a:solidFill>
-                  <a:srgbClr val="111111"/>
-                </a:solidFill>
-                <a:latin typeface="Pretendard" pitchFamily="34" charset="0"/>
-                <a:ea typeface="Pretendard" pitchFamily="34" charset="-122"/>
-                <a:cs typeface="Pretendard" pitchFamily="34" charset="-120"/>
-              </a:rPr>
-              <a:t>후보 논문 다섯 편의 목록을 만들었다</a:t>
-            </a:r>
-            <a:endParaRPr lang="en-US" sz="1200" dirty="0"/>
-          </a:p>
-        </p:txBody>
-      </p:sp>
-      <p:sp>
-        <p:nvSpPr>
-          <p:cNvPr id="25" name="Shape 23"/>
-          <p:cNvSpPr/>
-          <p:nvPr/>
-        </p:nvSpPr>
-        <p:spPr>
-          <a:xfrm>
-            <a:off x="6297016" y="1755648"/>
-            <a:ext cx="5254600" cy="585216"/>
-          </a:xfrm>
-          <a:prstGeom prst="rect">
-            <a:avLst/>
-          </a:prstGeom>
-          <a:solidFill>
-            <a:srgbClr val="F2F2F2"/>
-          </a:solidFill>
-          <a:ln w="12700">
-            <a:solidFill>
-              <a:srgbClr val="F2F2F2"/>
-            </a:solidFill>
-            <a:prstDash val="solid"/>
-          </a:ln>
-        </p:spPr>
-      </p:sp>
-      <p:sp>
-        <p:nvSpPr>
-          <p:cNvPr id="26" name="Shape 24"/>
-          <p:cNvSpPr/>
-          <p:nvPr/>
-        </p:nvSpPr>
-        <p:spPr>
-          <a:xfrm>
-            <a:off x="6571336" y="1892808"/>
-            <a:ext cx="310896" cy="310896"/>
-          </a:xfrm>
-          <a:prstGeom prst="ellipse">
-            <a:avLst/>
-          </a:prstGeom>
-          <a:solidFill>
-            <a:srgbClr val="F2F2F2"/>
-          </a:solidFill>
-          <a:ln w="12700">
-            <a:solidFill>
-              <a:srgbClr val="111111"/>
-            </a:solidFill>
-            <a:prstDash val="solid"/>
-          </a:ln>
-        </p:spPr>
-      </p:sp>
-      <p:sp>
-        <p:nvSpPr>
-          <p:cNvPr id="27" name="Text 25"/>
-          <p:cNvSpPr/>
-          <p:nvPr/>
-        </p:nvSpPr>
-        <p:spPr>
-          <a:xfrm>
-            <a:off x="6571336" y="1892808"/>
-            <a:ext cx="310896" cy="310896"/>
-          </a:xfrm>
-          <a:prstGeom prst="rect">
-            <a:avLst/>
-          </a:prstGeom>
-          <a:noFill/>
-          <a:ln/>
-        </p:spPr>
-        <p:txBody>
-          <a:bodyPr wrap="square" lIns="0" tIns="0" rIns="0" bIns="0" rtlCol="0" anchor="ctr"/>
-          <a:lstStyle/>
-          <a:p>
-            <a:pPr algn="ctr" indent="0" marL="0">
-              <a:buNone/>
-            </a:pPr>
-            <a:r>
-              <a:rPr lang="en-US" sz="900" b="1" dirty="0">
-                <a:solidFill>
-                  <a:srgbClr val="111111"/>
-                </a:solidFill>
-                <a:latin typeface="Pretendard" pitchFamily="34" charset="0"/>
-                <a:ea typeface="Pretendard" pitchFamily="34" charset="-122"/>
-                <a:cs typeface="Pretendard" pitchFamily="34" charset="-120"/>
-              </a:rPr>
-              <a:t>05</a:t>
-            </a:r>
-            <a:endParaRPr lang="en-US" sz="900" dirty="0"/>
-          </a:p>
-        </p:txBody>
-      </p:sp>
-      <p:sp>
-        <p:nvSpPr>
-          <p:cNvPr id="28" name="Text 26"/>
-          <p:cNvSpPr/>
-          <p:nvPr/>
-        </p:nvSpPr>
-        <p:spPr>
-          <a:xfrm>
-            <a:off x="7010248" y="1755648"/>
-            <a:ext cx="4267048" cy="585216"/>
-          </a:xfrm>
-          <a:prstGeom prst="rect">
-            <a:avLst/>
-          </a:prstGeom>
-          <a:noFill/>
-          <a:ln/>
-        </p:spPr>
-        <p:txBody>
-          <a:bodyPr wrap="square" lIns="0" tIns="0" rIns="0" bIns="0" rtlCol="0" anchor="ctr"/>
-          <a:lstStyle/>
-          <a:p>
-            <a:pPr indent="0" marL="0">
-              <a:buNone/>
-            </a:pPr>
-            <a:r>
-              <a:rPr lang="en-US" sz="1200" dirty="0">
-                <a:solidFill>
-                  <a:srgbClr val="111111"/>
-                </a:solidFill>
-                <a:latin typeface="Pretendard" pitchFamily="34" charset="0"/>
-                <a:ea typeface="Pretendard" pitchFamily="34" charset="-122"/>
-                <a:cs typeface="Pretendard" pitchFamily="34" charset="-120"/>
-              </a:rPr>
-              <a:t>정리표 양식을 내려받았다</a:t>
-            </a:r>
-            <a:endParaRPr lang="en-US" sz="1200" dirty="0"/>
-          </a:p>
-        </p:txBody>
-      </p:sp>
-      <p:sp>
-        <p:nvSpPr>
-          <p:cNvPr id="29" name="Shape 27"/>
-          <p:cNvSpPr/>
-          <p:nvPr/>
-        </p:nvSpPr>
-        <p:spPr>
-          <a:xfrm>
-            <a:off x="6297016" y="2487168"/>
-            <a:ext cx="5254600" cy="585216"/>
-          </a:xfrm>
-          <a:prstGeom prst="rect">
-            <a:avLst/>
-          </a:prstGeom>
-          <a:solidFill>
-            <a:srgbClr val="F2F2F2"/>
-          </a:solidFill>
-          <a:ln w="12700">
-            <a:solidFill>
-              <a:srgbClr val="F2F2F2"/>
-            </a:solidFill>
-            <a:prstDash val="solid"/>
-          </a:ln>
-        </p:spPr>
-      </p:sp>
-      <p:sp>
-        <p:nvSpPr>
-          <p:cNvPr id="30" name="Shape 28"/>
-          <p:cNvSpPr/>
-          <p:nvPr/>
-        </p:nvSpPr>
-        <p:spPr>
-          <a:xfrm>
-            <a:off x="6571336" y="2624328"/>
-            <a:ext cx="310896" cy="310896"/>
-          </a:xfrm>
-          <a:prstGeom prst="ellipse">
-            <a:avLst/>
-          </a:prstGeom>
-          <a:solidFill>
-            <a:srgbClr val="F2F2F2"/>
-          </a:solidFill>
-          <a:ln w="12700">
-            <a:solidFill>
-              <a:srgbClr val="111111"/>
-            </a:solidFill>
-            <a:prstDash val="solid"/>
-          </a:ln>
-        </p:spPr>
-      </p:sp>
-      <p:sp>
-        <p:nvSpPr>
-          <p:cNvPr id="31" name="Text 29"/>
-          <p:cNvSpPr/>
-          <p:nvPr/>
-        </p:nvSpPr>
-        <p:spPr>
-          <a:xfrm>
-            <a:off x="6571336" y="2624328"/>
-            <a:ext cx="310896" cy="310896"/>
-          </a:xfrm>
-          <a:prstGeom prst="rect">
-            <a:avLst/>
-          </a:prstGeom>
-          <a:noFill/>
-          <a:ln/>
-        </p:spPr>
-        <p:txBody>
-          <a:bodyPr wrap="square" lIns="0" tIns="0" rIns="0" bIns="0" rtlCol="0" anchor="ctr"/>
-          <a:lstStyle/>
-          <a:p>
-            <a:pPr algn="ctr" indent="0" marL="0">
-              <a:buNone/>
-            </a:pPr>
-            <a:r>
-              <a:rPr lang="en-US" sz="900" b="1" dirty="0">
-                <a:solidFill>
-                  <a:srgbClr val="111111"/>
-                </a:solidFill>
-                <a:latin typeface="Pretendard" pitchFamily="34" charset="0"/>
-                <a:ea typeface="Pretendard" pitchFamily="34" charset="-122"/>
-                <a:cs typeface="Pretendard" pitchFamily="34" charset="-120"/>
-              </a:rPr>
-              <a:t>06</a:t>
-            </a:r>
-            <a:endParaRPr lang="en-US" sz="900" dirty="0"/>
-          </a:p>
-        </p:txBody>
-      </p:sp>
-      <p:sp>
-        <p:nvSpPr>
-          <p:cNvPr id="32" name="Text 30"/>
-          <p:cNvSpPr/>
-          <p:nvPr/>
-        </p:nvSpPr>
-        <p:spPr>
-          <a:xfrm>
-            <a:off x="7010248" y="2487168"/>
-            <a:ext cx="4267048" cy="585216"/>
-          </a:xfrm>
-          <a:prstGeom prst="rect">
-            <a:avLst/>
-          </a:prstGeom>
-          <a:noFill/>
-          <a:ln/>
-        </p:spPr>
-        <p:txBody>
-          <a:bodyPr wrap="square" lIns="0" tIns="0" rIns="0" bIns="0" rtlCol="0" anchor="ctr"/>
-          <a:lstStyle/>
-          <a:p>
-            <a:pPr indent="0" marL="0">
-              <a:buNone/>
-            </a:pPr>
-            <a:r>
-              <a:rPr lang="en-US" sz="1200" dirty="0">
-                <a:solidFill>
-                  <a:srgbClr val="111111"/>
-                </a:solidFill>
-                <a:latin typeface="Pretendard" pitchFamily="34" charset="0"/>
-                <a:ea typeface="Pretendard" pitchFamily="34" charset="-122"/>
-                <a:cs typeface="Pretendard" pitchFamily="34" charset="-120"/>
-              </a:rPr>
-              <a:t>3회차 리딩 두 편의 접근 경로를 확인했다</a:t>
-            </a:r>
-            <a:endParaRPr lang="en-US" sz="1200" dirty="0"/>
-          </a:p>
-        </p:txBody>
-      </p:sp>
-      <p:sp>
-        <p:nvSpPr>
-          <p:cNvPr id="33" name="Shape 31"/>
-          <p:cNvSpPr/>
-          <p:nvPr/>
-        </p:nvSpPr>
-        <p:spPr>
-          <a:xfrm>
-            <a:off x="6297016" y="3218688"/>
-            <a:ext cx="5254600" cy="585216"/>
-          </a:xfrm>
-          <a:prstGeom prst="rect">
-            <a:avLst/>
-          </a:prstGeom>
-          <a:solidFill>
-            <a:srgbClr val="F2F2F2"/>
-          </a:solidFill>
-          <a:ln w="12700">
-            <a:solidFill>
-              <a:srgbClr val="F2F2F2"/>
-            </a:solidFill>
-            <a:prstDash val="solid"/>
-          </a:ln>
-        </p:spPr>
-      </p:sp>
-      <p:sp>
-        <p:nvSpPr>
-          <p:cNvPr id="34" name="Shape 32"/>
-          <p:cNvSpPr/>
-          <p:nvPr/>
-        </p:nvSpPr>
-        <p:spPr>
-          <a:xfrm>
-            <a:off x="6571336" y="3355848"/>
-            <a:ext cx="310896" cy="310896"/>
-          </a:xfrm>
-          <a:prstGeom prst="ellipse">
-            <a:avLst/>
-          </a:prstGeom>
-          <a:solidFill>
-            <a:srgbClr val="F2F2F2"/>
-          </a:solidFill>
-          <a:ln w="12700">
-            <a:solidFill>
-              <a:srgbClr val="111111"/>
-            </a:solidFill>
-            <a:prstDash val="solid"/>
-          </a:ln>
-        </p:spPr>
-      </p:sp>
-      <p:sp>
-        <p:nvSpPr>
-          <p:cNvPr id="35" name="Text 33"/>
-          <p:cNvSpPr/>
-          <p:nvPr/>
-        </p:nvSpPr>
-        <p:spPr>
-          <a:xfrm>
-            <a:off x="6571336" y="3355848"/>
-            <a:ext cx="310896" cy="310896"/>
-          </a:xfrm>
-          <a:prstGeom prst="rect">
-            <a:avLst/>
-          </a:prstGeom>
-          <a:noFill/>
-          <a:ln/>
-        </p:spPr>
-        <p:txBody>
-          <a:bodyPr wrap="square" lIns="0" tIns="0" rIns="0" bIns="0" rtlCol="0" anchor="ctr"/>
-          <a:lstStyle/>
-          <a:p>
-            <a:pPr algn="ctr" indent="0" marL="0">
-              <a:buNone/>
-            </a:pPr>
-            <a:r>
-              <a:rPr lang="en-US" sz="900" b="1" dirty="0">
-                <a:solidFill>
-                  <a:srgbClr val="111111"/>
-                </a:solidFill>
-                <a:latin typeface="Pretendard" pitchFamily="34" charset="0"/>
-                <a:ea typeface="Pretendard" pitchFamily="34" charset="-122"/>
-                <a:cs typeface="Pretendard" pitchFamily="34" charset="-120"/>
-              </a:rPr>
-              <a:t>07</a:t>
-            </a:r>
-            <a:endParaRPr lang="en-US" sz="900" dirty="0"/>
-          </a:p>
-        </p:txBody>
-      </p:sp>
-      <p:sp>
-        <p:nvSpPr>
-          <p:cNvPr id="36" name="Text 34"/>
-          <p:cNvSpPr/>
-          <p:nvPr/>
-        </p:nvSpPr>
-        <p:spPr>
-          <a:xfrm>
-            <a:off x="7010248" y="3218688"/>
-            <a:ext cx="4267048" cy="585216"/>
-          </a:xfrm>
-          <a:prstGeom prst="rect">
-            <a:avLst/>
-          </a:prstGeom>
-          <a:noFill/>
-          <a:ln/>
-        </p:spPr>
-        <p:txBody>
-          <a:bodyPr wrap="square" lIns="0" tIns="0" rIns="0" bIns="0" rtlCol="0" anchor="ctr"/>
-          <a:lstStyle/>
-          <a:p>
-            <a:pPr indent="0" marL="0">
-              <a:buNone/>
-            </a:pPr>
-            <a:r>
-              <a:rPr lang="en-US" sz="1200" dirty="0">
-                <a:solidFill>
-                  <a:srgbClr val="111111"/>
-                </a:solidFill>
-                <a:latin typeface="Pretendard" pitchFamily="34" charset="0"/>
-                <a:ea typeface="Pretendard" pitchFamily="34" charset="-122"/>
-                <a:cs typeface="Pretendard" pitchFamily="34" charset="-120"/>
-              </a:rPr>
-              <a:t>지도를 언제 그릴지 정했다</a:t>
-            </a:r>
-            <a:endParaRPr lang="en-US" sz="1200" dirty="0"/>
-          </a:p>
-        </p:txBody>
-      </p:sp>
-      <p:sp>
-        <p:nvSpPr>
-          <p:cNvPr id="37" name="Shape 35"/>
-          <p:cNvSpPr/>
-          <p:nvPr/>
-        </p:nvSpPr>
-        <p:spPr>
-          <a:xfrm>
-            <a:off x="6297016" y="3950208"/>
-            <a:ext cx="5254600" cy="585216"/>
-          </a:xfrm>
-          <a:prstGeom prst="rect">
-            <a:avLst/>
-          </a:prstGeom>
-          <a:solidFill>
-            <a:srgbClr val="F2F2F2"/>
-          </a:solidFill>
-          <a:ln w="12700">
-            <a:solidFill>
-              <a:srgbClr val="F2F2F2"/>
-            </a:solidFill>
-            <a:prstDash val="solid"/>
-          </a:ln>
-        </p:spPr>
-      </p:sp>
-      <p:sp>
-        <p:nvSpPr>
-          <p:cNvPr id="38" name="Shape 36"/>
-          <p:cNvSpPr/>
-          <p:nvPr/>
-        </p:nvSpPr>
-        <p:spPr>
-          <a:xfrm>
-            <a:off x="6571336" y="4087368"/>
-            <a:ext cx="310896" cy="310896"/>
-          </a:xfrm>
-          <a:prstGeom prst="ellipse">
-            <a:avLst/>
-          </a:prstGeom>
-          <a:solidFill>
-            <a:srgbClr val="F2F2F2"/>
-          </a:solidFill>
-          <a:ln w="12700">
-            <a:solidFill>
-              <a:srgbClr val="111111"/>
-            </a:solidFill>
-            <a:prstDash val="solid"/>
-          </a:ln>
-        </p:spPr>
-      </p:sp>
-      <p:sp>
-        <p:nvSpPr>
-          <p:cNvPr id="39" name="Text 37"/>
-          <p:cNvSpPr/>
-          <p:nvPr/>
-        </p:nvSpPr>
-        <p:spPr>
-          <a:xfrm>
-            <a:off x="6571336" y="4087368"/>
-            <a:ext cx="310896" cy="310896"/>
-          </a:xfrm>
-          <a:prstGeom prst="rect">
-            <a:avLst/>
-          </a:prstGeom>
-          <a:noFill/>
-          <a:ln/>
-        </p:spPr>
-        <p:txBody>
-          <a:bodyPr wrap="square" lIns="0" tIns="0" rIns="0" bIns="0" rtlCol="0" anchor="ctr"/>
-          <a:lstStyle/>
-          <a:p>
-            <a:pPr algn="ctr" indent="0" marL="0">
-              <a:buNone/>
-            </a:pPr>
-            <a:r>
-              <a:rPr lang="en-US" sz="900" b="1" dirty="0">
-                <a:solidFill>
-                  <a:srgbClr val="111111"/>
-                </a:solidFill>
-                <a:latin typeface="Pretendard" pitchFamily="34" charset="0"/>
-                <a:ea typeface="Pretendard" pitchFamily="34" charset="-122"/>
-                <a:cs typeface="Pretendard" pitchFamily="34" charset="-120"/>
-              </a:rPr>
-              <a:t>08</a:t>
-            </a:r>
-            <a:endParaRPr lang="en-US" sz="900" dirty="0"/>
-          </a:p>
-        </p:txBody>
-      </p:sp>
-      <p:sp>
-        <p:nvSpPr>
-          <p:cNvPr id="40" name="Text 38"/>
-          <p:cNvSpPr/>
-          <p:nvPr/>
-        </p:nvSpPr>
-        <p:spPr>
-          <a:xfrm>
-            <a:off x="7010248" y="3950208"/>
-            <a:ext cx="4267048" cy="585216"/>
-          </a:xfrm>
-          <a:prstGeom prst="rect">
-            <a:avLst/>
-          </a:prstGeom>
-          <a:noFill/>
-          <a:ln/>
-        </p:spPr>
-        <p:txBody>
-          <a:bodyPr wrap="square" lIns="0" tIns="0" rIns="0" bIns="0" rtlCol="0" anchor="ctr"/>
-          <a:lstStyle/>
-          <a:p>
-            <a:pPr indent="0" marL="0">
-              <a:buNone/>
-            </a:pPr>
-            <a:r>
-              <a:rPr lang="en-US" sz="1200" dirty="0">
-                <a:solidFill>
-                  <a:srgbClr val="111111"/>
-                </a:solidFill>
-                <a:latin typeface="Pretendard" pitchFamily="34" charset="0"/>
-                <a:ea typeface="Pretendard" pitchFamily="34" charset="-122"/>
-                <a:cs typeface="Pretendard" pitchFamily="34" charset="-120"/>
-              </a:rPr>
-              <a:t>공유 폴더에 올리는 방법을 확인했다</a:t>
-            </a:r>
-            <a:endParaRPr lang="en-US" sz="1200" dirty="0"/>
-          </a:p>
-        </p:txBody>
-      </p:sp>
-      <p:sp>
-        <p:nvSpPr>
-          <p:cNvPr id="41" name="Shape 39"/>
-          <p:cNvSpPr/>
-          <p:nvPr/>
-        </p:nvSpPr>
-        <p:spPr>
-          <a:xfrm>
-            <a:off x="640080" y="4736592"/>
-            <a:ext cx="10911535" cy="7315"/>
+            <a:off x="640080" y="4626864"/>
+            <a:ext cx="10911535" cy="822960"/>
           </a:xfrm>
           <a:prstGeom prst="rect">
             <a:avLst/>
@@ -7438,46 +7509,88 @@
       </p:sp>
       <p:sp>
         <p:nvSpPr>
-          <p:cNvPr id="42" name="Text 40"/>
-          <p:cNvSpPr/>
-          <p:nvPr/>
-        </p:nvSpPr>
-        <p:spPr>
-          <a:xfrm>
-            <a:off x="640080" y="4846320"/>
-            <a:ext cx="10911535" cy="402336"/>
-          </a:xfrm>
-          <a:prstGeom prst="rect">
-            <a:avLst/>
-          </a:prstGeom>
-          <a:noFill/>
-          <a:ln/>
-        </p:spPr>
-        <p:txBody>
-          <a:bodyPr wrap="square" lIns="0" tIns="0" rIns="0" bIns="0" rtlCol="0" anchor="ctr"/>
-          <a:lstStyle/>
-          <a:p>
-            <a:pPr indent="0" marL="0">
-              <a:buNone/>
-            </a:pPr>
-            <a:r>
-              <a:rPr lang="en-US" sz="1250" b="1" dirty="0">
-                <a:solidFill>
-                  <a:srgbClr val="111111"/>
-                </a:solidFill>
-                <a:latin typeface="Pretendard" pitchFamily="34" charset="0"/>
-                <a:ea typeface="Pretendard" pitchFamily="34" charset="-122"/>
-                <a:cs typeface="Pretendard" pitchFamily="34" charset="-120"/>
-              </a:rPr>
-              <a:t>세 번째가 안 되면 다음 2주 동안 아무것도 할 수 없습니다. 오늘 확인하고 가세요.</a:t>
-            </a:r>
-            <a:endParaRPr lang="en-US" sz="1250" dirty="0"/>
-          </a:p>
-        </p:txBody>
-      </p:sp>
-      <p:sp>
-        <p:nvSpPr>
-          <p:cNvPr id="43" name="Shape 41"/>
+          <p:cNvPr id="19" name="Text 17"/>
+          <p:cNvSpPr/>
+          <p:nvPr/>
+        </p:nvSpPr>
+        <p:spPr>
+          <a:xfrm>
+            <a:off x="1097280" y="4718304"/>
+            <a:ext cx="3291840" cy="640080"/>
+          </a:xfrm>
+          <a:prstGeom prst="rect">
+            <a:avLst/>
+          </a:prstGeom>
+          <a:noFill/>
+          <a:ln/>
+        </p:spPr>
+        <p:txBody>
+          <a:bodyPr wrap="square" lIns="0" tIns="0" rIns="0" bIns="0" rtlCol="0" anchor="ctr"/>
+          <a:lstStyle/>
+          <a:p>
+            <a:pPr indent="0" marL="0">
+              <a:buNone/>
+            </a:pPr>
+            <a:r>
+              <a:rPr lang="en-US" sz="1450" dirty="0">
+                <a:solidFill>
+                  <a:srgbClr val="FFFFFF"/>
+                </a:solidFill>
+                <a:latin typeface="Pretendard SemiBold" pitchFamily="34" charset="0"/>
+                <a:ea typeface="Pretendard SemiBold" pitchFamily="34" charset="-122"/>
+                <a:cs typeface="Pretendard SemiBold" pitchFamily="34" charset="-120"/>
+              </a:rPr>
+              <a:t>다섯 편으로 줄이기</a:t>
+            </a:r>
+            <a:endParaRPr lang="en-US" sz="1450" dirty="0"/>
+          </a:p>
+        </p:txBody>
+      </p:sp>
+      <p:sp>
+        <p:nvSpPr>
+          <p:cNvPr id="20" name="Text 18"/>
+          <p:cNvSpPr/>
+          <p:nvPr/>
+        </p:nvSpPr>
+        <p:spPr>
+          <a:xfrm>
+            <a:off x="4480560" y="4718304"/>
+            <a:ext cx="6705295" cy="640080"/>
+          </a:xfrm>
+          <a:prstGeom prst="rect">
+            <a:avLst/>
+          </a:prstGeom>
+          <a:noFill/>
+          <a:ln/>
+        </p:spPr>
+        <p:txBody>
+          <a:bodyPr wrap="square" lIns="0" tIns="0" rIns="0" bIns="0" rtlCol="0" anchor="ctr"/>
+          <a:lstStyle/>
+          <a:p>
+            <a:pPr indent="0" marL="0">
+              <a:lnSpc>
+                <a:spcPct val="124000"/>
+              </a:lnSpc>
+              <a:buNone/>
+            </a:pPr>
+            <a:r>
+              <a:rPr lang="en-US" sz="1150" dirty="0">
+                <a:solidFill>
+                  <a:srgbClr val="B8B8B8"/>
+                </a:solidFill>
+                <a:latin typeface="Pretendard" pitchFamily="34" charset="0"/>
+                <a:ea typeface="Pretendard" pitchFamily="34" charset="-122"/>
+                <a:cs typeface="Pretendard" pitchFamily="34" charset="-120"/>
+              </a:rPr>
+              <a:t>초록만 보고 고릅니다. 정리표는 집에서 채웁니다.</a:t>
+            </a:r>
+            <a:endParaRPr lang="en-US" sz="1150" dirty="0"/>
+          </a:p>
+        </p:txBody>
+      </p:sp>
+      <p:sp>
+        <p:nvSpPr>
+          <p:cNvPr id="21" name="Shape 19"/>
           <p:cNvSpPr/>
           <p:nvPr/>
         </p:nvSpPr>
@@ -7502,7 +7615,7 @@
       </p:sp>
       <p:sp>
         <p:nvSpPr>
-          <p:cNvPr id="44" name="Text 42"/>
+          <p:cNvPr id="22" name="Text 20"/>
           <p:cNvSpPr/>
           <p:nvPr/>
         </p:nvSpPr>
@@ -7541,7 +7654,7 @@
       </p:sp>
       <p:sp>
         <p:nvSpPr>
-          <p:cNvPr id="45" name="Text 43"/>
+          <p:cNvPr id="23" name="Text 21"/>
           <p:cNvSpPr/>
           <p:nvPr/>
         </p:nvSpPr>
@@ -7785,6 +7898,1616 @@
                 <a:ea typeface="Pretendard" pitchFamily="34" charset="-122"/>
                 <a:cs typeface="Pretendard" pitchFamily="34" charset="-120"/>
               </a:rPr>
+              <a:t>SUBMIT</a:t>
+            </a:r>
+            <a:endParaRPr lang="en-US" sz="950" dirty="0"/>
+          </a:p>
+        </p:txBody>
+      </p:sp>
+      <p:sp>
+        <p:nvSpPr>
+          <p:cNvPr id="7" name="Text 5"/>
+          <p:cNvSpPr/>
+          <p:nvPr/>
+        </p:nvSpPr>
+        <p:spPr>
+          <a:xfrm>
+            <a:off x="640080" y="859536"/>
+            <a:ext cx="10911535" cy="475488"/>
+          </a:xfrm>
+          <a:prstGeom prst="rect">
+            <a:avLst/>
+          </a:prstGeom>
+          <a:noFill/>
+          <a:ln/>
+        </p:spPr>
+        <p:txBody>
+          <a:bodyPr wrap="square" lIns="0" tIns="0" rIns="0" bIns="0" rtlCol="0" anchor="ctr"/>
+          <a:lstStyle/>
+          <a:p>
+            <a:pPr indent="0" marL="0">
+              <a:buNone/>
+            </a:pPr>
+            <a:r>
+              <a:rPr lang="en-US" sz="3000" dirty="0">
+                <a:solidFill>
+                  <a:srgbClr val="111111"/>
+                </a:solidFill>
+                <a:latin typeface="Pretendard SemiBold" pitchFamily="34" charset="0"/>
+                <a:ea typeface="Pretendard SemiBold" pitchFamily="34" charset="-122"/>
+                <a:cs typeface="Pretendard SemiBold" pitchFamily="34" charset="-120"/>
+              </a:rPr>
+              <a:t>오늘 확인하고 가는 것</a:t>
+            </a:r>
+            <a:endParaRPr lang="en-US" sz="3000" dirty="0"/>
+          </a:p>
+        </p:txBody>
+      </p:sp>
+      <p:sp>
+        <p:nvSpPr>
+          <p:cNvPr id="8" name="Text 6"/>
+          <p:cNvSpPr/>
+          <p:nvPr/>
+        </p:nvSpPr>
+        <p:spPr>
+          <a:xfrm>
+            <a:off x="640080" y="1371600"/>
+            <a:ext cx="10911535" cy="219456"/>
+          </a:xfrm>
+          <a:prstGeom prst="rect">
+            <a:avLst/>
+          </a:prstGeom>
+          <a:noFill/>
+          <a:ln/>
+        </p:spPr>
+        <p:txBody>
+          <a:bodyPr wrap="square" lIns="0" tIns="0" rIns="0" bIns="0" rtlCol="0" anchor="ctr"/>
+          <a:lstStyle/>
+          <a:p>
+            <a:pPr indent="0" marL="0">
+              <a:buNone/>
+            </a:pPr>
+            <a:r>
+              <a:rPr lang="en-US" sz="1150" dirty="0">
+                <a:solidFill>
+                  <a:srgbClr val="6E6E6E"/>
+                </a:solidFill>
+                <a:latin typeface="Pretendard" pitchFamily="34" charset="0"/>
+                <a:ea typeface="Pretendard" pitchFamily="34" charset="-122"/>
+                <a:cs typeface="Pretendard" pitchFamily="34" charset="-120"/>
+              </a:rPr>
+              <a:t>다음 회차까지 2주가 있습니다.</a:t>
+            </a:r>
+            <a:endParaRPr lang="en-US" sz="1150" dirty="0"/>
+          </a:p>
+        </p:txBody>
+      </p:sp>
+      <p:sp>
+        <p:nvSpPr>
+          <p:cNvPr id="9" name="Shape 7"/>
+          <p:cNvSpPr/>
+          <p:nvPr/>
+        </p:nvSpPr>
+        <p:spPr>
+          <a:xfrm>
+            <a:off x="640080" y="1755648"/>
+            <a:ext cx="5254600" cy="585216"/>
+          </a:xfrm>
+          <a:prstGeom prst="rect">
+            <a:avLst/>
+          </a:prstGeom>
+          <a:solidFill>
+            <a:srgbClr val="F2F2F2"/>
+          </a:solidFill>
+          <a:ln w="12700">
+            <a:solidFill>
+              <a:srgbClr val="F2F2F2"/>
+            </a:solidFill>
+            <a:prstDash val="solid"/>
+          </a:ln>
+        </p:spPr>
+      </p:sp>
+      <p:sp>
+        <p:nvSpPr>
+          <p:cNvPr id="10" name="Shape 8"/>
+          <p:cNvSpPr/>
+          <p:nvPr/>
+        </p:nvSpPr>
+        <p:spPr>
+          <a:xfrm>
+            <a:off x="914400" y="1892808"/>
+            <a:ext cx="310896" cy="310896"/>
+          </a:xfrm>
+          <a:prstGeom prst="ellipse">
+            <a:avLst/>
+          </a:prstGeom>
+          <a:solidFill>
+            <a:srgbClr val="F2F2F2"/>
+          </a:solidFill>
+          <a:ln w="12700">
+            <a:solidFill>
+              <a:srgbClr val="111111"/>
+            </a:solidFill>
+            <a:prstDash val="solid"/>
+          </a:ln>
+        </p:spPr>
+      </p:sp>
+      <p:sp>
+        <p:nvSpPr>
+          <p:cNvPr id="11" name="Text 9"/>
+          <p:cNvSpPr/>
+          <p:nvPr/>
+        </p:nvSpPr>
+        <p:spPr>
+          <a:xfrm>
+            <a:off x="914400" y="1892808"/>
+            <a:ext cx="310896" cy="310896"/>
+          </a:xfrm>
+          <a:prstGeom prst="rect">
+            <a:avLst/>
+          </a:prstGeom>
+          <a:noFill/>
+          <a:ln/>
+        </p:spPr>
+        <p:txBody>
+          <a:bodyPr wrap="square" lIns="0" tIns="0" rIns="0" bIns="0" rtlCol="0" anchor="ctr"/>
+          <a:lstStyle/>
+          <a:p>
+            <a:pPr algn="ctr" indent="0" marL="0">
+              <a:buNone/>
+            </a:pPr>
+            <a:r>
+              <a:rPr lang="en-US" sz="900" b="1" dirty="0">
+                <a:solidFill>
+                  <a:srgbClr val="111111"/>
+                </a:solidFill>
+                <a:latin typeface="Pretendard" pitchFamily="34" charset="0"/>
+                <a:ea typeface="Pretendard" pitchFamily="34" charset="-122"/>
+                <a:cs typeface="Pretendard" pitchFamily="34" charset="-120"/>
+              </a:rPr>
+              <a:t>01</a:t>
+            </a:r>
+            <a:endParaRPr lang="en-US" sz="900" dirty="0"/>
+          </a:p>
+        </p:txBody>
+      </p:sp>
+      <p:sp>
+        <p:nvSpPr>
+          <p:cNvPr id="12" name="Text 10"/>
+          <p:cNvSpPr/>
+          <p:nvPr/>
+        </p:nvSpPr>
+        <p:spPr>
+          <a:xfrm>
+            <a:off x="1353312" y="1755648"/>
+            <a:ext cx="4267048" cy="585216"/>
+          </a:xfrm>
+          <a:prstGeom prst="rect">
+            <a:avLst/>
+          </a:prstGeom>
+          <a:noFill/>
+          <a:ln/>
+        </p:spPr>
+        <p:txBody>
+          <a:bodyPr wrap="square" lIns="0" tIns="0" rIns="0" bIns="0" rtlCol="0" anchor="ctr"/>
+          <a:lstStyle/>
+          <a:p>
+            <a:pPr indent="0" marL="0">
+              <a:buNone/>
+            </a:pPr>
+            <a:r>
+              <a:rPr lang="en-US" sz="1200" dirty="0">
+                <a:solidFill>
+                  <a:srgbClr val="111111"/>
+                </a:solidFill>
+                <a:latin typeface="Pretendard" pitchFamily="34" charset="0"/>
+                <a:ea typeface="Pretendard" pitchFamily="34" charset="-122"/>
+                <a:cs typeface="Pretendard" pitchFamily="34" charset="-120"/>
+              </a:rPr>
+              <a:t>내 주제를 개념 두세 개로 쪼갰다</a:t>
+            </a:r>
+            <a:endParaRPr lang="en-US" sz="1200" dirty="0"/>
+          </a:p>
+        </p:txBody>
+      </p:sp>
+      <p:sp>
+        <p:nvSpPr>
+          <p:cNvPr id="13" name="Shape 11"/>
+          <p:cNvSpPr/>
+          <p:nvPr/>
+        </p:nvSpPr>
+        <p:spPr>
+          <a:xfrm>
+            <a:off x="640080" y="2487168"/>
+            <a:ext cx="5254600" cy="585216"/>
+          </a:xfrm>
+          <a:prstGeom prst="rect">
+            <a:avLst/>
+          </a:prstGeom>
+          <a:solidFill>
+            <a:srgbClr val="F2F2F2"/>
+          </a:solidFill>
+          <a:ln w="12700">
+            <a:solidFill>
+              <a:srgbClr val="F2F2F2"/>
+            </a:solidFill>
+            <a:prstDash val="solid"/>
+          </a:ln>
+        </p:spPr>
+      </p:sp>
+      <p:sp>
+        <p:nvSpPr>
+          <p:cNvPr id="14" name="Shape 12"/>
+          <p:cNvSpPr/>
+          <p:nvPr/>
+        </p:nvSpPr>
+        <p:spPr>
+          <a:xfrm>
+            <a:off x="914400" y="2624328"/>
+            <a:ext cx="310896" cy="310896"/>
+          </a:xfrm>
+          <a:prstGeom prst="ellipse">
+            <a:avLst/>
+          </a:prstGeom>
+          <a:solidFill>
+            <a:srgbClr val="F2F2F2"/>
+          </a:solidFill>
+          <a:ln w="12700">
+            <a:solidFill>
+              <a:srgbClr val="111111"/>
+            </a:solidFill>
+            <a:prstDash val="solid"/>
+          </a:ln>
+        </p:spPr>
+      </p:sp>
+      <p:sp>
+        <p:nvSpPr>
+          <p:cNvPr id="15" name="Text 13"/>
+          <p:cNvSpPr/>
+          <p:nvPr/>
+        </p:nvSpPr>
+        <p:spPr>
+          <a:xfrm>
+            <a:off x="914400" y="2624328"/>
+            <a:ext cx="310896" cy="310896"/>
+          </a:xfrm>
+          <a:prstGeom prst="rect">
+            <a:avLst/>
+          </a:prstGeom>
+          <a:noFill/>
+          <a:ln/>
+        </p:spPr>
+        <p:txBody>
+          <a:bodyPr wrap="square" lIns="0" tIns="0" rIns="0" bIns="0" rtlCol="0" anchor="ctr"/>
+          <a:lstStyle/>
+          <a:p>
+            <a:pPr algn="ctr" indent="0" marL="0">
+              <a:buNone/>
+            </a:pPr>
+            <a:r>
+              <a:rPr lang="en-US" sz="900" b="1" dirty="0">
+                <a:solidFill>
+                  <a:srgbClr val="111111"/>
+                </a:solidFill>
+                <a:latin typeface="Pretendard" pitchFamily="34" charset="0"/>
+                <a:ea typeface="Pretendard" pitchFamily="34" charset="-122"/>
+                <a:cs typeface="Pretendard" pitchFamily="34" charset="-120"/>
+              </a:rPr>
+              <a:t>02</a:t>
+            </a:r>
+            <a:endParaRPr lang="en-US" sz="900" dirty="0"/>
+          </a:p>
+        </p:txBody>
+      </p:sp>
+      <p:sp>
+        <p:nvSpPr>
+          <p:cNvPr id="16" name="Text 14"/>
+          <p:cNvSpPr/>
+          <p:nvPr/>
+        </p:nvSpPr>
+        <p:spPr>
+          <a:xfrm>
+            <a:off x="1353312" y="2487168"/>
+            <a:ext cx="4267048" cy="585216"/>
+          </a:xfrm>
+          <a:prstGeom prst="rect">
+            <a:avLst/>
+          </a:prstGeom>
+          <a:noFill/>
+          <a:ln/>
+        </p:spPr>
+        <p:txBody>
+          <a:bodyPr wrap="square" lIns="0" tIns="0" rIns="0" bIns="0" rtlCol="0" anchor="ctr"/>
+          <a:lstStyle/>
+          <a:p>
+            <a:pPr indent="0" marL="0">
+              <a:buNone/>
+            </a:pPr>
+            <a:r>
+              <a:rPr lang="en-US" sz="1200" dirty="0">
+                <a:solidFill>
+                  <a:srgbClr val="111111"/>
+                </a:solidFill>
+                <a:latin typeface="Pretendard" pitchFamily="34" charset="0"/>
+                <a:ea typeface="Pretendard" pitchFamily="34" charset="-122"/>
+                <a:cs typeface="Pretendard" pitchFamily="34" charset="-120"/>
+              </a:rPr>
+              <a:t>각 개념의 영어 학술 용어를 찾았다</a:t>
+            </a:r>
+            <a:endParaRPr lang="en-US" sz="1200" dirty="0"/>
+          </a:p>
+        </p:txBody>
+      </p:sp>
+      <p:sp>
+        <p:nvSpPr>
+          <p:cNvPr id="17" name="Shape 15"/>
+          <p:cNvSpPr/>
+          <p:nvPr/>
+        </p:nvSpPr>
+        <p:spPr>
+          <a:xfrm>
+            <a:off x="640080" y="3218688"/>
+            <a:ext cx="5254600" cy="585216"/>
+          </a:xfrm>
+          <a:prstGeom prst="rect">
+            <a:avLst/>
+          </a:prstGeom>
+          <a:solidFill>
+            <a:srgbClr val="F2F2F2"/>
+          </a:solidFill>
+          <a:ln w="12700">
+            <a:solidFill>
+              <a:srgbClr val="F2F2F2"/>
+            </a:solidFill>
+            <a:prstDash val="solid"/>
+          </a:ln>
+        </p:spPr>
+      </p:sp>
+      <p:sp>
+        <p:nvSpPr>
+          <p:cNvPr id="18" name="Shape 16"/>
+          <p:cNvSpPr/>
+          <p:nvPr/>
+        </p:nvSpPr>
+        <p:spPr>
+          <a:xfrm>
+            <a:off x="914400" y="3355848"/>
+            <a:ext cx="310896" cy="310896"/>
+          </a:xfrm>
+          <a:prstGeom prst="ellipse">
+            <a:avLst/>
+          </a:prstGeom>
+          <a:solidFill>
+            <a:srgbClr val="F2F2F2"/>
+          </a:solidFill>
+          <a:ln w="12700">
+            <a:solidFill>
+              <a:srgbClr val="111111"/>
+            </a:solidFill>
+            <a:prstDash val="solid"/>
+          </a:ln>
+        </p:spPr>
+      </p:sp>
+      <p:sp>
+        <p:nvSpPr>
+          <p:cNvPr id="19" name="Text 17"/>
+          <p:cNvSpPr/>
+          <p:nvPr/>
+        </p:nvSpPr>
+        <p:spPr>
+          <a:xfrm>
+            <a:off x="914400" y="3355848"/>
+            <a:ext cx="310896" cy="310896"/>
+          </a:xfrm>
+          <a:prstGeom prst="rect">
+            <a:avLst/>
+          </a:prstGeom>
+          <a:noFill/>
+          <a:ln/>
+        </p:spPr>
+        <p:txBody>
+          <a:bodyPr wrap="square" lIns="0" tIns="0" rIns="0" bIns="0" rtlCol="0" anchor="ctr"/>
+          <a:lstStyle/>
+          <a:p>
+            <a:pPr algn="ctr" indent="0" marL="0">
+              <a:buNone/>
+            </a:pPr>
+            <a:r>
+              <a:rPr lang="en-US" sz="900" b="1" dirty="0">
+                <a:solidFill>
+                  <a:srgbClr val="111111"/>
+                </a:solidFill>
+                <a:latin typeface="Pretendard" pitchFamily="34" charset="0"/>
+                <a:ea typeface="Pretendard" pitchFamily="34" charset="-122"/>
+                <a:cs typeface="Pretendard" pitchFamily="34" charset="-120"/>
+              </a:rPr>
+              <a:t>03</a:t>
+            </a:r>
+            <a:endParaRPr lang="en-US" sz="900" dirty="0"/>
+          </a:p>
+        </p:txBody>
+      </p:sp>
+      <p:sp>
+        <p:nvSpPr>
+          <p:cNvPr id="20" name="Text 18"/>
+          <p:cNvSpPr/>
+          <p:nvPr/>
+        </p:nvSpPr>
+        <p:spPr>
+          <a:xfrm>
+            <a:off x="1353312" y="3218688"/>
+            <a:ext cx="4267048" cy="585216"/>
+          </a:xfrm>
+          <a:prstGeom prst="rect">
+            <a:avLst/>
+          </a:prstGeom>
+          <a:noFill/>
+          <a:ln/>
+        </p:spPr>
+        <p:txBody>
+          <a:bodyPr wrap="square" lIns="0" tIns="0" rIns="0" bIns="0" rtlCol="0" anchor="ctr"/>
+          <a:lstStyle/>
+          <a:p>
+            <a:pPr indent="0" marL="0">
+              <a:buNone/>
+            </a:pPr>
+            <a:r>
+              <a:rPr lang="en-US" sz="1200" dirty="0">
+                <a:solidFill>
+                  <a:srgbClr val="111111"/>
+                </a:solidFill>
+                <a:latin typeface="Pretendard" pitchFamily="34" charset="0"/>
+                <a:ea typeface="Pretendard" pitchFamily="34" charset="-122"/>
+                <a:cs typeface="Pretendard" pitchFamily="34" charset="-120"/>
+              </a:rPr>
+              <a:t>도서관 전자저널에서 원문이 열리는 것을 확인했다</a:t>
+            </a:r>
+            <a:endParaRPr lang="en-US" sz="1200" dirty="0"/>
+          </a:p>
+        </p:txBody>
+      </p:sp>
+      <p:sp>
+        <p:nvSpPr>
+          <p:cNvPr id="21" name="Shape 19"/>
+          <p:cNvSpPr/>
+          <p:nvPr/>
+        </p:nvSpPr>
+        <p:spPr>
+          <a:xfrm>
+            <a:off x="640080" y="3950208"/>
+            <a:ext cx="5254600" cy="585216"/>
+          </a:xfrm>
+          <a:prstGeom prst="rect">
+            <a:avLst/>
+          </a:prstGeom>
+          <a:solidFill>
+            <a:srgbClr val="F2F2F2"/>
+          </a:solidFill>
+          <a:ln w="12700">
+            <a:solidFill>
+              <a:srgbClr val="F2F2F2"/>
+            </a:solidFill>
+            <a:prstDash val="solid"/>
+          </a:ln>
+        </p:spPr>
+      </p:sp>
+      <p:sp>
+        <p:nvSpPr>
+          <p:cNvPr id="22" name="Shape 20"/>
+          <p:cNvSpPr/>
+          <p:nvPr/>
+        </p:nvSpPr>
+        <p:spPr>
+          <a:xfrm>
+            <a:off x="914400" y="4087368"/>
+            <a:ext cx="310896" cy="310896"/>
+          </a:xfrm>
+          <a:prstGeom prst="ellipse">
+            <a:avLst/>
+          </a:prstGeom>
+          <a:solidFill>
+            <a:srgbClr val="F2F2F2"/>
+          </a:solidFill>
+          <a:ln w="12700">
+            <a:solidFill>
+              <a:srgbClr val="111111"/>
+            </a:solidFill>
+            <a:prstDash val="solid"/>
+          </a:ln>
+        </p:spPr>
+      </p:sp>
+      <p:sp>
+        <p:nvSpPr>
+          <p:cNvPr id="23" name="Text 21"/>
+          <p:cNvSpPr/>
+          <p:nvPr/>
+        </p:nvSpPr>
+        <p:spPr>
+          <a:xfrm>
+            <a:off x="914400" y="4087368"/>
+            <a:ext cx="310896" cy="310896"/>
+          </a:xfrm>
+          <a:prstGeom prst="rect">
+            <a:avLst/>
+          </a:prstGeom>
+          <a:noFill/>
+          <a:ln/>
+        </p:spPr>
+        <p:txBody>
+          <a:bodyPr wrap="square" lIns="0" tIns="0" rIns="0" bIns="0" rtlCol="0" anchor="ctr"/>
+          <a:lstStyle/>
+          <a:p>
+            <a:pPr algn="ctr" indent="0" marL="0">
+              <a:buNone/>
+            </a:pPr>
+            <a:r>
+              <a:rPr lang="en-US" sz="900" b="1" dirty="0">
+                <a:solidFill>
+                  <a:srgbClr val="111111"/>
+                </a:solidFill>
+                <a:latin typeface="Pretendard" pitchFamily="34" charset="0"/>
+                <a:ea typeface="Pretendard" pitchFamily="34" charset="-122"/>
+                <a:cs typeface="Pretendard" pitchFamily="34" charset="-120"/>
+              </a:rPr>
+              <a:t>04</a:t>
+            </a:r>
+            <a:endParaRPr lang="en-US" sz="900" dirty="0"/>
+          </a:p>
+        </p:txBody>
+      </p:sp>
+      <p:sp>
+        <p:nvSpPr>
+          <p:cNvPr id="24" name="Text 22"/>
+          <p:cNvSpPr/>
+          <p:nvPr/>
+        </p:nvSpPr>
+        <p:spPr>
+          <a:xfrm>
+            <a:off x="1353312" y="3950208"/>
+            <a:ext cx="4267048" cy="585216"/>
+          </a:xfrm>
+          <a:prstGeom prst="rect">
+            <a:avLst/>
+          </a:prstGeom>
+          <a:noFill/>
+          <a:ln/>
+        </p:spPr>
+        <p:txBody>
+          <a:bodyPr wrap="square" lIns="0" tIns="0" rIns="0" bIns="0" rtlCol="0" anchor="ctr"/>
+          <a:lstStyle/>
+          <a:p>
+            <a:pPr indent="0" marL="0">
+              <a:buNone/>
+            </a:pPr>
+            <a:r>
+              <a:rPr lang="en-US" sz="1200" dirty="0">
+                <a:solidFill>
+                  <a:srgbClr val="111111"/>
+                </a:solidFill>
+                <a:latin typeface="Pretendard" pitchFamily="34" charset="0"/>
+                <a:ea typeface="Pretendard" pitchFamily="34" charset="-122"/>
+                <a:cs typeface="Pretendard" pitchFamily="34" charset="-120"/>
+              </a:rPr>
+              <a:t>후보 논문 다섯 편의 목록을 만들었다</a:t>
+            </a:r>
+            <a:endParaRPr lang="en-US" sz="1200" dirty="0"/>
+          </a:p>
+        </p:txBody>
+      </p:sp>
+      <p:sp>
+        <p:nvSpPr>
+          <p:cNvPr id="25" name="Shape 23"/>
+          <p:cNvSpPr/>
+          <p:nvPr/>
+        </p:nvSpPr>
+        <p:spPr>
+          <a:xfrm>
+            <a:off x="640080" y="4681728"/>
+            <a:ext cx="5254600" cy="585216"/>
+          </a:xfrm>
+          <a:prstGeom prst="rect">
+            <a:avLst/>
+          </a:prstGeom>
+          <a:solidFill>
+            <a:srgbClr val="F2F2F2"/>
+          </a:solidFill>
+          <a:ln w="12700">
+            <a:solidFill>
+              <a:srgbClr val="F2F2F2"/>
+            </a:solidFill>
+            <a:prstDash val="solid"/>
+          </a:ln>
+        </p:spPr>
+      </p:sp>
+      <p:sp>
+        <p:nvSpPr>
+          <p:cNvPr id="26" name="Shape 24"/>
+          <p:cNvSpPr/>
+          <p:nvPr/>
+        </p:nvSpPr>
+        <p:spPr>
+          <a:xfrm>
+            <a:off x="914400" y="4818888"/>
+            <a:ext cx="310896" cy="310896"/>
+          </a:xfrm>
+          <a:prstGeom prst="ellipse">
+            <a:avLst/>
+          </a:prstGeom>
+          <a:solidFill>
+            <a:srgbClr val="F2F2F2"/>
+          </a:solidFill>
+          <a:ln w="12700">
+            <a:solidFill>
+              <a:srgbClr val="111111"/>
+            </a:solidFill>
+            <a:prstDash val="solid"/>
+          </a:ln>
+        </p:spPr>
+      </p:sp>
+      <p:sp>
+        <p:nvSpPr>
+          <p:cNvPr id="27" name="Text 25"/>
+          <p:cNvSpPr/>
+          <p:nvPr/>
+        </p:nvSpPr>
+        <p:spPr>
+          <a:xfrm>
+            <a:off x="914400" y="4818888"/>
+            <a:ext cx="310896" cy="310896"/>
+          </a:xfrm>
+          <a:prstGeom prst="rect">
+            <a:avLst/>
+          </a:prstGeom>
+          <a:noFill/>
+          <a:ln/>
+        </p:spPr>
+        <p:txBody>
+          <a:bodyPr wrap="square" lIns="0" tIns="0" rIns="0" bIns="0" rtlCol="0" anchor="ctr"/>
+          <a:lstStyle/>
+          <a:p>
+            <a:pPr algn="ctr" indent="0" marL="0">
+              <a:buNone/>
+            </a:pPr>
+            <a:r>
+              <a:rPr lang="en-US" sz="900" b="1" dirty="0">
+                <a:solidFill>
+                  <a:srgbClr val="111111"/>
+                </a:solidFill>
+                <a:latin typeface="Pretendard" pitchFamily="34" charset="0"/>
+                <a:ea typeface="Pretendard" pitchFamily="34" charset="-122"/>
+                <a:cs typeface="Pretendard" pitchFamily="34" charset="-120"/>
+              </a:rPr>
+              <a:t>05</a:t>
+            </a:r>
+            <a:endParaRPr lang="en-US" sz="900" dirty="0"/>
+          </a:p>
+        </p:txBody>
+      </p:sp>
+      <p:sp>
+        <p:nvSpPr>
+          <p:cNvPr id="28" name="Text 26"/>
+          <p:cNvSpPr/>
+          <p:nvPr/>
+        </p:nvSpPr>
+        <p:spPr>
+          <a:xfrm>
+            <a:off x="1353312" y="4681728"/>
+            <a:ext cx="4267048" cy="585216"/>
+          </a:xfrm>
+          <a:prstGeom prst="rect">
+            <a:avLst/>
+          </a:prstGeom>
+          <a:noFill/>
+          <a:ln/>
+        </p:spPr>
+        <p:txBody>
+          <a:bodyPr wrap="square" lIns="0" tIns="0" rIns="0" bIns="0" rtlCol="0" anchor="ctr"/>
+          <a:lstStyle/>
+          <a:p>
+            <a:pPr indent="0" marL="0">
+              <a:buNone/>
+            </a:pPr>
+            <a:r>
+              <a:rPr lang="en-US" sz="1200" dirty="0">
+                <a:solidFill>
+                  <a:srgbClr val="111111"/>
+                </a:solidFill>
+                <a:latin typeface="Pretendard" pitchFamily="34" charset="0"/>
+                <a:ea typeface="Pretendard" pitchFamily="34" charset="-122"/>
+                <a:cs typeface="Pretendard" pitchFamily="34" charset="-120"/>
+              </a:rPr>
+              <a:t>한 편을 열어 방법 절에서 다섯 가지를 찾아봤다</a:t>
+            </a:r>
+            <a:endParaRPr lang="en-US" sz="1200" dirty="0"/>
+          </a:p>
+        </p:txBody>
+      </p:sp>
+      <p:sp>
+        <p:nvSpPr>
+          <p:cNvPr id="29" name="Shape 27"/>
+          <p:cNvSpPr/>
+          <p:nvPr/>
+        </p:nvSpPr>
+        <p:spPr>
+          <a:xfrm>
+            <a:off x="6297016" y="1755648"/>
+            <a:ext cx="5254600" cy="585216"/>
+          </a:xfrm>
+          <a:prstGeom prst="rect">
+            <a:avLst/>
+          </a:prstGeom>
+          <a:solidFill>
+            <a:srgbClr val="F2F2F2"/>
+          </a:solidFill>
+          <a:ln w="12700">
+            <a:solidFill>
+              <a:srgbClr val="F2F2F2"/>
+            </a:solidFill>
+            <a:prstDash val="solid"/>
+          </a:ln>
+        </p:spPr>
+      </p:sp>
+      <p:sp>
+        <p:nvSpPr>
+          <p:cNvPr id="30" name="Shape 28"/>
+          <p:cNvSpPr/>
+          <p:nvPr/>
+        </p:nvSpPr>
+        <p:spPr>
+          <a:xfrm>
+            <a:off x="6571336" y="1892808"/>
+            <a:ext cx="310896" cy="310896"/>
+          </a:xfrm>
+          <a:prstGeom prst="ellipse">
+            <a:avLst/>
+          </a:prstGeom>
+          <a:solidFill>
+            <a:srgbClr val="F2F2F2"/>
+          </a:solidFill>
+          <a:ln w="12700">
+            <a:solidFill>
+              <a:srgbClr val="111111"/>
+            </a:solidFill>
+            <a:prstDash val="solid"/>
+          </a:ln>
+        </p:spPr>
+      </p:sp>
+      <p:sp>
+        <p:nvSpPr>
+          <p:cNvPr id="31" name="Text 29"/>
+          <p:cNvSpPr/>
+          <p:nvPr/>
+        </p:nvSpPr>
+        <p:spPr>
+          <a:xfrm>
+            <a:off x="6571336" y="1892808"/>
+            <a:ext cx="310896" cy="310896"/>
+          </a:xfrm>
+          <a:prstGeom prst="rect">
+            <a:avLst/>
+          </a:prstGeom>
+          <a:noFill/>
+          <a:ln/>
+        </p:spPr>
+        <p:txBody>
+          <a:bodyPr wrap="square" lIns="0" tIns="0" rIns="0" bIns="0" rtlCol="0" anchor="ctr"/>
+          <a:lstStyle/>
+          <a:p>
+            <a:pPr algn="ctr" indent="0" marL="0">
+              <a:buNone/>
+            </a:pPr>
+            <a:r>
+              <a:rPr lang="en-US" sz="900" b="1" dirty="0">
+                <a:solidFill>
+                  <a:srgbClr val="111111"/>
+                </a:solidFill>
+                <a:latin typeface="Pretendard" pitchFamily="34" charset="0"/>
+                <a:ea typeface="Pretendard" pitchFamily="34" charset="-122"/>
+                <a:cs typeface="Pretendard" pitchFamily="34" charset="-120"/>
+              </a:rPr>
+              <a:t>06</a:t>
+            </a:r>
+            <a:endParaRPr lang="en-US" sz="900" dirty="0"/>
+          </a:p>
+        </p:txBody>
+      </p:sp>
+      <p:sp>
+        <p:nvSpPr>
+          <p:cNvPr id="32" name="Text 30"/>
+          <p:cNvSpPr/>
+          <p:nvPr/>
+        </p:nvSpPr>
+        <p:spPr>
+          <a:xfrm>
+            <a:off x="7010248" y="1755648"/>
+            <a:ext cx="4267048" cy="585216"/>
+          </a:xfrm>
+          <a:prstGeom prst="rect">
+            <a:avLst/>
+          </a:prstGeom>
+          <a:noFill/>
+          <a:ln/>
+        </p:spPr>
+        <p:txBody>
+          <a:bodyPr wrap="square" lIns="0" tIns="0" rIns="0" bIns="0" rtlCol="0" anchor="ctr"/>
+          <a:lstStyle/>
+          <a:p>
+            <a:pPr indent="0" marL="0">
+              <a:buNone/>
+            </a:pPr>
+            <a:r>
+              <a:rPr lang="en-US" sz="1200" dirty="0">
+                <a:solidFill>
+                  <a:srgbClr val="111111"/>
+                </a:solidFill>
+                <a:latin typeface="Pretendard" pitchFamily="34" charset="0"/>
+                <a:ea typeface="Pretendard" pitchFamily="34" charset="-122"/>
+                <a:cs typeface="Pretendard" pitchFamily="34" charset="-120"/>
+              </a:rPr>
+              <a:t>정리표 양식을 내려받았다</a:t>
+            </a:r>
+            <a:endParaRPr lang="en-US" sz="1200" dirty="0"/>
+          </a:p>
+        </p:txBody>
+      </p:sp>
+      <p:sp>
+        <p:nvSpPr>
+          <p:cNvPr id="33" name="Shape 31"/>
+          <p:cNvSpPr/>
+          <p:nvPr/>
+        </p:nvSpPr>
+        <p:spPr>
+          <a:xfrm>
+            <a:off x="6297016" y="2487168"/>
+            <a:ext cx="5254600" cy="585216"/>
+          </a:xfrm>
+          <a:prstGeom prst="rect">
+            <a:avLst/>
+          </a:prstGeom>
+          <a:solidFill>
+            <a:srgbClr val="F2F2F2"/>
+          </a:solidFill>
+          <a:ln w="12700">
+            <a:solidFill>
+              <a:srgbClr val="F2F2F2"/>
+            </a:solidFill>
+            <a:prstDash val="solid"/>
+          </a:ln>
+        </p:spPr>
+      </p:sp>
+      <p:sp>
+        <p:nvSpPr>
+          <p:cNvPr id="34" name="Shape 32"/>
+          <p:cNvSpPr/>
+          <p:nvPr/>
+        </p:nvSpPr>
+        <p:spPr>
+          <a:xfrm>
+            <a:off x="6571336" y="2624328"/>
+            <a:ext cx="310896" cy="310896"/>
+          </a:xfrm>
+          <a:prstGeom prst="ellipse">
+            <a:avLst/>
+          </a:prstGeom>
+          <a:solidFill>
+            <a:srgbClr val="F2F2F2"/>
+          </a:solidFill>
+          <a:ln w="12700">
+            <a:solidFill>
+              <a:srgbClr val="111111"/>
+            </a:solidFill>
+            <a:prstDash val="solid"/>
+          </a:ln>
+        </p:spPr>
+      </p:sp>
+      <p:sp>
+        <p:nvSpPr>
+          <p:cNvPr id="35" name="Text 33"/>
+          <p:cNvSpPr/>
+          <p:nvPr/>
+        </p:nvSpPr>
+        <p:spPr>
+          <a:xfrm>
+            <a:off x="6571336" y="2624328"/>
+            <a:ext cx="310896" cy="310896"/>
+          </a:xfrm>
+          <a:prstGeom prst="rect">
+            <a:avLst/>
+          </a:prstGeom>
+          <a:noFill/>
+          <a:ln/>
+        </p:spPr>
+        <p:txBody>
+          <a:bodyPr wrap="square" lIns="0" tIns="0" rIns="0" bIns="0" rtlCol="0" anchor="ctr"/>
+          <a:lstStyle/>
+          <a:p>
+            <a:pPr algn="ctr" indent="0" marL="0">
+              <a:buNone/>
+            </a:pPr>
+            <a:r>
+              <a:rPr lang="en-US" sz="900" b="1" dirty="0">
+                <a:solidFill>
+                  <a:srgbClr val="111111"/>
+                </a:solidFill>
+                <a:latin typeface="Pretendard" pitchFamily="34" charset="0"/>
+                <a:ea typeface="Pretendard" pitchFamily="34" charset="-122"/>
+                <a:cs typeface="Pretendard" pitchFamily="34" charset="-120"/>
+              </a:rPr>
+              <a:t>07</a:t>
+            </a:r>
+            <a:endParaRPr lang="en-US" sz="900" dirty="0"/>
+          </a:p>
+        </p:txBody>
+      </p:sp>
+      <p:sp>
+        <p:nvSpPr>
+          <p:cNvPr id="36" name="Text 34"/>
+          <p:cNvSpPr/>
+          <p:nvPr/>
+        </p:nvSpPr>
+        <p:spPr>
+          <a:xfrm>
+            <a:off x="7010248" y="2487168"/>
+            <a:ext cx="4267048" cy="585216"/>
+          </a:xfrm>
+          <a:prstGeom prst="rect">
+            <a:avLst/>
+          </a:prstGeom>
+          <a:noFill/>
+          <a:ln/>
+        </p:spPr>
+        <p:txBody>
+          <a:bodyPr wrap="square" lIns="0" tIns="0" rIns="0" bIns="0" rtlCol="0" anchor="ctr"/>
+          <a:lstStyle/>
+          <a:p>
+            <a:pPr indent="0" marL="0">
+              <a:buNone/>
+            </a:pPr>
+            <a:r>
+              <a:rPr lang="en-US" sz="1200" dirty="0">
+                <a:solidFill>
+                  <a:srgbClr val="111111"/>
+                </a:solidFill>
+                <a:latin typeface="Pretendard" pitchFamily="34" charset="0"/>
+                <a:ea typeface="Pretendard" pitchFamily="34" charset="-122"/>
+                <a:cs typeface="Pretendard" pitchFamily="34" charset="-120"/>
+              </a:rPr>
+              <a:t>3회차 리딩 두 편의 접근 경로를 확인했다</a:t>
+            </a:r>
+            <a:endParaRPr lang="en-US" sz="1200" dirty="0"/>
+          </a:p>
+        </p:txBody>
+      </p:sp>
+      <p:sp>
+        <p:nvSpPr>
+          <p:cNvPr id="37" name="Shape 35"/>
+          <p:cNvSpPr/>
+          <p:nvPr/>
+        </p:nvSpPr>
+        <p:spPr>
+          <a:xfrm>
+            <a:off x="6297016" y="3218688"/>
+            <a:ext cx="5254600" cy="585216"/>
+          </a:xfrm>
+          <a:prstGeom prst="rect">
+            <a:avLst/>
+          </a:prstGeom>
+          <a:solidFill>
+            <a:srgbClr val="F2F2F2"/>
+          </a:solidFill>
+          <a:ln w="12700">
+            <a:solidFill>
+              <a:srgbClr val="F2F2F2"/>
+            </a:solidFill>
+            <a:prstDash val="solid"/>
+          </a:ln>
+        </p:spPr>
+      </p:sp>
+      <p:sp>
+        <p:nvSpPr>
+          <p:cNvPr id="38" name="Shape 36"/>
+          <p:cNvSpPr/>
+          <p:nvPr/>
+        </p:nvSpPr>
+        <p:spPr>
+          <a:xfrm>
+            <a:off x="6571336" y="3355848"/>
+            <a:ext cx="310896" cy="310896"/>
+          </a:xfrm>
+          <a:prstGeom prst="ellipse">
+            <a:avLst/>
+          </a:prstGeom>
+          <a:solidFill>
+            <a:srgbClr val="F2F2F2"/>
+          </a:solidFill>
+          <a:ln w="12700">
+            <a:solidFill>
+              <a:srgbClr val="111111"/>
+            </a:solidFill>
+            <a:prstDash val="solid"/>
+          </a:ln>
+        </p:spPr>
+      </p:sp>
+      <p:sp>
+        <p:nvSpPr>
+          <p:cNvPr id="39" name="Text 37"/>
+          <p:cNvSpPr/>
+          <p:nvPr/>
+        </p:nvSpPr>
+        <p:spPr>
+          <a:xfrm>
+            <a:off x="6571336" y="3355848"/>
+            <a:ext cx="310896" cy="310896"/>
+          </a:xfrm>
+          <a:prstGeom prst="rect">
+            <a:avLst/>
+          </a:prstGeom>
+          <a:noFill/>
+          <a:ln/>
+        </p:spPr>
+        <p:txBody>
+          <a:bodyPr wrap="square" lIns="0" tIns="0" rIns="0" bIns="0" rtlCol="0" anchor="ctr"/>
+          <a:lstStyle/>
+          <a:p>
+            <a:pPr algn="ctr" indent="0" marL="0">
+              <a:buNone/>
+            </a:pPr>
+            <a:r>
+              <a:rPr lang="en-US" sz="900" b="1" dirty="0">
+                <a:solidFill>
+                  <a:srgbClr val="111111"/>
+                </a:solidFill>
+                <a:latin typeface="Pretendard" pitchFamily="34" charset="0"/>
+                <a:ea typeface="Pretendard" pitchFamily="34" charset="-122"/>
+                <a:cs typeface="Pretendard" pitchFamily="34" charset="-120"/>
+              </a:rPr>
+              <a:t>08</a:t>
+            </a:r>
+            <a:endParaRPr lang="en-US" sz="900" dirty="0"/>
+          </a:p>
+        </p:txBody>
+      </p:sp>
+      <p:sp>
+        <p:nvSpPr>
+          <p:cNvPr id="40" name="Text 38"/>
+          <p:cNvSpPr/>
+          <p:nvPr/>
+        </p:nvSpPr>
+        <p:spPr>
+          <a:xfrm>
+            <a:off x="7010248" y="3218688"/>
+            <a:ext cx="4267048" cy="585216"/>
+          </a:xfrm>
+          <a:prstGeom prst="rect">
+            <a:avLst/>
+          </a:prstGeom>
+          <a:noFill/>
+          <a:ln/>
+        </p:spPr>
+        <p:txBody>
+          <a:bodyPr wrap="square" lIns="0" tIns="0" rIns="0" bIns="0" rtlCol="0" anchor="ctr"/>
+          <a:lstStyle/>
+          <a:p>
+            <a:pPr indent="0" marL="0">
+              <a:buNone/>
+            </a:pPr>
+            <a:r>
+              <a:rPr lang="en-US" sz="1200" dirty="0">
+                <a:solidFill>
+                  <a:srgbClr val="111111"/>
+                </a:solidFill>
+                <a:latin typeface="Pretendard" pitchFamily="34" charset="0"/>
+                <a:ea typeface="Pretendard" pitchFamily="34" charset="-122"/>
+                <a:cs typeface="Pretendard" pitchFamily="34" charset="-120"/>
+              </a:rPr>
+              <a:t>지도를 언제 그릴지 정했다</a:t>
+            </a:r>
+            <a:endParaRPr lang="en-US" sz="1200" dirty="0"/>
+          </a:p>
+        </p:txBody>
+      </p:sp>
+      <p:sp>
+        <p:nvSpPr>
+          <p:cNvPr id="41" name="Shape 39"/>
+          <p:cNvSpPr/>
+          <p:nvPr/>
+        </p:nvSpPr>
+        <p:spPr>
+          <a:xfrm>
+            <a:off x="6297016" y="3950208"/>
+            <a:ext cx="5254600" cy="585216"/>
+          </a:xfrm>
+          <a:prstGeom prst="rect">
+            <a:avLst/>
+          </a:prstGeom>
+          <a:solidFill>
+            <a:srgbClr val="F2F2F2"/>
+          </a:solidFill>
+          <a:ln w="12700">
+            <a:solidFill>
+              <a:srgbClr val="F2F2F2"/>
+            </a:solidFill>
+            <a:prstDash val="solid"/>
+          </a:ln>
+        </p:spPr>
+      </p:sp>
+      <p:sp>
+        <p:nvSpPr>
+          <p:cNvPr id="42" name="Shape 40"/>
+          <p:cNvSpPr/>
+          <p:nvPr/>
+        </p:nvSpPr>
+        <p:spPr>
+          <a:xfrm>
+            <a:off x="6571336" y="4087368"/>
+            <a:ext cx="310896" cy="310896"/>
+          </a:xfrm>
+          <a:prstGeom prst="ellipse">
+            <a:avLst/>
+          </a:prstGeom>
+          <a:solidFill>
+            <a:srgbClr val="F2F2F2"/>
+          </a:solidFill>
+          <a:ln w="12700">
+            <a:solidFill>
+              <a:srgbClr val="111111"/>
+            </a:solidFill>
+            <a:prstDash val="solid"/>
+          </a:ln>
+        </p:spPr>
+      </p:sp>
+      <p:sp>
+        <p:nvSpPr>
+          <p:cNvPr id="43" name="Text 41"/>
+          <p:cNvSpPr/>
+          <p:nvPr/>
+        </p:nvSpPr>
+        <p:spPr>
+          <a:xfrm>
+            <a:off x="6571336" y="4087368"/>
+            <a:ext cx="310896" cy="310896"/>
+          </a:xfrm>
+          <a:prstGeom prst="rect">
+            <a:avLst/>
+          </a:prstGeom>
+          <a:noFill/>
+          <a:ln/>
+        </p:spPr>
+        <p:txBody>
+          <a:bodyPr wrap="square" lIns="0" tIns="0" rIns="0" bIns="0" rtlCol="0" anchor="ctr"/>
+          <a:lstStyle/>
+          <a:p>
+            <a:pPr algn="ctr" indent="0" marL="0">
+              <a:buNone/>
+            </a:pPr>
+            <a:r>
+              <a:rPr lang="en-US" sz="900" b="1" dirty="0">
+                <a:solidFill>
+                  <a:srgbClr val="111111"/>
+                </a:solidFill>
+                <a:latin typeface="Pretendard" pitchFamily="34" charset="0"/>
+                <a:ea typeface="Pretendard" pitchFamily="34" charset="-122"/>
+                <a:cs typeface="Pretendard" pitchFamily="34" charset="-120"/>
+              </a:rPr>
+              <a:t>09</a:t>
+            </a:r>
+            <a:endParaRPr lang="en-US" sz="900" dirty="0"/>
+          </a:p>
+        </p:txBody>
+      </p:sp>
+      <p:sp>
+        <p:nvSpPr>
+          <p:cNvPr id="44" name="Text 42"/>
+          <p:cNvSpPr/>
+          <p:nvPr/>
+        </p:nvSpPr>
+        <p:spPr>
+          <a:xfrm>
+            <a:off x="7010248" y="3950208"/>
+            <a:ext cx="4267048" cy="585216"/>
+          </a:xfrm>
+          <a:prstGeom prst="rect">
+            <a:avLst/>
+          </a:prstGeom>
+          <a:noFill/>
+          <a:ln/>
+        </p:spPr>
+        <p:txBody>
+          <a:bodyPr wrap="square" lIns="0" tIns="0" rIns="0" bIns="0" rtlCol="0" anchor="ctr"/>
+          <a:lstStyle/>
+          <a:p>
+            <a:pPr indent="0" marL="0">
+              <a:buNone/>
+            </a:pPr>
+            <a:r>
+              <a:rPr lang="en-US" sz="1200" dirty="0">
+                <a:solidFill>
+                  <a:srgbClr val="111111"/>
+                </a:solidFill>
+                <a:latin typeface="Pretendard" pitchFamily="34" charset="0"/>
+                <a:ea typeface="Pretendard" pitchFamily="34" charset="-122"/>
+                <a:cs typeface="Pretendard" pitchFamily="34" charset="-120"/>
+              </a:rPr>
+              <a:t>공유 폴더에 올리는 방법을 확인했다</a:t>
+            </a:r>
+            <a:endParaRPr lang="en-US" sz="1200" dirty="0"/>
+          </a:p>
+        </p:txBody>
+      </p:sp>
+      <p:sp>
+        <p:nvSpPr>
+          <p:cNvPr id="45" name="Shape 43"/>
+          <p:cNvSpPr/>
+          <p:nvPr/>
+        </p:nvSpPr>
+        <p:spPr>
+          <a:xfrm>
+            <a:off x="640080" y="5468112"/>
+            <a:ext cx="10911535" cy="7315"/>
+          </a:xfrm>
+          <a:prstGeom prst="rect">
+            <a:avLst/>
+          </a:prstGeom>
+          <a:solidFill>
+            <a:srgbClr val="111111"/>
+          </a:solidFill>
+          <a:ln w="12700">
+            <a:solidFill>
+              <a:srgbClr val="111111"/>
+            </a:solidFill>
+            <a:prstDash val="solid"/>
+          </a:ln>
+        </p:spPr>
+      </p:sp>
+      <p:sp>
+        <p:nvSpPr>
+          <p:cNvPr id="46" name="Text 44"/>
+          <p:cNvSpPr/>
+          <p:nvPr/>
+        </p:nvSpPr>
+        <p:spPr>
+          <a:xfrm>
+            <a:off x="640080" y="5577840"/>
+            <a:ext cx="10911535" cy="402336"/>
+          </a:xfrm>
+          <a:prstGeom prst="rect">
+            <a:avLst/>
+          </a:prstGeom>
+          <a:noFill/>
+          <a:ln/>
+        </p:spPr>
+        <p:txBody>
+          <a:bodyPr wrap="square" lIns="0" tIns="0" rIns="0" bIns="0" rtlCol="0" anchor="ctr"/>
+          <a:lstStyle/>
+          <a:p>
+            <a:pPr indent="0" marL="0">
+              <a:buNone/>
+            </a:pPr>
+            <a:r>
+              <a:rPr lang="en-US" sz="1250" b="1" dirty="0">
+                <a:solidFill>
+                  <a:srgbClr val="111111"/>
+                </a:solidFill>
+                <a:latin typeface="Pretendard" pitchFamily="34" charset="0"/>
+                <a:ea typeface="Pretendard" pitchFamily="34" charset="-122"/>
+                <a:cs typeface="Pretendard" pitchFamily="34" charset="-120"/>
+              </a:rPr>
+              <a:t>세 번째가 안 되면 다음 2주 동안 아무것도 할 수 없습니다. 오늘 확인하고 가세요.</a:t>
+            </a:r>
+            <a:endParaRPr lang="en-US" sz="1250" dirty="0"/>
+          </a:p>
+        </p:txBody>
+      </p:sp>
+      <p:sp>
+        <p:nvSpPr>
+          <p:cNvPr id="47" name="Shape 45"/>
+          <p:cNvSpPr/>
+          <p:nvPr/>
+        </p:nvSpPr>
+        <p:spPr>
+          <a:xfrm>
+            <a:off x="640080" y="6291072"/>
+            <a:ext cx="10911535" cy="7315"/>
+          </a:xfrm>
+          <a:prstGeom prst="rect">
+            <a:avLst/>
+          </a:prstGeom>
+          <a:solidFill>
+            <a:srgbClr val="DCDCDC"/>
+          </a:solidFill>
+          <a:ln w="12700">
+            <a:solidFill>
+              <a:srgbClr val="DCDCDC"/>
+            </a:solidFill>
+            <a:prstDash val="solid"/>
+          </a:ln>
+        </p:spPr>
+      </p:sp>
+      <p:sp>
+        <p:nvSpPr>
+          <p:cNvPr id="48" name="Text 46"/>
+          <p:cNvSpPr/>
+          <p:nvPr/>
+        </p:nvSpPr>
+        <p:spPr>
+          <a:xfrm>
+            <a:off x="640080" y="6382512"/>
+            <a:ext cx="7772400" cy="237744"/>
+          </a:xfrm>
+          <a:prstGeom prst="rect">
+            <a:avLst/>
+          </a:prstGeom>
+          <a:noFill/>
+          <a:ln/>
+        </p:spPr>
+        <p:txBody>
+          <a:bodyPr wrap="square" lIns="0" tIns="0" rIns="0" bIns="0" rtlCol="0" anchor="ctr"/>
+          <a:lstStyle/>
+          <a:p>
+            <a:pPr indent="0" marL="0">
+              <a:buNone/>
+            </a:pPr>
+            <a:r>
+              <a:rPr lang="en-US" sz="850" spc="40" kern="0" dirty="0">
+                <a:solidFill>
+                  <a:srgbClr val="9B9B9B"/>
+                </a:solidFill>
+                <a:latin typeface="Pretendard" pitchFamily="34" charset="0"/>
+                <a:ea typeface="Pretendard" pitchFamily="34" charset="-122"/>
+                <a:cs typeface="Pretendard" pitchFamily="34" charset="-120"/>
+              </a:rPr>
+              <a:t>컨셉트와 프로세스 · 2주차 선행연구 — 찾고, 읽고, 지도 그리기</a:t>
+            </a:r>
+            <a:endParaRPr lang="en-US" sz="850" dirty="0"/>
+          </a:p>
+        </p:txBody>
+      </p:sp>
+      <p:sp>
+        <p:nvSpPr>
+          <p:cNvPr id="49" name="Text 47"/>
+          <p:cNvSpPr/>
+          <p:nvPr/>
+        </p:nvSpPr>
+        <p:spPr>
+          <a:xfrm>
+            <a:off x="10271455" y="6382512"/>
+            <a:ext cx="1280160" cy="237744"/>
+          </a:xfrm>
+          <a:prstGeom prst="rect">
+            <a:avLst/>
+          </a:prstGeom>
+          <a:noFill/>
+          <a:ln/>
+        </p:spPr>
+        <p:txBody>
+          <a:bodyPr wrap="square" lIns="0" tIns="0" rIns="0" bIns="0" rtlCol="0" anchor="ctr"/>
+          <a:lstStyle/>
+          <a:p>
+            <a:pPr algn="r" indent="0" marL="0">
+              <a:buNone/>
+            </a:pPr>
+            <a:r>
+              <a:rPr lang="en-US" sz="850" spc="140" kern="0" dirty="0">
+                <a:solidFill>
+                  <a:srgbClr val="9B9B9B"/>
+                </a:solidFill>
+                <a:latin typeface="Pretendard" pitchFamily="34" charset="0"/>
+                <a:ea typeface="Pretendard" pitchFamily="34" charset="-122"/>
+                <a:cs typeface="Pretendard" pitchFamily="34" charset="-120"/>
+              </a:rPr>
+              <a:t>P.10</a:t>
+            </a:r>
+            <a:endParaRPr lang="en-US" sz="850" dirty="0"/>
+          </a:p>
+        </p:txBody>
+      </p:sp>
+    </p:spTree>
+  </p:cSld>
+  <p:clrMapOvr>
+    <a:masterClrMapping/>
+  </p:clrMapOvr>
+</p:sld>
+</file>
+
+<file path=ppt/slides/slide16.xml><?xml version="1.0" encoding="utf-8"?>
+<p:sld xmlns:a="http://schemas.openxmlformats.org/drawingml/2006/main" xmlns:r="http://schemas.openxmlformats.org/officeDocument/2006/relationships" xmlns:p="http://schemas.openxmlformats.org/presentationml/2006/main">
+  <p:cSld name="Slide 16">
+    <p:bg>
+      <p:bgPr>
+        <a:solidFill>
+          <a:srgbClr val="FFFFFF"/>
+        </a:solidFill>
+      </p:bgPr>
+    </p:bg>
+    <p:spTree>
+      <p:nvGrpSpPr>
+        <p:cNvPr id="1" name=""/>
+        <p:cNvGrpSpPr/>
+        <p:nvPr/>
+      </p:nvGrpSpPr>
+      <p:grpSpPr>
+        <a:xfrm>
+          <a:off x="0" y="0"/>
+          <a:ext cx="0" cy="0"/>
+          <a:chOff x="0" y="0"/>
+          <a:chExt cx="0" cy="0"/>
+        </a:xfrm>
+      </p:grpSpPr>
+      <p:sp>
+        <p:nvSpPr>
+          <p:cNvPr id="2" name="Text 0"/>
+          <p:cNvSpPr/>
+          <p:nvPr/>
+        </p:nvSpPr>
+        <p:spPr>
+          <a:xfrm>
+            <a:off x="640080" y="274320"/>
+            <a:ext cx="3657600" cy="219456"/>
+          </a:xfrm>
+          <a:prstGeom prst="rect">
+            <a:avLst/>
+          </a:prstGeom>
+          <a:noFill/>
+          <a:ln/>
+        </p:spPr>
+        <p:txBody>
+          <a:bodyPr wrap="square" lIns="0" tIns="0" rIns="0" bIns="0" rtlCol="0" anchor="ctr"/>
+          <a:lstStyle/>
+          <a:p>
+            <a:pPr indent="0" marL="0">
+              <a:buNone/>
+            </a:pPr>
+            <a:r>
+              <a:rPr lang="en-US" sz="900" spc="120" kern="0" dirty="0">
+                <a:solidFill>
+                  <a:srgbClr val="8A8A8A"/>
+                </a:solidFill>
+                <a:latin typeface="Pretendard" pitchFamily="34" charset="0"/>
+                <a:ea typeface="Pretendard" pitchFamily="34" charset="-122"/>
+                <a:cs typeface="Pretendard" pitchFamily="34" charset="-120"/>
+              </a:rPr>
+              <a:t>컨셉트와 프로세스</a:t>
+            </a:r>
+            <a:endParaRPr lang="en-US" sz="900" dirty="0"/>
+          </a:p>
+        </p:txBody>
+      </p:sp>
+      <p:sp>
+        <p:nvSpPr>
+          <p:cNvPr id="3" name="Text 1"/>
+          <p:cNvSpPr/>
+          <p:nvPr/>
+        </p:nvSpPr>
+        <p:spPr>
+          <a:xfrm>
+            <a:off x="4480560" y="274320"/>
+            <a:ext cx="4572000" cy="219456"/>
+          </a:xfrm>
+          <a:prstGeom prst="rect">
+            <a:avLst/>
+          </a:prstGeom>
+          <a:noFill/>
+          <a:ln/>
+        </p:spPr>
+        <p:txBody>
+          <a:bodyPr wrap="square" lIns="0" tIns="0" rIns="0" bIns="0" rtlCol="0" anchor="ctr"/>
+          <a:lstStyle/>
+          <a:p>
+            <a:pPr algn="ctr" indent="0" marL="0">
+              <a:buNone/>
+            </a:pPr>
+            <a:r>
+              <a:rPr lang="en-US" sz="900" spc="120" kern="0" dirty="0">
+                <a:solidFill>
+                  <a:srgbClr val="8A8A8A"/>
+                </a:solidFill>
+                <a:latin typeface="Pretendard" pitchFamily="34" charset="0"/>
+                <a:ea typeface="Pretendard" pitchFamily="34" charset="-122"/>
+                <a:cs typeface="Pretendard" pitchFamily="34" charset="-120"/>
+              </a:rPr>
+              <a:t>PHASE 1 계보</a:t>
+            </a:r>
+            <a:endParaRPr lang="en-US" sz="900" dirty="0"/>
+          </a:p>
+        </p:txBody>
+      </p:sp>
+      <p:sp>
+        <p:nvSpPr>
+          <p:cNvPr id="4" name="Text 2"/>
+          <p:cNvSpPr/>
+          <p:nvPr/>
+        </p:nvSpPr>
+        <p:spPr>
+          <a:xfrm>
+            <a:off x="8808415" y="274320"/>
+            <a:ext cx="2743200" cy="219456"/>
+          </a:xfrm>
+          <a:prstGeom prst="rect">
+            <a:avLst/>
+          </a:prstGeom>
+          <a:noFill/>
+          <a:ln/>
+        </p:spPr>
+        <p:txBody>
+          <a:bodyPr wrap="square" lIns="0" tIns="0" rIns="0" bIns="0" rtlCol="0" anchor="ctr"/>
+          <a:lstStyle/>
+          <a:p>
+            <a:pPr algn="r" indent="0" marL="0">
+              <a:buNone/>
+            </a:pPr>
+            <a:r>
+              <a:rPr lang="en-US" sz="900" spc="200" kern="0" dirty="0">
+                <a:solidFill>
+                  <a:srgbClr val="8A8A8A"/>
+                </a:solidFill>
+                <a:latin typeface="Pretendard" pitchFamily="34" charset="0"/>
+                <a:ea typeface="Pretendard" pitchFamily="34" charset="-122"/>
+                <a:cs typeface="Pretendard" pitchFamily="34" charset="-120"/>
+              </a:rPr>
+              <a:t>WEEK 02</a:t>
+            </a:r>
+            <a:endParaRPr lang="en-US" sz="900" dirty="0"/>
+          </a:p>
+        </p:txBody>
+      </p:sp>
+      <p:sp>
+        <p:nvSpPr>
+          <p:cNvPr id="5" name="Shape 3"/>
+          <p:cNvSpPr/>
+          <p:nvPr/>
+        </p:nvSpPr>
+        <p:spPr>
+          <a:xfrm>
+            <a:off x="640080" y="548640"/>
+            <a:ext cx="10911535" cy="7315"/>
+          </a:xfrm>
+          <a:prstGeom prst="rect">
+            <a:avLst/>
+          </a:prstGeom>
+          <a:solidFill>
+            <a:srgbClr val="DCDCDC"/>
+          </a:solidFill>
+          <a:ln w="12700">
+            <a:solidFill>
+              <a:srgbClr val="DCDCDC"/>
+            </a:solidFill>
+            <a:prstDash val="solid"/>
+          </a:ln>
+        </p:spPr>
+      </p:sp>
+      <p:sp>
+        <p:nvSpPr>
+          <p:cNvPr id="6" name="Text 4"/>
+          <p:cNvSpPr/>
+          <p:nvPr/>
+        </p:nvSpPr>
+        <p:spPr>
+          <a:xfrm>
+            <a:off x="640080" y="640080"/>
+            <a:ext cx="10911535" cy="219456"/>
+          </a:xfrm>
+          <a:prstGeom prst="rect">
+            <a:avLst/>
+          </a:prstGeom>
+          <a:noFill/>
+          <a:ln/>
+        </p:spPr>
+        <p:txBody>
+          <a:bodyPr wrap="square" lIns="0" tIns="0" rIns="0" bIns="0" rtlCol="0" anchor="ctr"/>
+          <a:lstStyle/>
+          <a:p>
+            <a:pPr indent="0" marL="0">
+              <a:buNone/>
+            </a:pPr>
+            <a:r>
+              <a:rPr lang="en-US" sz="950" spc="260" kern="0" dirty="0">
+                <a:solidFill>
+                  <a:srgbClr val="8A8A8A"/>
+                </a:solidFill>
+                <a:latin typeface="Pretendard" pitchFamily="34" charset="0"/>
+                <a:ea typeface="Pretendard" pitchFamily="34" charset="-122"/>
+                <a:cs typeface="Pretendard" pitchFamily="34" charset="-120"/>
+              </a:rPr>
               <a:t>HOMEWORK</a:t>
             </a:r>
             <a:endParaRPr lang="en-US" sz="950" dirty="0"/>
@@ -8033,7 +9756,7 @@
                 <a:ea typeface="Pretendard" pitchFamily="34" charset="-122"/>
                 <a:cs typeface="Pretendard" pitchFamily="34" charset="-120"/>
               </a:rPr>
-              <a:t>오늘 찾은 것을 여섯 칸으로 채웁니다. 서지 · 문제 · 방법 · 결과 · 내 연구와의 관계 · 인용할 문장 하나. 공유 폴더에 올리고 파일 이름은 이름_선행연구05.</a:t>
+              <a:t>오늘 찾은 것을 여섯 칸으로 채웁니다. 서지 · 문제 · 방법 · 결과 · 내 연구와의 관계 · 인용할 문장 하나. 방법 칸은 오늘 본 다섯 가지로 쪼개 적습니다 — 자료 · 절차 · 예비조사 · 판단 기준 · 한계. 공유 폴더에 올리고 파일 이름은 이름_선행연구05.</a:t>
             </a:r>
             <a:endParaRPr lang="en-US" sz="1100" dirty="0"/>
           </a:p>
@@ -8934,7 +10657,7 @@
                 <a:ea typeface="Pretendard" pitchFamily="34" charset="-122"/>
                 <a:cs typeface="Pretendard" pitchFamily="34" charset="-120"/>
               </a:rPr>
-              <a:t>P.10</a:t>
+              <a:t>P.11</a:t>
             </a:r>
             <a:endParaRPr lang="en-US" sz="850" dirty="0"/>
           </a:p>

--- a/dist/weeks-대학원/컨셉트와프로세스_02주차_선행연구.pptx
+++ b/dist/weeks-대학원/컨셉트와프로세스_02주차_선행연구.pptx
@@ -14759,7 +14759,7 @@
         <p:spPr>
           <a:xfrm>
             <a:off x="640080" y="1627632"/>
-            <a:ext cx="5254600" cy="3419856"/>
+            <a:ext cx="5254600" cy="3127248"/>
           </a:xfrm>
           <a:prstGeom prst="rect">
             <a:avLst/>
@@ -14823,7 +14823,7 @@
         <p:spPr>
           <a:xfrm>
             <a:off x="6297016" y="1627632"/>
-            <a:ext cx="5254600" cy="3419856"/>
+            <a:ext cx="5254600" cy="3127248"/>
           </a:xfrm>
           <a:prstGeom prst="rect">
             <a:avLst/>
@@ -14926,7 +14926,7 @@
         <p:spPr>
           <a:xfrm>
             <a:off x="1042416" y="2688336"/>
-            <a:ext cx="4449928" cy="384048"/>
+            <a:ext cx="4449928" cy="329184"/>
           </a:xfrm>
           <a:prstGeom prst="rect">
             <a:avLst/>
@@ -15007,7 +15007,7 @@
         <p:spPr>
           <a:xfrm>
             <a:off x="6699352" y="2688336"/>
-            <a:ext cx="4449928" cy="384048"/>
+            <a:ext cx="4449928" cy="329184"/>
           </a:xfrm>
           <a:prstGeom prst="rect">
             <a:avLst/>
@@ -15048,7 +15048,7 @@
         </p:nvSpPr>
         <p:spPr>
           <a:xfrm>
-            <a:off x="1042416" y="3054096"/>
+            <a:off x="1042416" y="2980944"/>
             <a:ext cx="4449928" cy="7315"/>
           </a:xfrm>
           <a:prstGeom prst="rect">
@@ -15073,7 +15073,7 @@
         </p:nvSpPr>
         <p:spPr>
           <a:xfrm>
-            <a:off x="6699352" y="3054096"/>
+            <a:off x="6699352" y="2980944"/>
             <a:ext cx="4449928" cy="7315"/>
           </a:xfrm>
           <a:prstGeom prst="rect">
@@ -15098,7 +15098,7 @@
         </p:nvSpPr>
         <p:spPr>
           <a:xfrm>
-            <a:off x="1042416" y="3108960"/>
+            <a:off x="1042416" y="3035808"/>
             <a:ext cx="2011680" cy="274320"/>
           </a:xfrm>
           <a:prstGeom prst="rect">
@@ -15137,8 +15137,8 @@
         </p:nvSpPr>
         <p:spPr>
           <a:xfrm>
-            <a:off x="1042416" y="3346704"/>
-            <a:ext cx="4449928" cy="384048"/>
+            <a:off x="1042416" y="3273552"/>
+            <a:ext cx="4449928" cy="329184"/>
           </a:xfrm>
           <a:prstGeom prst="rect">
             <a:avLst/>
@@ -15179,7 +15179,7 @@
         </p:nvSpPr>
         <p:spPr>
           <a:xfrm>
-            <a:off x="6699352" y="3108960"/>
+            <a:off x="6699352" y="3035808"/>
             <a:ext cx="2011680" cy="274320"/>
           </a:xfrm>
           <a:prstGeom prst="rect">
@@ -15218,8 +15218,8 @@
         </p:nvSpPr>
         <p:spPr>
           <a:xfrm>
-            <a:off x="6699352" y="3346704"/>
-            <a:ext cx="4449928" cy="384048"/>
+            <a:off x="6699352" y="3273552"/>
+            <a:ext cx="4449928" cy="329184"/>
           </a:xfrm>
           <a:prstGeom prst="rect">
             <a:avLst/>
@@ -15260,7 +15260,7 @@
         </p:nvSpPr>
         <p:spPr>
           <a:xfrm>
-            <a:off x="1042416" y="3712464"/>
+            <a:off x="1042416" y="3566160"/>
             <a:ext cx="4449928" cy="7315"/>
           </a:xfrm>
           <a:prstGeom prst="rect">
@@ -15285,7 +15285,7 @@
         </p:nvSpPr>
         <p:spPr>
           <a:xfrm>
-            <a:off x="6699352" y="3712464"/>
+            <a:off x="6699352" y="3566160"/>
             <a:ext cx="4449928" cy="7315"/>
           </a:xfrm>
           <a:prstGeom prst="rect">
@@ -15310,7 +15310,7 @@
         </p:nvSpPr>
         <p:spPr>
           <a:xfrm>
-            <a:off x="1042416" y="3767328"/>
+            <a:off x="1042416" y="3621024"/>
             <a:ext cx="2011680" cy="274320"/>
           </a:xfrm>
           <a:prstGeom prst="rect">
@@ -15349,8 +15349,8 @@
         </p:nvSpPr>
         <p:spPr>
           <a:xfrm>
-            <a:off x="1042416" y="4005072"/>
-            <a:ext cx="4449928" cy="384048"/>
+            <a:off x="1042416" y="3858768"/>
+            <a:ext cx="4449928" cy="329184"/>
           </a:xfrm>
           <a:prstGeom prst="rect">
             <a:avLst/>
@@ -15391,7 +15391,7 @@
         </p:nvSpPr>
         <p:spPr>
           <a:xfrm>
-            <a:off x="6699352" y="3767328"/>
+            <a:off x="6699352" y="3621024"/>
             <a:ext cx="2011680" cy="274320"/>
           </a:xfrm>
           <a:prstGeom prst="rect">
@@ -15430,8 +15430,8 @@
         </p:nvSpPr>
         <p:spPr>
           <a:xfrm>
-            <a:off x="6699352" y="4005072"/>
-            <a:ext cx="4449928" cy="384048"/>
+            <a:off x="6699352" y="3858768"/>
+            <a:ext cx="4449928" cy="329184"/>
           </a:xfrm>
           <a:prstGeom prst="rect">
             <a:avLst/>
@@ -15472,7 +15472,7 @@
         </p:nvSpPr>
         <p:spPr>
           <a:xfrm>
-            <a:off x="1042416" y="4370832"/>
+            <a:off x="1042416" y="4151376"/>
             <a:ext cx="4449928" cy="7315"/>
           </a:xfrm>
           <a:prstGeom prst="rect">
@@ -15497,7 +15497,7 @@
         </p:nvSpPr>
         <p:spPr>
           <a:xfrm>
-            <a:off x="6699352" y="4370832"/>
+            <a:off x="6699352" y="4151376"/>
             <a:ext cx="4449928" cy="7315"/>
           </a:xfrm>
           <a:prstGeom prst="rect">
@@ -15522,7 +15522,7 @@
         </p:nvSpPr>
         <p:spPr>
           <a:xfrm>
-            <a:off x="1042416" y="4425696"/>
+            <a:off x="1042416" y="4206240"/>
             <a:ext cx="2011680" cy="274320"/>
           </a:xfrm>
           <a:prstGeom prst="rect">
@@ -15561,8 +15561,8 @@
         </p:nvSpPr>
         <p:spPr>
           <a:xfrm>
-            <a:off x="1042416" y="4663440"/>
-            <a:ext cx="4449928" cy="384048"/>
+            <a:off x="1042416" y="4443984"/>
+            <a:ext cx="4449928" cy="329184"/>
           </a:xfrm>
           <a:prstGeom prst="rect">
             <a:avLst/>
@@ -15603,7 +15603,7 @@
         </p:nvSpPr>
         <p:spPr>
           <a:xfrm>
-            <a:off x="6699352" y="4425696"/>
+            <a:off x="6699352" y="4206240"/>
             <a:ext cx="2011680" cy="274320"/>
           </a:xfrm>
           <a:prstGeom prst="rect">
@@ -15642,8 +15642,8 @@
         </p:nvSpPr>
         <p:spPr>
           <a:xfrm>
-            <a:off x="6699352" y="4663440"/>
-            <a:ext cx="4449928" cy="384048"/>
+            <a:off x="6699352" y="4443984"/>
+            <a:ext cx="4449928" cy="329184"/>
           </a:xfrm>
           <a:prstGeom prst="rect">
             <a:avLst/>
@@ -15679,6 +15679,73 @@
       <p:sp>
         <p:nvSpPr>
           <p:cNvPr id="35" name="Shape 33"/>
+          <p:cNvSpPr/>
+          <p:nvPr/>
+        </p:nvSpPr>
+        <p:spPr>
+          <a:xfrm>
+            <a:off x="640080" y="5010912"/>
+            <a:ext cx="10911535" cy="7315"/>
+          </a:xfrm>
+          <a:prstGeom prst="rect">
+            <a:avLst/>
+          </a:prstGeom>
+          <a:solidFill>
+            <a:srgbClr val="111111"/>
+          </a:solidFill>
+          <a:ln w="12700">
+            <a:solidFill>
+              <a:srgbClr val="111111"/>
+            </a:solidFill>
+            <a:prstDash val="solid"/>
+          </a:ln>
+        </p:spPr>
+      </p:sp>
+      <p:sp>
+        <p:nvSpPr>
+          <p:cNvPr id="36" name="Text 34"/>
+          <p:cNvSpPr/>
+          <p:nvPr/>
+        </p:nvSpPr>
+        <p:spPr>
+          <a:xfrm>
+            <a:off x="640080" y="5120640"/>
+            <a:ext cx="10911535" cy="402336"/>
+          </a:xfrm>
+          <a:prstGeom prst="rect">
+            <a:avLst/>
+          </a:prstGeom>
+          <a:noFill/>
+          <a:ln/>
+        </p:spPr>
+        <p:txBody>
+          <a:bodyPr wrap="square" lIns="0" tIns="0" rIns="0" bIns="0" rtlCol="0" anchor="t"/>
+          <a:lstStyle/>
+          <a:p>
+            <a:pPr indent="0" marL="0">
+              <a:lnSpc>
+                <a:spcPct val="120000"/>
+              </a:lnSpc>
+              <a:buNone/>
+            </a:pPr>
+            <a:r>
+              <a:rPr lang="en-US" sz="1300" b="1" dirty="0">
+                <a:solidFill>
+                  <a:srgbClr val="111111"/>
+                </a:solidFill>
+                <a:latin typeface="Pretendard" pitchFamily="34" charset="0"/>
+                <a:ea typeface="Pretendard" pitchFamily="34" charset="-122"/>
+                <a:cs typeface="Pretendard" pitchFamily="34" charset="-120"/>
+              </a:rPr>
+              <a:t>왼쪽이 틀린 글은 아닙니다. 다만 물어보면 답이 없어서 심사에서 방어가 되지 않습니다.</a:t>
+            </a:r>
+            <a:endParaRPr lang="en-US" sz="1300" dirty="0"/>
+          </a:p>
+        </p:txBody>
+      </p:sp>
+      <p:sp>
+        <p:nvSpPr>
+          <p:cNvPr id="37" name="Shape 35"/>
           <p:cNvSpPr/>
           <p:nvPr/>
         </p:nvSpPr>
@@ -15703,7 +15770,7 @@
       </p:sp>
       <p:sp>
         <p:nvSpPr>
-          <p:cNvPr id="36" name="Text 34"/>
+          <p:cNvPr id="38" name="Text 36"/>
           <p:cNvSpPr/>
           <p:nvPr/>
         </p:nvSpPr>
@@ -15742,7 +15809,7 @@
       </p:sp>
       <p:sp>
         <p:nvSpPr>
-          <p:cNvPr id="37" name="Text 35"/>
+          <p:cNvPr id="39" name="Text 37"/>
           <p:cNvSpPr/>
           <p:nvPr/>
         </p:nvSpPr>

--- a/dist/weeks-대학원/컨셉트와프로세스_02주차_선행연구.pptx
+++ b/dist/weeks-대학원/컨셉트와프로세스_02주차_선행연구.pptx
@@ -7174,7 +7174,7 @@
         <p:spPr>
           <a:xfrm>
             <a:off x="640080" y="1719072"/>
-            <a:ext cx="10911535" cy="822960"/>
+            <a:ext cx="10911535" cy="777240"/>
           </a:xfrm>
           <a:prstGeom prst="rect">
             <a:avLst/>
@@ -7199,7 +7199,7 @@
         <p:spPr>
           <a:xfrm>
             <a:off x="1097280" y="1810512"/>
-            <a:ext cx="3291840" cy="640080"/>
+            <a:ext cx="3291840" cy="594360"/>
           </a:xfrm>
           <a:prstGeom prst="rect">
             <a:avLst/>
@@ -7238,7 +7238,7 @@
         <p:spPr>
           <a:xfrm>
             <a:off x="4480560" y="1810512"/>
-            <a:ext cx="6705295" cy="640080"/>
+            <a:ext cx="6705295" cy="594360"/>
           </a:xfrm>
           <a:prstGeom prst="rect">
             <a:avLst/>
@@ -7279,8 +7279,8 @@
         </p:nvSpPr>
         <p:spPr>
           <a:xfrm>
-            <a:off x="640080" y="2688336"/>
-            <a:ext cx="10911535" cy="822960"/>
+            <a:off x="640080" y="2642616"/>
+            <a:ext cx="10911535" cy="777240"/>
           </a:xfrm>
           <a:prstGeom prst="rect">
             <a:avLst/>
@@ -7304,8 +7304,8 @@
         </p:nvSpPr>
         <p:spPr>
           <a:xfrm>
-            <a:off x="1097280" y="2779776"/>
-            <a:ext cx="3291840" cy="640080"/>
+            <a:off x="1097280" y="2734056"/>
+            <a:ext cx="3291840" cy="594360"/>
           </a:xfrm>
           <a:prstGeom prst="rect">
             <a:avLst/>
@@ -7343,8 +7343,8 @@
         </p:nvSpPr>
         <p:spPr>
           <a:xfrm>
-            <a:off x="4480560" y="2779776"/>
-            <a:ext cx="6705295" cy="640080"/>
+            <a:off x="4480560" y="2734056"/>
+            <a:ext cx="6705295" cy="594360"/>
           </a:xfrm>
           <a:prstGeom prst="rect">
             <a:avLst/>
@@ -7385,8 +7385,8 @@
         </p:nvSpPr>
         <p:spPr>
           <a:xfrm>
-            <a:off x="640080" y="3657600"/>
-            <a:ext cx="10911535" cy="822960"/>
+            <a:off x="640080" y="3566160"/>
+            <a:ext cx="10911535" cy="777240"/>
           </a:xfrm>
           <a:prstGeom prst="rect">
             <a:avLst/>
@@ -7410,8 +7410,8 @@
         </p:nvSpPr>
         <p:spPr>
           <a:xfrm>
-            <a:off x="1097280" y="3749040"/>
-            <a:ext cx="3291840" cy="640080"/>
+            <a:off x="1097280" y="3657600"/>
+            <a:ext cx="3291840" cy="594360"/>
           </a:xfrm>
           <a:prstGeom prst="rect">
             <a:avLst/>
@@ -7449,8 +7449,8 @@
         </p:nvSpPr>
         <p:spPr>
           <a:xfrm>
-            <a:off x="4480560" y="3749040"/>
-            <a:ext cx="6705295" cy="640080"/>
+            <a:off x="4480560" y="3657600"/>
+            <a:ext cx="6705295" cy="594360"/>
           </a:xfrm>
           <a:prstGeom prst="rect">
             <a:avLst/>
@@ -7491,8 +7491,8 @@
         </p:nvSpPr>
         <p:spPr>
           <a:xfrm>
-            <a:off x="640080" y="4626864"/>
-            <a:ext cx="10911535" cy="822960"/>
+            <a:off x="640080" y="4489704"/>
+            <a:ext cx="10911535" cy="777240"/>
           </a:xfrm>
           <a:prstGeom prst="rect">
             <a:avLst/>
@@ -7516,8 +7516,8 @@
         </p:nvSpPr>
         <p:spPr>
           <a:xfrm>
-            <a:off x="1097280" y="4718304"/>
-            <a:ext cx="3291840" cy="640080"/>
+            <a:off x="1097280" y="4581144"/>
+            <a:ext cx="3291840" cy="594360"/>
           </a:xfrm>
           <a:prstGeom prst="rect">
             <a:avLst/>
@@ -7555,8 +7555,8 @@
         </p:nvSpPr>
         <p:spPr>
           <a:xfrm>
-            <a:off x="4480560" y="4718304"/>
-            <a:ext cx="6705295" cy="640080"/>
+            <a:off x="4480560" y="4581144"/>
+            <a:ext cx="6705295" cy="594360"/>
           </a:xfrm>
           <a:prstGeom prst="rect">
             <a:avLst/>
@@ -7592,6 +7592,73 @@
       <p:sp>
         <p:nvSpPr>
           <p:cNvPr id="21" name="Shape 19"/>
+          <p:cNvSpPr/>
+          <p:nvPr/>
+        </p:nvSpPr>
+        <p:spPr>
+          <a:xfrm>
+            <a:off x="640080" y="5577840"/>
+            <a:ext cx="10911535" cy="7315"/>
+          </a:xfrm>
+          <a:prstGeom prst="rect">
+            <a:avLst/>
+          </a:prstGeom>
+          <a:solidFill>
+            <a:srgbClr val="111111"/>
+          </a:solidFill>
+          <a:ln w="12700">
+            <a:solidFill>
+              <a:srgbClr val="111111"/>
+            </a:solidFill>
+            <a:prstDash val="solid"/>
+          </a:ln>
+        </p:spPr>
+      </p:sp>
+      <p:sp>
+        <p:nvSpPr>
+          <p:cNvPr id="22" name="Text 20"/>
+          <p:cNvSpPr/>
+          <p:nvPr/>
+        </p:nvSpPr>
+        <p:spPr>
+          <a:xfrm>
+            <a:off x="640080" y="5687568"/>
+            <a:ext cx="10911535" cy="402336"/>
+          </a:xfrm>
+          <a:prstGeom prst="rect">
+            <a:avLst/>
+          </a:prstGeom>
+          <a:noFill/>
+          <a:ln/>
+        </p:spPr>
+        <p:txBody>
+          <a:bodyPr wrap="square" lIns="0" tIns="0" rIns="0" bIns="0" rtlCol="0" anchor="t"/>
+          <a:lstStyle/>
+          <a:p>
+            <a:pPr indent="0" marL="0">
+              <a:lnSpc>
+                <a:spcPct val="120000"/>
+              </a:lnSpc>
+              <a:buNone/>
+            </a:pPr>
+            <a:r>
+              <a:rPr lang="en-US" sz="1300" b="1" dirty="0">
+                <a:solidFill>
+                  <a:srgbClr val="111111"/>
+                </a:solidFill>
+                <a:latin typeface="Pretendard" pitchFamily="34" charset="0"/>
+                <a:ea typeface="Pretendard" pitchFamily="34" charset="-122"/>
+                <a:cs typeface="Pretendard" pitchFamily="34" charset="-120"/>
+              </a:rPr>
+              <a:t>오늘 여기까지 하면 과제의 절반이 끝납니다. 검색어가 안 나오면 혼자 고민하지 말고 손을 드세요.</a:t>
+            </a:r>
+            <a:endParaRPr lang="en-US" sz="1300" dirty="0"/>
+          </a:p>
+        </p:txBody>
+      </p:sp>
+      <p:sp>
+        <p:nvSpPr>
+          <p:cNvPr id="23" name="Shape 21"/>
           <p:cNvSpPr/>
           <p:nvPr/>
         </p:nvSpPr>
@@ -7616,7 +7683,7 @@
       </p:sp>
       <p:sp>
         <p:nvSpPr>
-          <p:cNvPr id="22" name="Text 20"/>
+          <p:cNvPr id="24" name="Text 22"/>
           <p:cNvSpPr/>
           <p:nvPr/>
         </p:nvSpPr>
@@ -7655,7 +7722,7 @@
       </p:sp>
       <p:sp>
         <p:nvSpPr>
-          <p:cNvPr id="23" name="Text 21"/>
+          <p:cNvPr id="25" name="Text 23"/>
           <p:cNvSpPr/>
           <p:nvPr/>
         </p:nvSpPr>
@@ -16612,7 +16679,7 @@
         <p:spPr>
           <a:xfrm>
             <a:off x="640080" y="1719072"/>
-            <a:ext cx="10911535" cy="672998"/>
+            <a:ext cx="10911535" cy="592531"/>
           </a:xfrm>
           <a:prstGeom prst="rect">
             <a:avLst/>
@@ -16637,7 +16704,7 @@
         <p:spPr>
           <a:xfrm>
             <a:off x="1097280" y="1810512"/>
-            <a:ext cx="3291840" cy="490118"/>
+            <a:ext cx="3291840" cy="409651"/>
           </a:xfrm>
           <a:prstGeom prst="rect">
             <a:avLst/>
@@ -16676,7 +16743,7 @@
         <p:spPr>
           <a:xfrm>
             <a:off x="4480560" y="1810512"/>
-            <a:ext cx="6705295" cy="490118"/>
+            <a:ext cx="6705295" cy="409651"/>
           </a:xfrm>
           <a:prstGeom prst="rect">
             <a:avLst/>
@@ -16717,8 +16784,8 @@
         </p:nvSpPr>
         <p:spPr>
           <a:xfrm>
-            <a:off x="640080" y="2538374"/>
-            <a:ext cx="10911535" cy="672998"/>
+            <a:off x="640080" y="2457907"/>
+            <a:ext cx="10911535" cy="592531"/>
           </a:xfrm>
           <a:prstGeom prst="rect">
             <a:avLst/>
@@ -16742,8 +16809,8 @@
         </p:nvSpPr>
         <p:spPr>
           <a:xfrm>
-            <a:off x="1097280" y="2629814"/>
-            <a:ext cx="3291840" cy="490118"/>
+            <a:off x="1097280" y="2549347"/>
+            <a:ext cx="3291840" cy="409651"/>
           </a:xfrm>
           <a:prstGeom prst="rect">
             <a:avLst/>
@@ -16781,8 +16848,8 @@
         </p:nvSpPr>
         <p:spPr>
           <a:xfrm>
-            <a:off x="4480560" y="2629814"/>
-            <a:ext cx="6705295" cy="490118"/>
+            <a:off x="4480560" y="2549347"/>
+            <a:ext cx="6705295" cy="409651"/>
           </a:xfrm>
           <a:prstGeom prst="rect">
             <a:avLst/>
@@ -16823,8 +16890,8 @@
         </p:nvSpPr>
         <p:spPr>
           <a:xfrm>
-            <a:off x="640080" y="3357677"/>
-            <a:ext cx="10911535" cy="672998"/>
+            <a:off x="640080" y="3196742"/>
+            <a:ext cx="10911535" cy="592531"/>
           </a:xfrm>
           <a:prstGeom prst="rect">
             <a:avLst/>
@@ -16848,8 +16915,8 @@
         </p:nvSpPr>
         <p:spPr>
           <a:xfrm>
-            <a:off x="1097280" y="3449117"/>
-            <a:ext cx="3291840" cy="490118"/>
+            <a:off x="1097280" y="3288182"/>
+            <a:ext cx="3291840" cy="409651"/>
           </a:xfrm>
           <a:prstGeom prst="rect">
             <a:avLst/>
@@ -16887,8 +16954,8 @@
         </p:nvSpPr>
         <p:spPr>
           <a:xfrm>
-            <a:off x="4480560" y="3449117"/>
-            <a:ext cx="6705295" cy="490118"/>
+            <a:off x="4480560" y="3288182"/>
+            <a:ext cx="6705295" cy="409651"/>
           </a:xfrm>
           <a:prstGeom prst="rect">
             <a:avLst/>
@@ -16929,8 +16996,8 @@
         </p:nvSpPr>
         <p:spPr>
           <a:xfrm>
-            <a:off x="640080" y="4176979"/>
-            <a:ext cx="10911535" cy="672998"/>
+            <a:off x="640080" y="3935578"/>
+            <a:ext cx="10911535" cy="592531"/>
           </a:xfrm>
           <a:prstGeom prst="rect">
             <a:avLst/>
@@ -16954,8 +17021,8 @@
         </p:nvSpPr>
         <p:spPr>
           <a:xfrm>
-            <a:off x="1097280" y="4268419"/>
-            <a:ext cx="3291840" cy="490118"/>
+            <a:off x="1097280" y="4027018"/>
+            <a:ext cx="3291840" cy="409651"/>
           </a:xfrm>
           <a:prstGeom prst="rect">
             <a:avLst/>
@@ -16993,8 +17060,8 @@
         </p:nvSpPr>
         <p:spPr>
           <a:xfrm>
-            <a:off x="4480560" y="4268419"/>
-            <a:ext cx="6705295" cy="490118"/>
+            <a:off x="4480560" y="4027018"/>
+            <a:ext cx="6705295" cy="409651"/>
           </a:xfrm>
           <a:prstGeom prst="rect">
             <a:avLst/>
@@ -17035,8 +17102,8 @@
         </p:nvSpPr>
         <p:spPr>
           <a:xfrm>
-            <a:off x="640080" y="4996282"/>
-            <a:ext cx="10911535" cy="672998"/>
+            <a:off x="640080" y="4674413"/>
+            <a:ext cx="10911535" cy="592531"/>
           </a:xfrm>
           <a:prstGeom prst="rect">
             <a:avLst/>
@@ -17060,8 +17127,8 @@
         </p:nvSpPr>
         <p:spPr>
           <a:xfrm>
-            <a:off x="1097280" y="5087722"/>
-            <a:ext cx="3291840" cy="490118"/>
+            <a:off x="1097280" y="4765853"/>
+            <a:ext cx="3291840" cy="409651"/>
           </a:xfrm>
           <a:prstGeom prst="rect">
             <a:avLst/>
@@ -17099,8 +17166,8 @@
         </p:nvSpPr>
         <p:spPr>
           <a:xfrm>
-            <a:off x="4480560" y="5087722"/>
-            <a:ext cx="6705295" cy="490118"/>
+            <a:off x="4480560" y="4765853"/>
+            <a:ext cx="6705295" cy="409651"/>
           </a:xfrm>
           <a:prstGeom prst="rect">
             <a:avLst/>
@@ -17136,6 +17203,73 @@
       <p:sp>
         <p:nvSpPr>
           <p:cNvPr id="24" name="Shape 22"/>
+          <p:cNvSpPr/>
+          <p:nvPr/>
+        </p:nvSpPr>
+        <p:spPr>
+          <a:xfrm>
+            <a:off x="640080" y="5577840"/>
+            <a:ext cx="10911535" cy="7315"/>
+          </a:xfrm>
+          <a:prstGeom prst="rect">
+            <a:avLst/>
+          </a:prstGeom>
+          <a:solidFill>
+            <a:srgbClr val="111111"/>
+          </a:solidFill>
+          <a:ln w="12700">
+            <a:solidFill>
+              <a:srgbClr val="111111"/>
+            </a:solidFill>
+            <a:prstDash val="solid"/>
+          </a:ln>
+        </p:spPr>
+      </p:sp>
+      <p:sp>
+        <p:nvSpPr>
+          <p:cNvPr id="25" name="Text 23"/>
+          <p:cNvSpPr/>
+          <p:nvPr/>
+        </p:nvSpPr>
+        <p:spPr>
+          <a:xfrm>
+            <a:off x="640080" y="5687568"/>
+            <a:ext cx="10911535" cy="402336"/>
+          </a:xfrm>
+          <a:prstGeom prst="rect">
+            <a:avLst/>
+          </a:prstGeom>
+          <a:noFill/>
+          <a:ln/>
+        </p:spPr>
+        <p:txBody>
+          <a:bodyPr wrap="square" lIns="0" tIns="0" rIns="0" bIns="0" rtlCol="0" anchor="t"/>
+          <a:lstStyle/>
+          <a:p>
+            <a:pPr indent="0" marL="0">
+              <a:lnSpc>
+                <a:spcPct val="120000"/>
+              </a:lnSpc>
+              <a:buNone/>
+            </a:pPr>
+            <a:r>
+              <a:rPr lang="en-US" sz="1300" b="1" dirty="0">
+                <a:solidFill>
+                  <a:srgbClr val="111111"/>
+                </a:solidFill>
+                <a:latin typeface="Pretendard" pitchFamily="34" charset="0"/>
+                <a:ea typeface="Pretendard" pitchFamily="34" charset="-122"/>
+                <a:cs typeface="Pretendard" pitchFamily="34" charset="-120"/>
+              </a:rPr>
+              <a:t>2번에서 대부분 막힙니다. 한국어 주제어를 그대로 옮기지 말고, 그 분야가 쓰는 말을 빌려 오세요.</a:t>
+            </a:r>
+            <a:endParaRPr lang="en-US" sz="1300" dirty="0"/>
+          </a:p>
+        </p:txBody>
+      </p:sp>
+      <p:sp>
+        <p:nvSpPr>
+          <p:cNvPr id="26" name="Shape 24"/>
           <p:cNvSpPr/>
           <p:nvPr/>
         </p:nvSpPr>
@@ -17160,7 +17294,7 @@
       </p:sp>
       <p:sp>
         <p:nvSpPr>
-          <p:cNvPr id="25" name="Text 23"/>
+          <p:cNvPr id="27" name="Text 25"/>
           <p:cNvSpPr/>
           <p:nvPr/>
         </p:nvSpPr>
@@ -17199,7 +17333,7 @@
       </p:sp>
       <p:sp>
         <p:nvSpPr>
-          <p:cNvPr id="26" name="Text 24"/>
+          <p:cNvPr id="28" name="Text 26"/>
           <p:cNvSpPr/>
           <p:nvPr/>
         </p:nvSpPr>

--- a/dist/weeks-대학원/컨셉트와프로세스_02주차_선행연구.pptx
+++ b/dist/weeks-대학원/컨셉트와프로세스_02주차_선행연구.pptx
@@ -14869,7 +14869,7 @@
             <a:r>
               <a:rPr lang="en-US" sz="1700" dirty="0">
                 <a:solidFill>
-                  <a:srgbClr val="111111"/>
+                  <a:srgbClr val="9B9B9B"/>
                 </a:solidFill>
                 <a:latin typeface="Pretendard SemiBold" pitchFamily="34" charset="0"/>
                 <a:ea typeface="Pretendard SemiBold" pitchFamily="34" charset="-122"/>
@@ -14897,6 +14897,257 @@
           </a:prstGeom>
           <a:solidFill>
             <a:srgbClr val="FFFFFF"/>
+          </a:solidFill>
+          <a:ln w="12700">
+            <a:solidFill>
+              <a:srgbClr val="111111"/>
+            </a:solidFill>
+            <a:prstDash val="solid"/>
+          </a:ln>
+        </p:spPr>
+      </p:sp>
+      <p:sp>
+        <p:nvSpPr>
+          <p:cNvPr id="12" name="Shape 10"/>
+          <p:cNvSpPr/>
+          <p:nvPr/>
+        </p:nvSpPr>
+        <p:spPr>
+          <a:xfrm>
+            <a:off x="6297016" y="1627632"/>
+            <a:ext cx="5254600" cy="64008"/>
+          </a:xfrm>
+          <a:prstGeom prst="rect">
+            <a:avLst/>
+          </a:prstGeom>
+          <a:solidFill>
+            <a:srgbClr val="111111"/>
+          </a:solidFill>
+          <a:ln w="12700">
+            <a:solidFill>
+              <a:srgbClr val="111111"/>
+            </a:solidFill>
+            <a:prstDash val="solid"/>
+          </a:ln>
+        </p:spPr>
+      </p:sp>
+      <p:sp>
+        <p:nvSpPr>
+          <p:cNvPr id="13" name="Text 11"/>
+          <p:cNvSpPr/>
+          <p:nvPr/>
+        </p:nvSpPr>
+        <p:spPr>
+          <a:xfrm>
+            <a:off x="6699352" y="1901952"/>
+            <a:ext cx="4449928" cy="365760"/>
+          </a:xfrm>
+          <a:prstGeom prst="rect">
+            <a:avLst/>
+          </a:prstGeom>
+          <a:noFill/>
+          <a:ln/>
+        </p:spPr>
+        <p:txBody>
+          <a:bodyPr wrap="square" lIns="0" tIns="0" rIns="0" bIns="0" rtlCol="0" anchor="ctr"/>
+          <a:lstStyle/>
+          <a:p>
+            <a:pPr indent="0" marL="0">
+              <a:buNone/>
+            </a:pPr>
+            <a:r>
+              <a:rPr lang="en-US" sz="1700" dirty="0">
+                <a:solidFill>
+                  <a:srgbClr val="111111"/>
+                </a:solidFill>
+                <a:latin typeface="Pretendard SemiBold" pitchFamily="34" charset="0"/>
+                <a:ea typeface="Pretendard SemiBold" pitchFamily="34" charset="-122"/>
+                <a:cs typeface="Pretendard SemiBold" pitchFamily="34" charset="-120"/>
+              </a:rPr>
+              <a:t>선행연구가 있는 글</a:t>
+            </a:r>
+            <a:endParaRPr lang="en-US" sz="1700" dirty="0"/>
+          </a:p>
+        </p:txBody>
+      </p:sp>
+      <p:sp>
+        <p:nvSpPr>
+          <p:cNvPr id="14" name="Text 12"/>
+          <p:cNvSpPr/>
+          <p:nvPr/>
+        </p:nvSpPr>
+        <p:spPr>
+          <a:xfrm>
+            <a:off x="1042416" y="2450592"/>
+            <a:ext cx="2011680" cy="274320"/>
+          </a:xfrm>
+          <a:prstGeom prst="rect">
+            <a:avLst/>
+          </a:prstGeom>
+          <a:noFill/>
+          <a:ln/>
+        </p:spPr>
+        <p:txBody>
+          <a:bodyPr wrap="square" lIns="0" tIns="0" rIns="0" bIns="0" rtlCol="0" anchor="ctr"/>
+          <a:lstStyle/>
+          <a:p>
+            <a:pPr indent="0" marL="0">
+              <a:buNone/>
+            </a:pPr>
+            <a:r>
+              <a:rPr lang="en-US" sz="900" b="1" spc="160" kern="0" dirty="0">
+                <a:solidFill>
+                  <a:srgbClr val="9B9B9B"/>
+                </a:solidFill>
+                <a:latin typeface="Pretendard" pitchFamily="34" charset="0"/>
+                <a:ea typeface="Pretendard" pitchFamily="34" charset="-122"/>
+                <a:cs typeface="Pretendard" pitchFamily="34" charset="-120"/>
+              </a:rPr>
+              <a:t>문제</a:t>
+            </a:r>
+            <a:endParaRPr lang="en-US" sz="900" dirty="0"/>
+          </a:p>
+        </p:txBody>
+      </p:sp>
+      <p:sp>
+        <p:nvSpPr>
+          <p:cNvPr id="15" name="Text 13"/>
+          <p:cNvSpPr/>
+          <p:nvPr/>
+        </p:nvSpPr>
+        <p:spPr>
+          <a:xfrm>
+            <a:off x="1042416" y="2688336"/>
+            <a:ext cx="4449928" cy="329184"/>
+          </a:xfrm>
+          <a:prstGeom prst="rect">
+            <a:avLst/>
+          </a:prstGeom>
+          <a:noFill/>
+          <a:ln/>
+        </p:spPr>
+        <p:txBody>
+          <a:bodyPr wrap="square" lIns="0" tIns="0" rIns="0" bIns="0" rtlCol="0" anchor="t"/>
+          <a:lstStyle/>
+          <a:p>
+            <a:pPr indent="0" marL="0">
+              <a:lnSpc>
+                <a:spcPct val="120000"/>
+              </a:lnSpc>
+              <a:buNone/>
+            </a:pPr>
+            <a:r>
+              <a:rPr lang="en-US" sz="1150" dirty="0">
+                <a:solidFill>
+                  <a:srgbClr val="6E6E6E"/>
+                </a:solidFill>
+                <a:latin typeface="Pretendard" pitchFamily="34" charset="0"/>
+                <a:ea typeface="Pretendard" pitchFamily="34" charset="-122"/>
+                <a:cs typeface="Pretendard" pitchFamily="34" charset="-120"/>
+              </a:rPr>
+              <a:t>이 문제가 중요하다고 말한다</a:t>
+            </a:r>
+            <a:endParaRPr lang="en-US" sz="1150" dirty="0"/>
+          </a:p>
+        </p:txBody>
+      </p:sp>
+      <p:sp>
+        <p:nvSpPr>
+          <p:cNvPr id="16" name="Text 14"/>
+          <p:cNvSpPr/>
+          <p:nvPr/>
+        </p:nvSpPr>
+        <p:spPr>
+          <a:xfrm>
+            <a:off x="6699352" y="2450592"/>
+            <a:ext cx="2011680" cy="274320"/>
+          </a:xfrm>
+          <a:prstGeom prst="rect">
+            <a:avLst/>
+          </a:prstGeom>
+          <a:noFill/>
+          <a:ln/>
+        </p:spPr>
+        <p:txBody>
+          <a:bodyPr wrap="square" lIns="0" tIns="0" rIns="0" bIns="0" rtlCol="0" anchor="ctr"/>
+          <a:lstStyle/>
+          <a:p>
+            <a:pPr indent="0" marL="0">
+              <a:buNone/>
+            </a:pPr>
+            <a:r>
+              <a:rPr lang="en-US" sz="900" b="1" spc="160" kern="0" dirty="0">
+                <a:solidFill>
+                  <a:srgbClr val="111111"/>
+                </a:solidFill>
+                <a:latin typeface="Pretendard" pitchFamily="34" charset="0"/>
+                <a:ea typeface="Pretendard" pitchFamily="34" charset="-122"/>
+                <a:cs typeface="Pretendard" pitchFamily="34" charset="-120"/>
+              </a:rPr>
+              <a:t>문제</a:t>
+            </a:r>
+            <a:endParaRPr lang="en-US" sz="900" dirty="0"/>
+          </a:p>
+        </p:txBody>
+      </p:sp>
+      <p:sp>
+        <p:nvSpPr>
+          <p:cNvPr id="17" name="Text 15"/>
+          <p:cNvSpPr/>
+          <p:nvPr/>
+        </p:nvSpPr>
+        <p:spPr>
+          <a:xfrm>
+            <a:off x="6699352" y="2688336"/>
+            <a:ext cx="4449928" cy="329184"/>
+          </a:xfrm>
+          <a:prstGeom prst="rect">
+            <a:avLst/>
+          </a:prstGeom>
+          <a:noFill/>
+          <a:ln/>
+        </p:spPr>
+        <p:txBody>
+          <a:bodyPr wrap="square" lIns="0" tIns="0" rIns="0" bIns="0" rtlCol="0" anchor="t"/>
+          <a:lstStyle/>
+          <a:p>
+            <a:pPr indent="0" marL="0">
+              <a:lnSpc>
+                <a:spcPct val="120000"/>
+              </a:lnSpc>
+              <a:buNone/>
+            </a:pPr>
+            <a:r>
+              <a:rPr lang="en-US" sz="1150" b="1" dirty="0">
+                <a:solidFill>
+                  <a:srgbClr val="1F1F1F"/>
+                </a:solidFill>
+                <a:latin typeface="Pretendard" pitchFamily="34" charset="0"/>
+                <a:ea typeface="Pretendard" pitchFamily="34" charset="-122"/>
+                <a:cs typeface="Pretendard" pitchFamily="34" charset="-120"/>
+              </a:rPr>
+              <a:t>누가 어디까지 다뤘고 무엇이 남았는지 말한다</a:t>
+            </a:r>
+            <a:endParaRPr lang="en-US" sz="1150" dirty="0"/>
+          </a:p>
+        </p:txBody>
+      </p:sp>
+      <p:sp>
+        <p:nvSpPr>
+          <p:cNvPr id="18" name="Shape 16"/>
+          <p:cNvSpPr/>
+          <p:nvPr/>
+        </p:nvSpPr>
+        <p:spPr>
+          <a:xfrm>
+            <a:off x="1042416" y="2980944"/>
+            <a:ext cx="4449928" cy="7315"/>
+          </a:xfrm>
+          <a:prstGeom prst="rect">
+            <a:avLst/>
+          </a:prstGeom>
+          <a:solidFill>
+            <a:srgbClr val="DCDCDC"/>
           </a:solidFill>
           <a:ln w="12700">
             <a:solidFill>
@@ -14908,214 +15159,13 @@
       </p:sp>
       <p:sp>
         <p:nvSpPr>
-          <p:cNvPr id="12" name="Text 10"/>
-          <p:cNvSpPr/>
-          <p:nvPr/>
-        </p:nvSpPr>
-        <p:spPr>
-          <a:xfrm>
-            <a:off x="6699352" y="1901952"/>
-            <a:ext cx="4449928" cy="365760"/>
-          </a:xfrm>
-          <a:prstGeom prst="rect">
-            <a:avLst/>
-          </a:prstGeom>
-          <a:noFill/>
-          <a:ln/>
-        </p:spPr>
-        <p:txBody>
-          <a:bodyPr wrap="square" lIns="0" tIns="0" rIns="0" bIns="0" rtlCol="0" anchor="ctr"/>
-          <a:lstStyle/>
-          <a:p>
-            <a:pPr indent="0" marL="0">
-              <a:buNone/>
-            </a:pPr>
-            <a:r>
-              <a:rPr lang="en-US" sz="1700" dirty="0">
-                <a:solidFill>
-                  <a:srgbClr val="9B9B9B"/>
-                </a:solidFill>
-                <a:latin typeface="Pretendard SemiBold" pitchFamily="34" charset="0"/>
-                <a:ea typeface="Pretendard SemiBold" pitchFamily="34" charset="-122"/>
-                <a:cs typeface="Pretendard SemiBold" pitchFamily="34" charset="-120"/>
-              </a:rPr>
-              <a:t>선행연구가 있는 글</a:t>
-            </a:r>
-            <a:endParaRPr lang="en-US" sz="1700" dirty="0"/>
-          </a:p>
-        </p:txBody>
-      </p:sp>
-      <p:sp>
-        <p:nvSpPr>
-          <p:cNvPr id="13" name="Text 11"/>
-          <p:cNvSpPr/>
-          <p:nvPr/>
-        </p:nvSpPr>
-        <p:spPr>
-          <a:xfrm>
-            <a:off x="1042416" y="2450592"/>
-            <a:ext cx="2011680" cy="274320"/>
-          </a:xfrm>
-          <a:prstGeom prst="rect">
-            <a:avLst/>
-          </a:prstGeom>
-          <a:noFill/>
-          <a:ln/>
-        </p:spPr>
-        <p:txBody>
-          <a:bodyPr wrap="square" lIns="0" tIns="0" rIns="0" bIns="0" rtlCol="0" anchor="ctr"/>
-          <a:lstStyle/>
-          <a:p>
-            <a:pPr indent="0" marL="0">
-              <a:buNone/>
-            </a:pPr>
-            <a:r>
-              <a:rPr lang="en-US" sz="900" b="1" spc="160" kern="0" dirty="0">
-                <a:solidFill>
-                  <a:srgbClr val="111111"/>
-                </a:solidFill>
-                <a:latin typeface="Pretendard" pitchFamily="34" charset="0"/>
-                <a:ea typeface="Pretendard" pitchFamily="34" charset="-122"/>
-                <a:cs typeface="Pretendard" pitchFamily="34" charset="-120"/>
-              </a:rPr>
-              <a:t>문제</a:t>
-            </a:r>
-            <a:endParaRPr lang="en-US" sz="900" dirty="0"/>
-          </a:p>
-        </p:txBody>
-      </p:sp>
-      <p:sp>
-        <p:nvSpPr>
-          <p:cNvPr id="14" name="Text 12"/>
-          <p:cNvSpPr/>
-          <p:nvPr/>
-        </p:nvSpPr>
-        <p:spPr>
-          <a:xfrm>
-            <a:off x="1042416" y="2688336"/>
-            <a:ext cx="4449928" cy="329184"/>
-          </a:xfrm>
-          <a:prstGeom prst="rect">
-            <a:avLst/>
-          </a:prstGeom>
-          <a:noFill/>
-          <a:ln/>
-        </p:spPr>
-        <p:txBody>
-          <a:bodyPr wrap="square" lIns="0" tIns="0" rIns="0" bIns="0" rtlCol="0" anchor="t"/>
-          <a:lstStyle/>
-          <a:p>
-            <a:pPr indent="0" marL="0">
-              <a:lnSpc>
-                <a:spcPct val="120000"/>
-              </a:lnSpc>
-              <a:buNone/>
-            </a:pPr>
-            <a:r>
-              <a:rPr lang="en-US" sz="1150" dirty="0">
-                <a:solidFill>
-                  <a:srgbClr val="1F1F1F"/>
-                </a:solidFill>
-                <a:latin typeface="Pretendard" pitchFamily="34" charset="0"/>
-                <a:ea typeface="Pretendard" pitchFamily="34" charset="-122"/>
-                <a:cs typeface="Pretendard" pitchFamily="34" charset="-120"/>
-              </a:rPr>
-              <a:t>이 문제가 중요하다고 말한다</a:t>
-            </a:r>
-            <a:endParaRPr lang="en-US" sz="1150" dirty="0"/>
-          </a:p>
-        </p:txBody>
-      </p:sp>
-      <p:sp>
-        <p:nvSpPr>
-          <p:cNvPr id="15" name="Text 13"/>
-          <p:cNvSpPr/>
-          <p:nvPr/>
-        </p:nvSpPr>
-        <p:spPr>
-          <a:xfrm>
-            <a:off x="6699352" y="2450592"/>
-            <a:ext cx="2011680" cy="274320"/>
-          </a:xfrm>
-          <a:prstGeom prst="rect">
-            <a:avLst/>
-          </a:prstGeom>
-          <a:noFill/>
-          <a:ln/>
-        </p:spPr>
-        <p:txBody>
-          <a:bodyPr wrap="square" lIns="0" tIns="0" rIns="0" bIns="0" rtlCol="0" anchor="ctr"/>
-          <a:lstStyle/>
-          <a:p>
-            <a:pPr indent="0" marL="0">
-              <a:buNone/>
-            </a:pPr>
-            <a:r>
-              <a:rPr lang="en-US" sz="900" b="1" spc="160" kern="0" dirty="0">
-                <a:solidFill>
-                  <a:srgbClr val="9B9B9B"/>
-                </a:solidFill>
-                <a:latin typeface="Pretendard" pitchFamily="34" charset="0"/>
-                <a:ea typeface="Pretendard" pitchFamily="34" charset="-122"/>
-                <a:cs typeface="Pretendard" pitchFamily="34" charset="-120"/>
-              </a:rPr>
-              <a:t>문제</a:t>
-            </a:r>
-            <a:endParaRPr lang="en-US" sz="900" dirty="0"/>
-          </a:p>
-        </p:txBody>
-      </p:sp>
-      <p:sp>
-        <p:nvSpPr>
-          <p:cNvPr id="16" name="Text 14"/>
-          <p:cNvSpPr/>
-          <p:nvPr/>
-        </p:nvSpPr>
-        <p:spPr>
-          <a:xfrm>
-            <a:off x="6699352" y="2688336"/>
-            <a:ext cx="4449928" cy="329184"/>
-          </a:xfrm>
-          <a:prstGeom prst="rect">
-            <a:avLst/>
-          </a:prstGeom>
-          <a:noFill/>
-          <a:ln/>
-        </p:spPr>
-        <p:txBody>
-          <a:bodyPr wrap="square" lIns="0" tIns="0" rIns="0" bIns="0" rtlCol="0" anchor="t"/>
-          <a:lstStyle/>
-          <a:p>
-            <a:pPr indent="0" marL="0">
-              <a:lnSpc>
-                <a:spcPct val="120000"/>
-              </a:lnSpc>
-              <a:buNone/>
-            </a:pPr>
-            <a:r>
-              <a:rPr lang="en-US" sz="1150" dirty="0">
-                <a:solidFill>
-                  <a:srgbClr val="6E6E6E"/>
-                </a:solidFill>
-                <a:latin typeface="Pretendard" pitchFamily="34" charset="0"/>
-                <a:ea typeface="Pretendard" pitchFamily="34" charset="-122"/>
-                <a:cs typeface="Pretendard" pitchFamily="34" charset="-120"/>
-              </a:rPr>
-              <a:t>누가 어디까지 다뤘고 무엇이 남았는지 말한다</a:t>
-            </a:r>
-            <a:endParaRPr lang="en-US" sz="1150" dirty="0"/>
-          </a:p>
-        </p:txBody>
-      </p:sp>
-      <p:sp>
-        <p:nvSpPr>
-          <p:cNvPr id="17" name="Shape 15"/>
-          <p:cNvSpPr/>
-          <p:nvPr/>
-        </p:nvSpPr>
-        <p:spPr>
-          <a:xfrm>
-            <a:off x="1042416" y="2980944"/>
+          <p:cNvPr id="19" name="Shape 17"/>
+          <p:cNvSpPr/>
+          <p:nvPr/>
+        </p:nvSpPr>
+        <p:spPr>
+          <a:xfrm>
+            <a:off x="6699352" y="2980944"/>
             <a:ext cx="4449928" cy="7315"/>
           </a:xfrm>
           <a:prstGeom prst="rect">
@@ -15134,13 +15184,175 @@
       </p:sp>
       <p:sp>
         <p:nvSpPr>
-          <p:cNvPr id="18" name="Shape 16"/>
-          <p:cNvSpPr/>
-          <p:nvPr/>
-        </p:nvSpPr>
-        <p:spPr>
-          <a:xfrm>
-            <a:off x="6699352" y="2980944"/>
+          <p:cNvPr id="20" name="Text 18"/>
+          <p:cNvSpPr/>
+          <p:nvPr/>
+        </p:nvSpPr>
+        <p:spPr>
+          <a:xfrm>
+            <a:off x="1042416" y="3035808"/>
+            <a:ext cx="2011680" cy="274320"/>
+          </a:xfrm>
+          <a:prstGeom prst="rect">
+            <a:avLst/>
+          </a:prstGeom>
+          <a:noFill/>
+          <a:ln/>
+        </p:spPr>
+        <p:txBody>
+          <a:bodyPr wrap="square" lIns="0" tIns="0" rIns="0" bIns="0" rtlCol="0" anchor="ctr"/>
+          <a:lstStyle/>
+          <a:p>
+            <a:pPr indent="0" marL="0">
+              <a:buNone/>
+            </a:pPr>
+            <a:r>
+              <a:rPr lang="en-US" sz="900" b="1" spc="160" kern="0" dirty="0">
+                <a:solidFill>
+                  <a:srgbClr val="9B9B9B"/>
+                </a:solidFill>
+                <a:latin typeface="Pretendard" pitchFamily="34" charset="0"/>
+                <a:ea typeface="Pretendard" pitchFamily="34" charset="-122"/>
+                <a:cs typeface="Pretendard" pitchFamily="34" charset="-120"/>
+              </a:rPr>
+              <a:t>방법</a:t>
+            </a:r>
+            <a:endParaRPr lang="en-US" sz="900" dirty="0"/>
+          </a:p>
+        </p:txBody>
+      </p:sp>
+      <p:sp>
+        <p:nvSpPr>
+          <p:cNvPr id="21" name="Text 19"/>
+          <p:cNvSpPr/>
+          <p:nvPr/>
+        </p:nvSpPr>
+        <p:spPr>
+          <a:xfrm>
+            <a:off x="1042416" y="3273552"/>
+            <a:ext cx="4449928" cy="329184"/>
+          </a:xfrm>
+          <a:prstGeom prst="rect">
+            <a:avLst/>
+          </a:prstGeom>
+          <a:noFill/>
+          <a:ln/>
+        </p:spPr>
+        <p:txBody>
+          <a:bodyPr wrap="square" lIns="0" tIns="0" rIns="0" bIns="0" rtlCol="0" anchor="t"/>
+          <a:lstStyle/>
+          <a:p>
+            <a:pPr indent="0" marL="0">
+              <a:lnSpc>
+                <a:spcPct val="120000"/>
+              </a:lnSpc>
+              <a:buNone/>
+            </a:pPr>
+            <a:r>
+              <a:rPr lang="en-US" sz="1150" dirty="0">
+                <a:solidFill>
+                  <a:srgbClr val="6E6E6E"/>
+                </a:solidFill>
+                <a:latin typeface="Pretendard" pitchFamily="34" charset="0"/>
+                <a:ea typeface="Pretendard" pitchFamily="34" charset="-122"/>
+                <a:cs typeface="Pretendard" pitchFamily="34" charset="-120"/>
+              </a:rPr>
+              <a:t>인터뷰와 설문을 하겠다고 쓴다</a:t>
+            </a:r>
+            <a:endParaRPr lang="en-US" sz="1150" dirty="0"/>
+          </a:p>
+        </p:txBody>
+      </p:sp>
+      <p:sp>
+        <p:nvSpPr>
+          <p:cNvPr id="22" name="Text 20"/>
+          <p:cNvSpPr/>
+          <p:nvPr/>
+        </p:nvSpPr>
+        <p:spPr>
+          <a:xfrm>
+            <a:off x="6699352" y="3035808"/>
+            <a:ext cx="2011680" cy="274320"/>
+          </a:xfrm>
+          <a:prstGeom prst="rect">
+            <a:avLst/>
+          </a:prstGeom>
+          <a:noFill/>
+          <a:ln/>
+        </p:spPr>
+        <p:txBody>
+          <a:bodyPr wrap="square" lIns="0" tIns="0" rIns="0" bIns="0" rtlCol="0" anchor="ctr"/>
+          <a:lstStyle/>
+          <a:p>
+            <a:pPr indent="0" marL="0">
+              <a:buNone/>
+            </a:pPr>
+            <a:r>
+              <a:rPr lang="en-US" sz="900" b="1" spc="160" kern="0" dirty="0">
+                <a:solidFill>
+                  <a:srgbClr val="111111"/>
+                </a:solidFill>
+                <a:latin typeface="Pretendard" pitchFamily="34" charset="0"/>
+                <a:ea typeface="Pretendard" pitchFamily="34" charset="-122"/>
+                <a:cs typeface="Pretendard" pitchFamily="34" charset="-120"/>
+              </a:rPr>
+              <a:t>방법</a:t>
+            </a:r>
+            <a:endParaRPr lang="en-US" sz="900" dirty="0"/>
+          </a:p>
+        </p:txBody>
+      </p:sp>
+      <p:sp>
+        <p:nvSpPr>
+          <p:cNvPr id="23" name="Text 21"/>
+          <p:cNvSpPr/>
+          <p:nvPr/>
+        </p:nvSpPr>
+        <p:spPr>
+          <a:xfrm>
+            <a:off x="6699352" y="3273552"/>
+            <a:ext cx="4449928" cy="329184"/>
+          </a:xfrm>
+          <a:prstGeom prst="rect">
+            <a:avLst/>
+          </a:prstGeom>
+          <a:noFill/>
+          <a:ln/>
+        </p:spPr>
+        <p:txBody>
+          <a:bodyPr wrap="square" lIns="0" tIns="0" rIns="0" bIns="0" rtlCol="0" anchor="t"/>
+          <a:lstStyle/>
+          <a:p>
+            <a:pPr indent="0" marL="0">
+              <a:lnSpc>
+                <a:spcPct val="120000"/>
+              </a:lnSpc>
+              <a:buNone/>
+            </a:pPr>
+            <a:r>
+              <a:rPr lang="en-US" sz="1150" b="1" dirty="0">
+                <a:solidFill>
+                  <a:srgbClr val="1F1F1F"/>
+                </a:solidFill>
+                <a:latin typeface="Pretendard" pitchFamily="34" charset="0"/>
+                <a:ea typeface="Pretendard" pitchFamily="34" charset="-122"/>
+                <a:cs typeface="Pretendard" pitchFamily="34" charset="-120"/>
+              </a:rPr>
+              <a:t>누구의 방법을 왜 고쳐 쓰는지 밝힌다</a:t>
+            </a:r>
+            <a:endParaRPr lang="en-US" sz="1150" dirty="0"/>
+          </a:p>
+        </p:txBody>
+      </p:sp>
+      <p:sp>
+        <p:nvSpPr>
+          <p:cNvPr id="24" name="Shape 22"/>
+          <p:cNvSpPr/>
+          <p:nvPr/>
+        </p:nvSpPr>
+        <p:spPr>
+          <a:xfrm>
+            <a:off x="1042416" y="3566160"/>
             <a:ext cx="4449928" cy="7315"/>
           </a:xfrm>
           <a:prstGeom prst="rect">
@@ -15159,175 +15371,13 @@
       </p:sp>
       <p:sp>
         <p:nvSpPr>
-          <p:cNvPr id="19" name="Text 17"/>
-          <p:cNvSpPr/>
-          <p:nvPr/>
-        </p:nvSpPr>
-        <p:spPr>
-          <a:xfrm>
-            <a:off x="1042416" y="3035808"/>
-            <a:ext cx="2011680" cy="274320"/>
-          </a:xfrm>
-          <a:prstGeom prst="rect">
-            <a:avLst/>
-          </a:prstGeom>
-          <a:noFill/>
-          <a:ln/>
-        </p:spPr>
-        <p:txBody>
-          <a:bodyPr wrap="square" lIns="0" tIns="0" rIns="0" bIns="0" rtlCol="0" anchor="ctr"/>
-          <a:lstStyle/>
-          <a:p>
-            <a:pPr indent="0" marL="0">
-              <a:buNone/>
-            </a:pPr>
-            <a:r>
-              <a:rPr lang="en-US" sz="900" b="1" spc="160" kern="0" dirty="0">
-                <a:solidFill>
-                  <a:srgbClr val="111111"/>
-                </a:solidFill>
-                <a:latin typeface="Pretendard" pitchFamily="34" charset="0"/>
-                <a:ea typeface="Pretendard" pitchFamily="34" charset="-122"/>
-                <a:cs typeface="Pretendard" pitchFamily="34" charset="-120"/>
-              </a:rPr>
-              <a:t>방법</a:t>
-            </a:r>
-            <a:endParaRPr lang="en-US" sz="900" dirty="0"/>
-          </a:p>
-        </p:txBody>
-      </p:sp>
-      <p:sp>
-        <p:nvSpPr>
-          <p:cNvPr id="20" name="Text 18"/>
-          <p:cNvSpPr/>
-          <p:nvPr/>
-        </p:nvSpPr>
-        <p:spPr>
-          <a:xfrm>
-            <a:off x="1042416" y="3273552"/>
-            <a:ext cx="4449928" cy="329184"/>
-          </a:xfrm>
-          <a:prstGeom prst="rect">
-            <a:avLst/>
-          </a:prstGeom>
-          <a:noFill/>
-          <a:ln/>
-        </p:spPr>
-        <p:txBody>
-          <a:bodyPr wrap="square" lIns="0" tIns="0" rIns="0" bIns="0" rtlCol="0" anchor="t"/>
-          <a:lstStyle/>
-          <a:p>
-            <a:pPr indent="0" marL="0">
-              <a:lnSpc>
-                <a:spcPct val="120000"/>
-              </a:lnSpc>
-              <a:buNone/>
-            </a:pPr>
-            <a:r>
-              <a:rPr lang="en-US" sz="1150" dirty="0">
-                <a:solidFill>
-                  <a:srgbClr val="1F1F1F"/>
-                </a:solidFill>
-                <a:latin typeface="Pretendard" pitchFamily="34" charset="0"/>
-                <a:ea typeface="Pretendard" pitchFamily="34" charset="-122"/>
-                <a:cs typeface="Pretendard" pitchFamily="34" charset="-120"/>
-              </a:rPr>
-              <a:t>인터뷰와 설문을 하겠다고 쓴다</a:t>
-            </a:r>
-            <a:endParaRPr lang="en-US" sz="1150" dirty="0"/>
-          </a:p>
-        </p:txBody>
-      </p:sp>
-      <p:sp>
-        <p:nvSpPr>
-          <p:cNvPr id="21" name="Text 19"/>
-          <p:cNvSpPr/>
-          <p:nvPr/>
-        </p:nvSpPr>
-        <p:spPr>
-          <a:xfrm>
-            <a:off x="6699352" y="3035808"/>
-            <a:ext cx="2011680" cy="274320"/>
-          </a:xfrm>
-          <a:prstGeom prst="rect">
-            <a:avLst/>
-          </a:prstGeom>
-          <a:noFill/>
-          <a:ln/>
-        </p:spPr>
-        <p:txBody>
-          <a:bodyPr wrap="square" lIns="0" tIns="0" rIns="0" bIns="0" rtlCol="0" anchor="ctr"/>
-          <a:lstStyle/>
-          <a:p>
-            <a:pPr indent="0" marL="0">
-              <a:buNone/>
-            </a:pPr>
-            <a:r>
-              <a:rPr lang="en-US" sz="900" b="1" spc="160" kern="0" dirty="0">
-                <a:solidFill>
-                  <a:srgbClr val="9B9B9B"/>
-                </a:solidFill>
-                <a:latin typeface="Pretendard" pitchFamily="34" charset="0"/>
-                <a:ea typeface="Pretendard" pitchFamily="34" charset="-122"/>
-                <a:cs typeface="Pretendard" pitchFamily="34" charset="-120"/>
-              </a:rPr>
-              <a:t>방법</a:t>
-            </a:r>
-            <a:endParaRPr lang="en-US" sz="900" dirty="0"/>
-          </a:p>
-        </p:txBody>
-      </p:sp>
-      <p:sp>
-        <p:nvSpPr>
-          <p:cNvPr id="22" name="Text 20"/>
-          <p:cNvSpPr/>
-          <p:nvPr/>
-        </p:nvSpPr>
-        <p:spPr>
-          <a:xfrm>
-            <a:off x="6699352" y="3273552"/>
-            <a:ext cx="4449928" cy="329184"/>
-          </a:xfrm>
-          <a:prstGeom prst="rect">
-            <a:avLst/>
-          </a:prstGeom>
-          <a:noFill/>
-          <a:ln/>
-        </p:spPr>
-        <p:txBody>
-          <a:bodyPr wrap="square" lIns="0" tIns="0" rIns="0" bIns="0" rtlCol="0" anchor="t"/>
-          <a:lstStyle/>
-          <a:p>
-            <a:pPr indent="0" marL="0">
-              <a:lnSpc>
-                <a:spcPct val="120000"/>
-              </a:lnSpc>
-              <a:buNone/>
-            </a:pPr>
-            <a:r>
-              <a:rPr lang="en-US" sz="1150" dirty="0">
-                <a:solidFill>
-                  <a:srgbClr val="6E6E6E"/>
-                </a:solidFill>
-                <a:latin typeface="Pretendard" pitchFamily="34" charset="0"/>
-                <a:ea typeface="Pretendard" pitchFamily="34" charset="-122"/>
-                <a:cs typeface="Pretendard" pitchFamily="34" charset="-120"/>
-              </a:rPr>
-              <a:t>누구의 방법을 왜 고쳐 쓰는지 밝힌다</a:t>
-            </a:r>
-            <a:endParaRPr lang="en-US" sz="1150" dirty="0"/>
-          </a:p>
-        </p:txBody>
-      </p:sp>
-      <p:sp>
-        <p:nvSpPr>
-          <p:cNvPr id="23" name="Shape 21"/>
-          <p:cNvSpPr/>
-          <p:nvPr/>
-        </p:nvSpPr>
-        <p:spPr>
-          <a:xfrm>
-            <a:off x="1042416" y="3566160"/>
+          <p:cNvPr id="25" name="Shape 23"/>
+          <p:cNvSpPr/>
+          <p:nvPr/>
+        </p:nvSpPr>
+        <p:spPr>
+          <a:xfrm>
+            <a:off x="6699352" y="3566160"/>
             <a:ext cx="4449928" cy="7315"/>
           </a:xfrm>
           <a:prstGeom prst="rect">
@@ -15346,13 +15396,175 @@
       </p:sp>
       <p:sp>
         <p:nvSpPr>
-          <p:cNvPr id="24" name="Shape 22"/>
-          <p:cNvSpPr/>
-          <p:nvPr/>
-        </p:nvSpPr>
-        <p:spPr>
-          <a:xfrm>
-            <a:off x="6699352" y="3566160"/>
+          <p:cNvPr id="26" name="Text 24"/>
+          <p:cNvSpPr/>
+          <p:nvPr/>
+        </p:nvSpPr>
+        <p:spPr>
+          <a:xfrm>
+            <a:off x="1042416" y="3621024"/>
+            <a:ext cx="2011680" cy="274320"/>
+          </a:xfrm>
+          <a:prstGeom prst="rect">
+            <a:avLst/>
+          </a:prstGeom>
+          <a:noFill/>
+          <a:ln/>
+        </p:spPr>
+        <p:txBody>
+          <a:bodyPr wrap="square" lIns="0" tIns="0" rIns="0" bIns="0" rtlCol="0" anchor="ctr"/>
+          <a:lstStyle/>
+          <a:p>
+            <a:pPr indent="0" marL="0">
+              <a:buNone/>
+            </a:pPr>
+            <a:r>
+              <a:rPr lang="en-US" sz="900" b="1" spc="160" kern="0" dirty="0">
+                <a:solidFill>
+                  <a:srgbClr val="9B9B9B"/>
+                </a:solidFill>
+                <a:latin typeface="Pretendard" pitchFamily="34" charset="0"/>
+                <a:ea typeface="Pretendard" pitchFamily="34" charset="-122"/>
+                <a:cs typeface="Pretendard" pitchFamily="34" charset="-120"/>
+              </a:rPr>
+              <a:t>개념</a:t>
+            </a:r>
+            <a:endParaRPr lang="en-US" sz="900" dirty="0"/>
+          </a:p>
+        </p:txBody>
+      </p:sp>
+      <p:sp>
+        <p:nvSpPr>
+          <p:cNvPr id="27" name="Text 25"/>
+          <p:cNvSpPr/>
+          <p:nvPr/>
+        </p:nvSpPr>
+        <p:spPr>
+          <a:xfrm>
+            <a:off x="1042416" y="3858768"/>
+            <a:ext cx="4449928" cy="329184"/>
+          </a:xfrm>
+          <a:prstGeom prst="rect">
+            <a:avLst/>
+          </a:prstGeom>
+          <a:noFill/>
+          <a:ln/>
+        </p:spPr>
+        <p:txBody>
+          <a:bodyPr wrap="square" lIns="0" tIns="0" rIns="0" bIns="0" rtlCol="0" anchor="t"/>
+          <a:lstStyle/>
+          <a:p>
+            <a:pPr indent="0" marL="0">
+              <a:lnSpc>
+                <a:spcPct val="120000"/>
+              </a:lnSpc>
+              <a:buNone/>
+            </a:pPr>
+            <a:r>
+              <a:rPr lang="en-US" sz="1150" dirty="0">
+                <a:solidFill>
+                  <a:srgbClr val="6E6E6E"/>
+                </a:solidFill>
+                <a:latin typeface="Pretendard" pitchFamily="34" charset="0"/>
+                <a:ea typeface="Pretendard" pitchFamily="34" charset="-122"/>
+                <a:cs typeface="Pretendard" pitchFamily="34" charset="-120"/>
+              </a:rPr>
+              <a:t>내가 정의한다</a:t>
+            </a:r>
+            <a:endParaRPr lang="en-US" sz="1150" dirty="0"/>
+          </a:p>
+        </p:txBody>
+      </p:sp>
+      <p:sp>
+        <p:nvSpPr>
+          <p:cNvPr id="28" name="Text 26"/>
+          <p:cNvSpPr/>
+          <p:nvPr/>
+        </p:nvSpPr>
+        <p:spPr>
+          <a:xfrm>
+            <a:off x="6699352" y="3621024"/>
+            <a:ext cx="2011680" cy="274320"/>
+          </a:xfrm>
+          <a:prstGeom prst="rect">
+            <a:avLst/>
+          </a:prstGeom>
+          <a:noFill/>
+          <a:ln/>
+        </p:spPr>
+        <p:txBody>
+          <a:bodyPr wrap="square" lIns="0" tIns="0" rIns="0" bIns="0" rtlCol="0" anchor="ctr"/>
+          <a:lstStyle/>
+          <a:p>
+            <a:pPr indent="0" marL="0">
+              <a:buNone/>
+            </a:pPr>
+            <a:r>
+              <a:rPr lang="en-US" sz="900" b="1" spc="160" kern="0" dirty="0">
+                <a:solidFill>
+                  <a:srgbClr val="111111"/>
+                </a:solidFill>
+                <a:latin typeface="Pretendard" pitchFamily="34" charset="0"/>
+                <a:ea typeface="Pretendard" pitchFamily="34" charset="-122"/>
+                <a:cs typeface="Pretendard" pitchFamily="34" charset="-120"/>
+              </a:rPr>
+              <a:t>개념</a:t>
+            </a:r>
+            <a:endParaRPr lang="en-US" sz="900" dirty="0"/>
+          </a:p>
+        </p:txBody>
+      </p:sp>
+      <p:sp>
+        <p:nvSpPr>
+          <p:cNvPr id="29" name="Text 27"/>
+          <p:cNvSpPr/>
+          <p:nvPr/>
+        </p:nvSpPr>
+        <p:spPr>
+          <a:xfrm>
+            <a:off x="6699352" y="3858768"/>
+            <a:ext cx="4449928" cy="329184"/>
+          </a:xfrm>
+          <a:prstGeom prst="rect">
+            <a:avLst/>
+          </a:prstGeom>
+          <a:noFill/>
+          <a:ln/>
+        </p:spPr>
+        <p:txBody>
+          <a:bodyPr wrap="square" lIns="0" tIns="0" rIns="0" bIns="0" rtlCol="0" anchor="t"/>
+          <a:lstStyle/>
+          <a:p>
+            <a:pPr indent="0" marL="0">
+              <a:lnSpc>
+                <a:spcPct val="120000"/>
+              </a:lnSpc>
+              <a:buNone/>
+            </a:pPr>
+            <a:r>
+              <a:rPr lang="en-US" sz="1150" b="1" dirty="0">
+                <a:solidFill>
+                  <a:srgbClr val="1F1F1F"/>
+                </a:solidFill>
+                <a:latin typeface="Pretendard" pitchFamily="34" charset="0"/>
+                <a:ea typeface="Pretendard" pitchFamily="34" charset="-122"/>
+                <a:cs typeface="Pretendard" pitchFamily="34" charset="-120"/>
+              </a:rPr>
+              <a:t>누구의 정의를 따르고 어디를 바꾸는지 밝힌다</a:t>
+            </a:r>
+            <a:endParaRPr lang="en-US" sz="1150" dirty="0"/>
+          </a:p>
+        </p:txBody>
+      </p:sp>
+      <p:sp>
+        <p:nvSpPr>
+          <p:cNvPr id="30" name="Shape 28"/>
+          <p:cNvSpPr/>
+          <p:nvPr/>
+        </p:nvSpPr>
+        <p:spPr>
+          <a:xfrm>
+            <a:off x="1042416" y="4151376"/>
             <a:ext cx="4449928" cy="7315"/>
           </a:xfrm>
           <a:prstGeom prst="rect">
@@ -15371,175 +15583,13 @@
       </p:sp>
       <p:sp>
         <p:nvSpPr>
-          <p:cNvPr id="25" name="Text 23"/>
-          <p:cNvSpPr/>
-          <p:nvPr/>
-        </p:nvSpPr>
-        <p:spPr>
-          <a:xfrm>
-            <a:off x="1042416" y="3621024"/>
-            <a:ext cx="2011680" cy="274320"/>
-          </a:xfrm>
-          <a:prstGeom prst="rect">
-            <a:avLst/>
-          </a:prstGeom>
-          <a:noFill/>
-          <a:ln/>
-        </p:spPr>
-        <p:txBody>
-          <a:bodyPr wrap="square" lIns="0" tIns="0" rIns="0" bIns="0" rtlCol="0" anchor="ctr"/>
-          <a:lstStyle/>
-          <a:p>
-            <a:pPr indent="0" marL="0">
-              <a:buNone/>
-            </a:pPr>
-            <a:r>
-              <a:rPr lang="en-US" sz="900" b="1" spc="160" kern="0" dirty="0">
-                <a:solidFill>
-                  <a:srgbClr val="111111"/>
-                </a:solidFill>
-                <a:latin typeface="Pretendard" pitchFamily="34" charset="0"/>
-                <a:ea typeface="Pretendard" pitchFamily="34" charset="-122"/>
-                <a:cs typeface="Pretendard" pitchFamily="34" charset="-120"/>
-              </a:rPr>
-              <a:t>개념</a:t>
-            </a:r>
-            <a:endParaRPr lang="en-US" sz="900" dirty="0"/>
-          </a:p>
-        </p:txBody>
-      </p:sp>
-      <p:sp>
-        <p:nvSpPr>
-          <p:cNvPr id="26" name="Text 24"/>
-          <p:cNvSpPr/>
-          <p:nvPr/>
-        </p:nvSpPr>
-        <p:spPr>
-          <a:xfrm>
-            <a:off x="1042416" y="3858768"/>
-            <a:ext cx="4449928" cy="329184"/>
-          </a:xfrm>
-          <a:prstGeom prst="rect">
-            <a:avLst/>
-          </a:prstGeom>
-          <a:noFill/>
-          <a:ln/>
-        </p:spPr>
-        <p:txBody>
-          <a:bodyPr wrap="square" lIns="0" tIns="0" rIns="0" bIns="0" rtlCol="0" anchor="t"/>
-          <a:lstStyle/>
-          <a:p>
-            <a:pPr indent="0" marL="0">
-              <a:lnSpc>
-                <a:spcPct val="120000"/>
-              </a:lnSpc>
-              <a:buNone/>
-            </a:pPr>
-            <a:r>
-              <a:rPr lang="en-US" sz="1150" dirty="0">
-                <a:solidFill>
-                  <a:srgbClr val="1F1F1F"/>
-                </a:solidFill>
-                <a:latin typeface="Pretendard" pitchFamily="34" charset="0"/>
-                <a:ea typeface="Pretendard" pitchFamily="34" charset="-122"/>
-                <a:cs typeface="Pretendard" pitchFamily="34" charset="-120"/>
-              </a:rPr>
-              <a:t>내가 정의한다</a:t>
-            </a:r>
-            <a:endParaRPr lang="en-US" sz="1150" dirty="0"/>
-          </a:p>
-        </p:txBody>
-      </p:sp>
-      <p:sp>
-        <p:nvSpPr>
-          <p:cNvPr id="27" name="Text 25"/>
-          <p:cNvSpPr/>
-          <p:nvPr/>
-        </p:nvSpPr>
-        <p:spPr>
-          <a:xfrm>
-            <a:off x="6699352" y="3621024"/>
-            <a:ext cx="2011680" cy="274320"/>
-          </a:xfrm>
-          <a:prstGeom prst="rect">
-            <a:avLst/>
-          </a:prstGeom>
-          <a:noFill/>
-          <a:ln/>
-        </p:spPr>
-        <p:txBody>
-          <a:bodyPr wrap="square" lIns="0" tIns="0" rIns="0" bIns="0" rtlCol="0" anchor="ctr"/>
-          <a:lstStyle/>
-          <a:p>
-            <a:pPr indent="0" marL="0">
-              <a:buNone/>
-            </a:pPr>
-            <a:r>
-              <a:rPr lang="en-US" sz="900" b="1" spc="160" kern="0" dirty="0">
-                <a:solidFill>
-                  <a:srgbClr val="9B9B9B"/>
-                </a:solidFill>
-                <a:latin typeface="Pretendard" pitchFamily="34" charset="0"/>
-                <a:ea typeface="Pretendard" pitchFamily="34" charset="-122"/>
-                <a:cs typeface="Pretendard" pitchFamily="34" charset="-120"/>
-              </a:rPr>
-              <a:t>개념</a:t>
-            </a:r>
-            <a:endParaRPr lang="en-US" sz="900" dirty="0"/>
-          </a:p>
-        </p:txBody>
-      </p:sp>
-      <p:sp>
-        <p:nvSpPr>
-          <p:cNvPr id="28" name="Text 26"/>
-          <p:cNvSpPr/>
-          <p:nvPr/>
-        </p:nvSpPr>
-        <p:spPr>
-          <a:xfrm>
-            <a:off x="6699352" y="3858768"/>
-            <a:ext cx="4449928" cy="329184"/>
-          </a:xfrm>
-          <a:prstGeom prst="rect">
-            <a:avLst/>
-          </a:prstGeom>
-          <a:noFill/>
-          <a:ln/>
-        </p:spPr>
-        <p:txBody>
-          <a:bodyPr wrap="square" lIns="0" tIns="0" rIns="0" bIns="0" rtlCol="0" anchor="t"/>
-          <a:lstStyle/>
-          <a:p>
-            <a:pPr indent="0" marL="0">
-              <a:lnSpc>
-                <a:spcPct val="120000"/>
-              </a:lnSpc>
-              <a:buNone/>
-            </a:pPr>
-            <a:r>
-              <a:rPr lang="en-US" sz="1150" dirty="0">
-                <a:solidFill>
-                  <a:srgbClr val="6E6E6E"/>
-                </a:solidFill>
-                <a:latin typeface="Pretendard" pitchFamily="34" charset="0"/>
-                <a:ea typeface="Pretendard" pitchFamily="34" charset="-122"/>
-                <a:cs typeface="Pretendard" pitchFamily="34" charset="-120"/>
-              </a:rPr>
-              <a:t>누구의 정의를 따르고 어디를 바꾸는지 밝힌다</a:t>
-            </a:r>
-            <a:endParaRPr lang="en-US" sz="1150" dirty="0"/>
-          </a:p>
-        </p:txBody>
-      </p:sp>
-      <p:sp>
-        <p:nvSpPr>
-          <p:cNvPr id="29" name="Shape 27"/>
-          <p:cNvSpPr/>
-          <p:nvPr/>
-        </p:nvSpPr>
-        <p:spPr>
-          <a:xfrm>
-            <a:off x="1042416" y="4151376"/>
+          <p:cNvPr id="31" name="Shape 29"/>
+          <p:cNvSpPr/>
+          <p:nvPr/>
+        </p:nvSpPr>
+        <p:spPr>
+          <a:xfrm>
+            <a:off x="6699352" y="4151376"/>
             <a:ext cx="4449928" cy="7315"/>
           </a:xfrm>
           <a:prstGeom prst="rect">
@@ -15558,14 +15608,243 @@
       </p:sp>
       <p:sp>
         <p:nvSpPr>
-          <p:cNvPr id="30" name="Shape 28"/>
-          <p:cNvSpPr/>
-          <p:nvPr/>
-        </p:nvSpPr>
-        <p:spPr>
-          <a:xfrm>
-            <a:off x="6699352" y="4151376"/>
-            <a:ext cx="4449928" cy="7315"/>
+          <p:cNvPr id="32" name="Text 30"/>
+          <p:cNvSpPr/>
+          <p:nvPr/>
+        </p:nvSpPr>
+        <p:spPr>
+          <a:xfrm>
+            <a:off x="1042416" y="4206240"/>
+            <a:ext cx="2011680" cy="274320"/>
+          </a:xfrm>
+          <a:prstGeom prst="rect">
+            <a:avLst/>
+          </a:prstGeom>
+          <a:noFill/>
+          <a:ln/>
+        </p:spPr>
+        <p:txBody>
+          <a:bodyPr wrap="square" lIns="0" tIns="0" rIns="0" bIns="0" rtlCol="0" anchor="ctr"/>
+          <a:lstStyle/>
+          <a:p>
+            <a:pPr indent="0" marL="0">
+              <a:buNone/>
+            </a:pPr>
+            <a:r>
+              <a:rPr lang="en-US" sz="900" b="1" spc="160" kern="0" dirty="0">
+                <a:solidFill>
+                  <a:srgbClr val="9B9B9B"/>
+                </a:solidFill>
+                <a:latin typeface="Pretendard" pitchFamily="34" charset="0"/>
+                <a:ea typeface="Pretendard" pitchFamily="34" charset="-122"/>
+                <a:cs typeface="Pretendard" pitchFamily="34" charset="-120"/>
+              </a:rPr>
+              <a:t>새로움</a:t>
+            </a:r>
+            <a:endParaRPr lang="en-US" sz="900" dirty="0"/>
+          </a:p>
+        </p:txBody>
+      </p:sp>
+      <p:sp>
+        <p:nvSpPr>
+          <p:cNvPr id="33" name="Text 31"/>
+          <p:cNvSpPr/>
+          <p:nvPr/>
+        </p:nvSpPr>
+        <p:spPr>
+          <a:xfrm>
+            <a:off x="1042416" y="4443984"/>
+            <a:ext cx="4449928" cy="329184"/>
+          </a:xfrm>
+          <a:prstGeom prst="rect">
+            <a:avLst/>
+          </a:prstGeom>
+          <a:noFill/>
+          <a:ln/>
+        </p:spPr>
+        <p:txBody>
+          <a:bodyPr wrap="square" lIns="0" tIns="0" rIns="0" bIns="0" rtlCol="0" anchor="t"/>
+          <a:lstStyle/>
+          <a:p>
+            <a:pPr indent="0" marL="0">
+              <a:lnSpc>
+                <a:spcPct val="120000"/>
+              </a:lnSpc>
+              <a:buNone/>
+            </a:pPr>
+            <a:r>
+              <a:rPr lang="en-US" sz="1150" dirty="0">
+                <a:solidFill>
+                  <a:srgbClr val="6E6E6E"/>
+                </a:solidFill>
+                <a:latin typeface="Pretendard" pitchFamily="34" charset="0"/>
+                <a:ea typeface="Pretendard" pitchFamily="34" charset="-122"/>
+                <a:cs typeface="Pretendard" pitchFamily="34" charset="-120"/>
+              </a:rPr>
+              <a:t>새롭다고 주장한다</a:t>
+            </a:r>
+            <a:endParaRPr lang="en-US" sz="1150" dirty="0"/>
+          </a:p>
+        </p:txBody>
+      </p:sp>
+      <p:sp>
+        <p:nvSpPr>
+          <p:cNvPr id="34" name="Text 32"/>
+          <p:cNvSpPr/>
+          <p:nvPr/>
+        </p:nvSpPr>
+        <p:spPr>
+          <a:xfrm>
+            <a:off x="6699352" y="4206240"/>
+            <a:ext cx="2011680" cy="274320"/>
+          </a:xfrm>
+          <a:prstGeom prst="rect">
+            <a:avLst/>
+          </a:prstGeom>
+          <a:noFill/>
+          <a:ln/>
+        </p:spPr>
+        <p:txBody>
+          <a:bodyPr wrap="square" lIns="0" tIns="0" rIns="0" bIns="0" rtlCol="0" anchor="ctr"/>
+          <a:lstStyle/>
+          <a:p>
+            <a:pPr indent="0" marL="0">
+              <a:buNone/>
+            </a:pPr>
+            <a:r>
+              <a:rPr lang="en-US" sz="900" b="1" spc="160" kern="0" dirty="0">
+                <a:solidFill>
+                  <a:srgbClr val="111111"/>
+                </a:solidFill>
+                <a:latin typeface="Pretendard" pitchFamily="34" charset="0"/>
+                <a:ea typeface="Pretendard" pitchFamily="34" charset="-122"/>
+                <a:cs typeface="Pretendard" pitchFamily="34" charset="-120"/>
+              </a:rPr>
+              <a:t>새로움</a:t>
+            </a:r>
+            <a:endParaRPr lang="en-US" sz="900" dirty="0"/>
+          </a:p>
+        </p:txBody>
+      </p:sp>
+      <p:sp>
+        <p:nvSpPr>
+          <p:cNvPr id="35" name="Text 33"/>
+          <p:cNvSpPr/>
+          <p:nvPr/>
+        </p:nvSpPr>
+        <p:spPr>
+          <a:xfrm>
+            <a:off x="6699352" y="4443984"/>
+            <a:ext cx="4449928" cy="329184"/>
+          </a:xfrm>
+          <a:prstGeom prst="rect">
+            <a:avLst/>
+          </a:prstGeom>
+          <a:noFill/>
+          <a:ln/>
+        </p:spPr>
+        <p:txBody>
+          <a:bodyPr wrap="square" lIns="0" tIns="0" rIns="0" bIns="0" rtlCol="0" anchor="t"/>
+          <a:lstStyle/>
+          <a:p>
+            <a:pPr indent="0" marL="0">
+              <a:lnSpc>
+                <a:spcPct val="120000"/>
+              </a:lnSpc>
+              <a:buNone/>
+            </a:pPr>
+            <a:r>
+              <a:rPr lang="en-US" sz="1150" b="1" dirty="0">
+                <a:solidFill>
+                  <a:srgbClr val="1F1F1F"/>
+                </a:solidFill>
+                <a:latin typeface="Pretendard" pitchFamily="34" charset="0"/>
+                <a:ea typeface="Pretendard" pitchFamily="34" charset="-122"/>
+                <a:cs typeface="Pretendard" pitchFamily="34" charset="-120"/>
+              </a:rPr>
+              <a:t>새로움이 어디에 있는지 가리킨다</a:t>
+            </a:r>
+            <a:endParaRPr lang="en-US" sz="1150" dirty="0"/>
+          </a:p>
+        </p:txBody>
+      </p:sp>
+      <p:sp>
+        <p:nvSpPr>
+          <p:cNvPr id="36" name="Shape 34"/>
+          <p:cNvSpPr/>
+          <p:nvPr/>
+        </p:nvSpPr>
+        <p:spPr>
+          <a:xfrm>
+            <a:off x="640080" y="5010912"/>
+            <a:ext cx="10911535" cy="7315"/>
+          </a:xfrm>
+          <a:prstGeom prst="rect">
+            <a:avLst/>
+          </a:prstGeom>
+          <a:solidFill>
+            <a:srgbClr val="111111"/>
+          </a:solidFill>
+          <a:ln w="12700">
+            <a:solidFill>
+              <a:srgbClr val="111111"/>
+            </a:solidFill>
+            <a:prstDash val="solid"/>
+          </a:ln>
+        </p:spPr>
+      </p:sp>
+      <p:sp>
+        <p:nvSpPr>
+          <p:cNvPr id="37" name="Text 35"/>
+          <p:cNvSpPr/>
+          <p:nvPr/>
+        </p:nvSpPr>
+        <p:spPr>
+          <a:xfrm>
+            <a:off x="640080" y="5120640"/>
+            <a:ext cx="10911535" cy="402336"/>
+          </a:xfrm>
+          <a:prstGeom prst="rect">
+            <a:avLst/>
+          </a:prstGeom>
+          <a:noFill/>
+          <a:ln/>
+        </p:spPr>
+        <p:txBody>
+          <a:bodyPr wrap="square" lIns="0" tIns="0" rIns="0" bIns="0" rtlCol="0" anchor="t"/>
+          <a:lstStyle/>
+          <a:p>
+            <a:pPr indent="0" marL="0">
+              <a:lnSpc>
+                <a:spcPct val="120000"/>
+              </a:lnSpc>
+              <a:buNone/>
+            </a:pPr>
+            <a:r>
+              <a:rPr lang="en-US" sz="1300" b="1" dirty="0">
+                <a:solidFill>
+                  <a:srgbClr val="111111"/>
+                </a:solidFill>
+                <a:latin typeface="Pretendard" pitchFamily="34" charset="0"/>
+                <a:ea typeface="Pretendard" pitchFamily="34" charset="-122"/>
+                <a:cs typeface="Pretendard" pitchFamily="34" charset="-120"/>
+              </a:rPr>
+              <a:t>왼쪽이 틀린 글은 아닙니다. 다만 물어보면 답이 없어서 심사에서 방어가 되지 않습니다.</a:t>
+            </a:r>
+            <a:endParaRPr lang="en-US" sz="1300" dirty="0"/>
+          </a:p>
+        </p:txBody>
+      </p:sp>
+      <p:sp>
+        <p:nvSpPr>
+          <p:cNvPr id="38" name="Shape 36"/>
+          <p:cNvSpPr/>
+          <p:nvPr/>
+        </p:nvSpPr>
+        <p:spPr>
+          <a:xfrm>
+            <a:off x="640080" y="6291072"/>
+            <a:ext cx="10911535" cy="7315"/>
           </a:xfrm>
           <a:prstGeom prst="rect">
             <a:avLst/>
@@ -15583,261 +15862,7 @@
       </p:sp>
       <p:sp>
         <p:nvSpPr>
-          <p:cNvPr id="31" name="Text 29"/>
-          <p:cNvSpPr/>
-          <p:nvPr/>
-        </p:nvSpPr>
-        <p:spPr>
-          <a:xfrm>
-            <a:off x="1042416" y="4206240"/>
-            <a:ext cx="2011680" cy="274320"/>
-          </a:xfrm>
-          <a:prstGeom prst="rect">
-            <a:avLst/>
-          </a:prstGeom>
-          <a:noFill/>
-          <a:ln/>
-        </p:spPr>
-        <p:txBody>
-          <a:bodyPr wrap="square" lIns="0" tIns="0" rIns="0" bIns="0" rtlCol="0" anchor="ctr"/>
-          <a:lstStyle/>
-          <a:p>
-            <a:pPr indent="0" marL="0">
-              <a:buNone/>
-            </a:pPr>
-            <a:r>
-              <a:rPr lang="en-US" sz="900" b="1" spc="160" kern="0" dirty="0">
-                <a:solidFill>
-                  <a:srgbClr val="111111"/>
-                </a:solidFill>
-                <a:latin typeface="Pretendard" pitchFamily="34" charset="0"/>
-                <a:ea typeface="Pretendard" pitchFamily="34" charset="-122"/>
-                <a:cs typeface="Pretendard" pitchFamily="34" charset="-120"/>
-              </a:rPr>
-              <a:t>새로움</a:t>
-            </a:r>
-            <a:endParaRPr lang="en-US" sz="900" dirty="0"/>
-          </a:p>
-        </p:txBody>
-      </p:sp>
-      <p:sp>
-        <p:nvSpPr>
-          <p:cNvPr id="32" name="Text 30"/>
-          <p:cNvSpPr/>
-          <p:nvPr/>
-        </p:nvSpPr>
-        <p:spPr>
-          <a:xfrm>
-            <a:off x="1042416" y="4443984"/>
-            <a:ext cx="4449928" cy="329184"/>
-          </a:xfrm>
-          <a:prstGeom prst="rect">
-            <a:avLst/>
-          </a:prstGeom>
-          <a:noFill/>
-          <a:ln/>
-        </p:spPr>
-        <p:txBody>
-          <a:bodyPr wrap="square" lIns="0" tIns="0" rIns="0" bIns="0" rtlCol="0" anchor="t"/>
-          <a:lstStyle/>
-          <a:p>
-            <a:pPr indent="0" marL="0">
-              <a:lnSpc>
-                <a:spcPct val="120000"/>
-              </a:lnSpc>
-              <a:buNone/>
-            </a:pPr>
-            <a:r>
-              <a:rPr lang="en-US" sz="1150" dirty="0">
-                <a:solidFill>
-                  <a:srgbClr val="1F1F1F"/>
-                </a:solidFill>
-                <a:latin typeface="Pretendard" pitchFamily="34" charset="0"/>
-                <a:ea typeface="Pretendard" pitchFamily="34" charset="-122"/>
-                <a:cs typeface="Pretendard" pitchFamily="34" charset="-120"/>
-              </a:rPr>
-              <a:t>새롭다고 주장한다</a:t>
-            </a:r>
-            <a:endParaRPr lang="en-US" sz="1150" dirty="0"/>
-          </a:p>
-        </p:txBody>
-      </p:sp>
-      <p:sp>
-        <p:nvSpPr>
-          <p:cNvPr id="33" name="Text 31"/>
-          <p:cNvSpPr/>
-          <p:nvPr/>
-        </p:nvSpPr>
-        <p:spPr>
-          <a:xfrm>
-            <a:off x="6699352" y="4206240"/>
-            <a:ext cx="2011680" cy="274320"/>
-          </a:xfrm>
-          <a:prstGeom prst="rect">
-            <a:avLst/>
-          </a:prstGeom>
-          <a:noFill/>
-          <a:ln/>
-        </p:spPr>
-        <p:txBody>
-          <a:bodyPr wrap="square" lIns="0" tIns="0" rIns="0" bIns="0" rtlCol="0" anchor="ctr"/>
-          <a:lstStyle/>
-          <a:p>
-            <a:pPr indent="0" marL="0">
-              <a:buNone/>
-            </a:pPr>
-            <a:r>
-              <a:rPr lang="en-US" sz="900" b="1" spc="160" kern="0" dirty="0">
-                <a:solidFill>
-                  <a:srgbClr val="9B9B9B"/>
-                </a:solidFill>
-                <a:latin typeface="Pretendard" pitchFamily="34" charset="0"/>
-                <a:ea typeface="Pretendard" pitchFamily="34" charset="-122"/>
-                <a:cs typeface="Pretendard" pitchFamily="34" charset="-120"/>
-              </a:rPr>
-              <a:t>새로움</a:t>
-            </a:r>
-            <a:endParaRPr lang="en-US" sz="900" dirty="0"/>
-          </a:p>
-        </p:txBody>
-      </p:sp>
-      <p:sp>
-        <p:nvSpPr>
-          <p:cNvPr id="34" name="Text 32"/>
-          <p:cNvSpPr/>
-          <p:nvPr/>
-        </p:nvSpPr>
-        <p:spPr>
-          <a:xfrm>
-            <a:off x="6699352" y="4443984"/>
-            <a:ext cx="4449928" cy="329184"/>
-          </a:xfrm>
-          <a:prstGeom prst="rect">
-            <a:avLst/>
-          </a:prstGeom>
-          <a:noFill/>
-          <a:ln/>
-        </p:spPr>
-        <p:txBody>
-          <a:bodyPr wrap="square" lIns="0" tIns="0" rIns="0" bIns="0" rtlCol="0" anchor="t"/>
-          <a:lstStyle/>
-          <a:p>
-            <a:pPr indent="0" marL="0">
-              <a:lnSpc>
-                <a:spcPct val="120000"/>
-              </a:lnSpc>
-              <a:buNone/>
-            </a:pPr>
-            <a:r>
-              <a:rPr lang="en-US" sz="1150" dirty="0">
-                <a:solidFill>
-                  <a:srgbClr val="6E6E6E"/>
-                </a:solidFill>
-                <a:latin typeface="Pretendard" pitchFamily="34" charset="0"/>
-                <a:ea typeface="Pretendard" pitchFamily="34" charset="-122"/>
-                <a:cs typeface="Pretendard" pitchFamily="34" charset="-120"/>
-              </a:rPr>
-              <a:t>새로움이 어디에 있는지 가리킨다</a:t>
-            </a:r>
-            <a:endParaRPr lang="en-US" sz="1150" dirty="0"/>
-          </a:p>
-        </p:txBody>
-      </p:sp>
-      <p:sp>
-        <p:nvSpPr>
-          <p:cNvPr id="35" name="Shape 33"/>
-          <p:cNvSpPr/>
-          <p:nvPr/>
-        </p:nvSpPr>
-        <p:spPr>
-          <a:xfrm>
-            <a:off x="640080" y="5010912"/>
-            <a:ext cx="10911535" cy="7315"/>
-          </a:xfrm>
-          <a:prstGeom prst="rect">
-            <a:avLst/>
-          </a:prstGeom>
-          <a:solidFill>
-            <a:srgbClr val="111111"/>
-          </a:solidFill>
-          <a:ln w="12700">
-            <a:solidFill>
-              <a:srgbClr val="111111"/>
-            </a:solidFill>
-            <a:prstDash val="solid"/>
-          </a:ln>
-        </p:spPr>
-      </p:sp>
-      <p:sp>
-        <p:nvSpPr>
-          <p:cNvPr id="36" name="Text 34"/>
-          <p:cNvSpPr/>
-          <p:nvPr/>
-        </p:nvSpPr>
-        <p:spPr>
-          <a:xfrm>
-            <a:off x="640080" y="5120640"/>
-            <a:ext cx="10911535" cy="402336"/>
-          </a:xfrm>
-          <a:prstGeom prst="rect">
-            <a:avLst/>
-          </a:prstGeom>
-          <a:noFill/>
-          <a:ln/>
-        </p:spPr>
-        <p:txBody>
-          <a:bodyPr wrap="square" lIns="0" tIns="0" rIns="0" bIns="0" rtlCol="0" anchor="t"/>
-          <a:lstStyle/>
-          <a:p>
-            <a:pPr indent="0" marL="0">
-              <a:lnSpc>
-                <a:spcPct val="120000"/>
-              </a:lnSpc>
-              <a:buNone/>
-            </a:pPr>
-            <a:r>
-              <a:rPr lang="en-US" sz="1300" b="1" dirty="0">
-                <a:solidFill>
-                  <a:srgbClr val="111111"/>
-                </a:solidFill>
-                <a:latin typeface="Pretendard" pitchFamily="34" charset="0"/>
-                <a:ea typeface="Pretendard" pitchFamily="34" charset="-122"/>
-                <a:cs typeface="Pretendard" pitchFamily="34" charset="-120"/>
-              </a:rPr>
-              <a:t>왼쪽이 틀린 글은 아닙니다. 다만 물어보면 답이 없어서 심사에서 방어가 되지 않습니다.</a:t>
-            </a:r>
-            <a:endParaRPr lang="en-US" sz="1300" dirty="0"/>
-          </a:p>
-        </p:txBody>
-      </p:sp>
-      <p:sp>
-        <p:nvSpPr>
-          <p:cNvPr id="37" name="Shape 35"/>
-          <p:cNvSpPr/>
-          <p:nvPr/>
-        </p:nvSpPr>
-        <p:spPr>
-          <a:xfrm>
-            <a:off x="640080" y="6291072"/>
-            <a:ext cx="10911535" cy="7315"/>
-          </a:xfrm>
-          <a:prstGeom prst="rect">
-            <a:avLst/>
-          </a:prstGeom>
-          <a:solidFill>
-            <a:srgbClr val="DCDCDC"/>
-          </a:solidFill>
-          <a:ln w="12700">
-            <a:solidFill>
-              <a:srgbClr val="DCDCDC"/>
-            </a:solidFill>
-            <a:prstDash val="solid"/>
-          </a:ln>
-        </p:spPr>
-      </p:sp>
-      <p:sp>
-        <p:nvSpPr>
-          <p:cNvPr id="38" name="Text 36"/>
+          <p:cNvPr id="39" name="Text 37"/>
           <p:cNvSpPr/>
           <p:nvPr/>
         </p:nvSpPr>
@@ -15876,7 +15901,7 @@
       </p:sp>
       <p:sp>
         <p:nvSpPr>
-          <p:cNvPr id="39" name="Text 37"/>
+          <p:cNvPr id="40" name="Text 38"/>
           <p:cNvSpPr/>
           <p:nvPr/>
         </p:nvSpPr>
